--- a/images/2026-01-10-red-black-tree/ppt.pptx
+++ b/images/2026-01-10-red-black-tree/ppt.pptx
@@ -105,6 +105,11 @@
       </a:defRPr>
     </a:lvl9pPr>
   </p:defaultTextStyle>
+  <p:extLst>
+    <p:ext uri="{EFAFB233-063F-42B5-8137-9DF3F51BA10A}">
+      <p15:sldGuideLst xmlns:p15="http://schemas.microsoft.com/office/powerpoint/2012/main"/>
+    </p:ext>
+  </p:extLst>
 </p:presentation>
 </file>
 
@@ -239,7 +244,7 @@
           <a:p>
             <a:fld id="{D4E0DEBB-0D6B-4341-BB60-B32C337DADCF}" type="datetimeFigureOut">
               <a:rPr lang="en-US" smtClean="0"/>
-              <a:t>1/25/2026</a:t>
+              <a:t>1/26/2026</a:t>
             </a:fld>
             <a:endParaRPr lang="en-US"/>
           </a:p>
@@ -409,7 +414,7 @@
           <a:p>
             <a:fld id="{D4E0DEBB-0D6B-4341-BB60-B32C337DADCF}" type="datetimeFigureOut">
               <a:rPr lang="en-US" smtClean="0"/>
-              <a:t>1/25/2026</a:t>
+              <a:t>1/26/2026</a:t>
             </a:fld>
             <a:endParaRPr lang="en-US"/>
           </a:p>
@@ -589,7 +594,7 @@
           <a:p>
             <a:fld id="{D4E0DEBB-0D6B-4341-BB60-B32C337DADCF}" type="datetimeFigureOut">
               <a:rPr lang="en-US" smtClean="0"/>
-              <a:t>1/25/2026</a:t>
+              <a:t>1/26/2026</a:t>
             </a:fld>
             <a:endParaRPr lang="en-US"/>
           </a:p>
@@ -759,7 +764,7 @@
           <a:p>
             <a:fld id="{D4E0DEBB-0D6B-4341-BB60-B32C337DADCF}" type="datetimeFigureOut">
               <a:rPr lang="en-US" smtClean="0"/>
-              <a:t>1/25/2026</a:t>
+              <a:t>1/26/2026</a:t>
             </a:fld>
             <a:endParaRPr lang="en-US"/>
           </a:p>
@@ -1005,7 +1010,7 @@
           <a:p>
             <a:fld id="{D4E0DEBB-0D6B-4341-BB60-B32C337DADCF}" type="datetimeFigureOut">
               <a:rPr lang="en-US" smtClean="0"/>
-              <a:t>1/25/2026</a:t>
+              <a:t>1/26/2026</a:t>
             </a:fld>
             <a:endParaRPr lang="en-US"/>
           </a:p>
@@ -1237,7 +1242,7 @@
           <a:p>
             <a:fld id="{D4E0DEBB-0D6B-4341-BB60-B32C337DADCF}" type="datetimeFigureOut">
               <a:rPr lang="en-US" smtClean="0"/>
-              <a:t>1/25/2026</a:t>
+              <a:t>1/26/2026</a:t>
             </a:fld>
             <a:endParaRPr lang="en-US"/>
           </a:p>
@@ -1604,7 +1609,7 @@
           <a:p>
             <a:fld id="{D4E0DEBB-0D6B-4341-BB60-B32C337DADCF}" type="datetimeFigureOut">
               <a:rPr lang="en-US" smtClean="0"/>
-              <a:t>1/25/2026</a:t>
+              <a:t>1/26/2026</a:t>
             </a:fld>
             <a:endParaRPr lang="en-US"/>
           </a:p>
@@ -1722,7 +1727,7 @@
           <a:p>
             <a:fld id="{D4E0DEBB-0D6B-4341-BB60-B32C337DADCF}" type="datetimeFigureOut">
               <a:rPr lang="en-US" smtClean="0"/>
-              <a:t>1/25/2026</a:t>
+              <a:t>1/26/2026</a:t>
             </a:fld>
             <a:endParaRPr lang="en-US"/>
           </a:p>
@@ -1817,7 +1822,7 @@
           <a:p>
             <a:fld id="{D4E0DEBB-0D6B-4341-BB60-B32C337DADCF}" type="datetimeFigureOut">
               <a:rPr lang="en-US" smtClean="0"/>
-              <a:t>1/25/2026</a:t>
+              <a:t>1/26/2026</a:t>
             </a:fld>
             <a:endParaRPr lang="en-US"/>
           </a:p>
@@ -2094,7 +2099,7 @@
           <a:p>
             <a:fld id="{D4E0DEBB-0D6B-4341-BB60-B32C337DADCF}" type="datetimeFigureOut">
               <a:rPr lang="en-US" smtClean="0"/>
-              <a:t>1/25/2026</a:t>
+              <a:t>1/26/2026</a:t>
             </a:fld>
             <a:endParaRPr lang="en-US"/>
           </a:p>
@@ -2351,7 +2356,7 @@
           <a:p>
             <a:fld id="{D4E0DEBB-0D6B-4341-BB60-B32C337DADCF}" type="datetimeFigureOut">
               <a:rPr lang="en-US" smtClean="0"/>
-              <a:t>1/25/2026</a:t>
+              <a:t>1/26/2026</a:t>
             </a:fld>
             <a:endParaRPr lang="en-US"/>
           </a:p>
@@ -2564,7 +2569,7 @@
           <a:p>
             <a:fld id="{D4E0DEBB-0D6B-4341-BB60-B32C337DADCF}" type="datetimeFigureOut">
               <a:rPr lang="en-US" smtClean="0"/>
-              <a:t>1/25/2026</a:t>
+              <a:t>1/26/2026</a:t>
             </a:fld>
             <a:endParaRPr lang="en-US"/>
           </a:p>
@@ -2969,12 +2974,461 @@
           <a:chExt cx="0" cy="0"/>
         </a:xfrm>
       </p:grpSpPr>
+      <p:sp>
+        <p:nvSpPr>
+          <p:cNvPr id="32" name="Oval 31">
+            <a:extLst>
+              <a:ext uri="{FF2B5EF4-FFF2-40B4-BE49-F238E27FC236}">
+                <a16:creationId xmlns:a16="http://schemas.microsoft.com/office/drawing/2014/main" id="{17E7773B-29E7-91CC-1328-D84E1DD1E0CE}"/>
+              </a:ext>
+            </a:extLst>
+          </p:cNvPr>
+          <p:cNvSpPr/>
+          <p:nvPr/>
+        </p:nvSpPr>
+        <p:spPr>
+          <a:xfrm>
+            <a:off x="2144959" y="1905717"/>
+            <a:ext cx="696637" cy="696637"/>
+          </a:xfrm>
+          <a:prstGeom prst="ellipse">
+            <a:avLst/>
+          </a:prstGeom>
+          <a:solidFill>
+            <a:schemeClr val="tx1"/>
+          </a:solidFill>
+        </p:spPr>
+        <p:style>
+          <a:lnRef idx="2">
+            <a:schemeClr val="accent1">
+              <a:shade val="15000"/>
+            </a:schemeClr>
+          </a:lnRef>
+          <a:fillRef idx="1">
+            <a:schemeClr val="accent1"/>
+          </a:fillRef>
+          <a:effectRef idx="0">
+            <a:schemeClr val="accent1"/>
+          </a:effectRef>
+          <a:fontRef idx="minor">
+            <a:schemeClr val="lt1"/>
+          </a:fontRef>
+        </p:style>
+        <p:txBody>
+          <a:bodyPr rtlCol="0" anchor="ctr"/>
+          <a:lstStyle/>
+          <a:p>
+            <a:pPr algn="ctr"/>
+            <a:r>
+              <a:rPr lang="en-US" sz="4800" dirty="0"/>
+              <a:t>G</a:t>
+            </a:r>
+          </a:p>
+        </p:txBody>
+      </p:sp>
+      <p:sp>
+        <p:nvSpPr>
+          <p:cNvPr id="33" name="Oval 32">
+            <a:extLst>
+              <a:ext uri="{FF2B5EF4-FFF2-40B4-BE49-F238E27FC236}">
+                <a16:creationId xmlns:a16="http://schemas.microsoft.com/office/drawing/2014/main" id="{F633009A-CF9B-E185-BF6C-497A2173B31D}"/>
+              </a:ext>
+            </a:extLst>
+          </p:cNvPr>
+          <p:cNvSpPr/>
+          <p:nvPr/>
+        </p:nvSpPr>
+        <p:spPr>
+          <a:xfrm>
+            <a:off x="1665903" y="2776590"/>
+            <a:ext cx="696637" cy="696637"/>
+          </a:xfrm>
+          <a:prstGeom prst="ellipse">
+            <a:avLst/>
+          </a:prstGeom>
+          <a:solidFill>
+            <a:srgbClr val="FF0000"/>
+          </a:solidFill>
+        </p:spPr>
+        <p:style>
+          <a:lnRef idx="2">
+            <a:schemeClr val="accent1">
+              <a:shade val="15000"/>
+            </a:schemeClr>
+          </a:lnRef>
+          <a:fillRef idx="1">
+            <a:schemeClr val="accent1"/>
+          </a:fillRef>
+          <a:effectRef idx="0">
+            <a:schemeClr val="accent1"/>
+          </a:effectRef>
+          <a:fontRef idx="minor">
+            <a:schemeClr val="lt1"/>
+          </a:fontRef>
+        </p:style>
+        <p:txBody>
+          <a:bodyPr rtlCol="0" anchor="ctr"/>
+          <a:lstStyle/>
+          <a:p>
+            <a:pPr algn="ctr"/>
+            <a:r>
+              <a:rPr lang="en-US" sz="4800" dirty="0"/>
+              <a:t>P</a:t>
+            </a:r>
+          </a:p>
+        </p:txBody>
+      </p:sp>
+      <p:sp>
+        <p:nvSpPr>
+          <p:cNvPr id="34" name="Oval 33">
+            <a:extLst>
+              <a:ext uri="{FF2B5EF4-FFF2-40B4-BE49-F238E27FC236}">
+                <a16:creationId xmlns:a16="http://schemas.microsoft.com/office/drawing/2014/main" id="{9FCB32AA-D11A-CA31-77B9-6CB4E05A35B7}"/>
+              </a:ext>
+            </a:extLst>
+          </p:cNvPr>
+          <p:cNvSpPr/>
+          <p:nvPr/>
+        </p:nvSpPr>
+        <p:spPr>
+          <a:xfrm>
+            <a:off x="969266" y="3599472"/>
+            <a:ext cx="696637" cy="696637"/>
+          </a:xfrm>
+          <a:prstGeom prst="ellipse">
+            <a:avLst/>
+          </a:prstGeom>
+          <a:solidFill>
+            <a:srgbClr val="FF0000"/>
+          </a:solidFill>
+        </p:spPr>
+        <p:style>
+          <a:lnRef idx="2">
+            <a:schemeClr val="accent1">
+              <a:shade val="15000"/>
+            </a:schemeClr>
+          </a:lnRef>
+          <a:fillRef idx="1">
+            <a:schemeClr val="accent1"/>
+          </a:fillRef>
+          <a:effectRef idx="0">
+            <a:schemeClr val="accent1"/>
+          </a:effectRef>
+          <a:fontRef idx="minor">
+            <a:schemeClr val="lt1"/>
+          </a:fontRef>
+        </p:style>
+        <p:txBody>
+          <a:bodyPr rtlCol="0" anchor="ctr"/>
+          <a:lstStyle/>
+          <a:p>
+            <a:pPr algn="ctr"/>
+            <a:r>
+              <a:rPr lang="en-US" sz="4800" dirty="0"/>
+              <a:t>N</a:t>
+            </a:r>
+          </a:p>
+        </p:txBody>
+      </p:sp>
+      <p:sp>
+        <p:nvSpPr>
+          <p:cNvPr id="35" name="Oval 34">
+            <a:extLst>
+              <a:ext uri="{FF2B5EF4-FFF2-40B4-BE49-F238E27FC236}">
+                <a16:creationId xmlns:a16="http://schemas.microsoft.com/office/drawing/2014/main" id="{2742E342-4D0E-EC2B-AB3F-A55306F8CF02}"/>
+              </a:ext>
+            </a:extLst>
+          </p:cNvPr>
+          <p:cNvSpPr/>
+          <p:nvPr/>
+        </p:nvSpPr>
+        <p:spPr>
+          <a:xfrm>
+            <a:off x="2841595" y="2744002"/>
+            <a:ext cx="696637" cy="696637"/>
+          </a:xfrm>
+          <a:prstGeom prst="ellipse">
+            <a:avLst/>
+          </a:prstGeom>
+          <a:solidFill>
+            <a:schemeClr val="tx1"/>
+          </a:solidFill>
+        </p:spPr>
+        <p:style>
+          <a:lnRef idx="2">
+            <a:schemeClr val="accent1">
+              <a:shade val="15000"/>
+            </a:schemeClr>
+          </a:lnRef>
+          <a:fillRef idx="1">
+            <a:schemeClr val="accent1"/>
+          </a:fillRef>
+          <a:effectRef idx="0">
+            <a:schemeClr val="accent1"/>
+          </a:effectRef>
+          <a:fontRef idx="minor">
+            <a:schemeClr val="lt1"/>
+          </a:fontRef>
+        </p:style>
+        <p:txBody>
+          <a:bodyPr rtlCol="0" anchor="ctr"/>
+          <a:lstStyle/>
+          <a:p>
+            <a:pPr algn="ctr"/>
+            <a:r>
+              <a:rPr lang="en-US" sz="4800" dirty="0"/>
+              <a:t>U</a:t>
+            </a:r>
+          </a:p>
+        </p:txBody>
+      </p:sp>
+      <p:cxnSp>
+        <p:nvCxnSpPr>
+          <p:cNvPr id="37" name="Straight Connector 36">
+            <a:extLst>
+              <a:ext uri="{FF2B5EF4-FFF2-40B4-BE49-F238E27FC236}">
+                <a16:creationId xmlns:a16="http://schemas.microsoft.com/office/drawing/2014/main" id="{6C7FAFEC-CE48-31F1-1796-37B1268C03C7}"/>
+              </a:ext>
+            </a:extLst>
+          </p:cNvPr>
+          <p:cNvCxnSpPr>
+            <a:cxnSpLocks/>
+            <a:stCxn id="32" idx="3"/>
+            <a:endCxn id="33" idx="0"/>
+          </p:cNvCxnSpPr>
+          <p:nvPr/>
+        </p:nvCxnSpPr>
+        <p:spPr>
+          <a:xfrm flipH="1">
+            <a:off x="2014222" y="2500333"/>
+            <a:ext cx="232757" cy="276256"/>
+          </a:xfrm>
+          <a:prstGeom prst="line">
+            <a:avLst/>
+          </a:prstGeom>
+          <a:ln>
+            <a:solidFill>
+              <a:schemeClr val="accent1"/>
+            </a:solidFill>
+          </a:ln>
+        </p:spPr>
+        <p:style>
+          <a:lnRef idx="1">
+            <a:schemeClr val="dk1"/>
+          </a:lnRef>
+          <a:fillRef idx="0">
+            <a:schemeClr val="dk1"/>
+          </a:fillRef>
+          <a:effectRef idx="0">
+            <a:schemeClr val="dk1"/>
+          </a:effectRef>
+          <a:fontRef idx="minor">
+            <a:schemeClr val="tx1"/>
+          </a:fontRef>
+        </p:style>
+      </p:cxnSp>
+      <p:cxnSp>
+        <p:nvCxnSpPr>
+          <p:cNvPr id="38" name="Straight Connector 37">
+            <a:extLst>
+              <a:ext uri="{FF2B5EF4-FFF2-40B4-BE49-F238E27FC236}">
+                <a16:creationId xmlns:a16="http://schemas.microsoft.com/office/drawing/2014/main" id="{FD78B819-EAE6-AC81-5D01-A409CFEE25D5}"/>
+              </a:ext>
+            </a:extLst>
+          </p:cNvPr>
+          <p:cNvCxnSpPr>
+            <a:stCxn id="32" idx="5"/>
+            <a:endCxn id="35" idx="1"/>
+          </p:cNvCxnSpPr>
+          <p:nvPr/>
+        </p:nvCxnSpPr>
+        <p:spPr>
+          <a:xfrm>
+            <a:off x="2739577" y="2500332"/>
+            <a:ext cx="204038" cy="345689"/>
+          </a:xfrm>
+          <a:prstGeom prst="line">
+            <a:avLst/>
+          </a:prstGeom>
+        </p:spPr>
+        <p:style>
+          <a:lnRef idx="1">
+            <a:schemeClr val="accent1"/>
+          </a:lnRef>
+          <a:fillRef idx="0">
+            <a:schemeClr val="accent1"/>
+          </a:fillRef>
+          <a:effectRef idx="0">
+            <a:schemeClr val="accent1"/>
+          </a:effectRef>
+          <a:fontRef idx="minor">
+            <a:schemeClr val="tx1"/>
+          </a:fontRef>
+        </p:style>
+      </p:cxnSp>
+      <p:cxnSp>
+        <p:nvCxnSpPr>
+          <p:cNvPr id="39" name="Straight Connector 38">
+            <a:extLst>
+              <a:ext uri="{FF2B5EF4-FFF2-40B4-BE49-F238E27FC236}">
+                <a16:creationId xmlns:a16="http://schemas.microsoft.com/office/drawing/2014/main" id="{5DED9CA0-3A90-800A-C8A3-F0D7DD86E450}"/>
+              </a:ext>
+            </a:extLst>
+          </p:cNvPr>
+          <p:cNvCxnSpPr>
+            <a:cxnSpLocks/>
+            <a:stCxn id="34" idx="5"/>
+          </p:cNvCxnSpPr>
+          <p:nvPr/>
+        </p:nvCxnSpPr>
+        <p:spPr>
+          <a:xfrm>
+            <a:off x="1563883" y="4194090"/>
+            <a:ext cx="230317" cy="642376"/>
+          </a:xfrm>
+          <a:prstGeom prst="line">
+            <a:avLst/>
+          </a:prstGeom>
+        </p:spPr>
+        <p:style>
+          <a:lnRef idx="1">
+            <a:schemeClr val="accent1"/>
+          </a:lnRef>
+          <a:fillRef idx="0">
+            <a:schemeClr val="accent1"/>
+          </a:fillRef>
+          <a:effectRef idx="0">
+            <a:schemeClr val="accent1"/>
+          </a:effectRef>
+          <a:fontRef idx="minor">
+            <a:schemeClr val="tx1"/>
+          </a:fontRef>
+        </p:style>
+      </p:cxnSp>
+      <p:cxnSp>
+        <p:nvCxnSpPr>
+          <p:cNvPr id="40" name="Straight Connector 39">
+            <a:extLst>
+              <a:ext uri="{FF2B5EF4-FFF2-40B4-BE49-F238E27FC236}">
+                <a16:creationId xmlns:a16="http://schemas.microsoft.com/office/drawing/2014/main" id="{F8C55A89-5BB0-5CEB-A1DD-6DABB2E85A19}"/>
+              </a:ext>
+            </a:extLst>
+          </p:cNvPr>
+          <p:cNvCxnSpPr>
+            <a:cxnSpLocks/>
+            <a:stCxn id="34" idx="3"/>
+            <a:endCxn id="36" idx="7"/>
+          </p:cNvCxnSpPr>
+          <p:nvPr/>
+        </p:nvCxnSpPr>
+        <p:spPr>
+          <a:xfrm flipH="1">
+            <a:off x="799577" y="4194088"/>
+            <a:ext cx="271707" cy="423207"/>
+          </a:xfrm>
+          <a:prstGeom prst="line">
+            <a:avLst/>
+          </a:prstGeom>
+        </p:spPr>
+        <p:style>
+          <a:lnRef idx="1">
+            <a:schemeClr val="accent1"/>
+          </a:lnRef>
+          <a:fillRef idx="0">
+            <a:schemeClr val="accent1"/>
+          </a:fillRef>
+          <a:effectRef idx="0">
+            <a:schemeClr val="accent1"/>
+          </a:effectRef>
+          <a:fontRef idx="minor">
+            <a:schemeClr val="tx1"/>
+          </a:fontRef>
+        </p:style>
+      </p:cxnSp>
+      <p:cxnSp>
+        <p:nvCxnSpPr>
+          <p:cNvPr id="41" name="Straight Connector 40">
+            <a:extLst>
+              <a:ext uri="{FF2B5EF4-FFF2-40B4-BE49-F238E27FC236}">
+                <a16:creationId xmlns:a16="http://schemas.microsoft.com/office/drawing/2014/main" id="{A56B485C-C9D2-2024-6CD5-E3F6E275199E}"/>
+              </a:ext>
+            </a:extLst>
+          </p:cNvPr>
+          <p:cNvCxnSpPr>
+            <a:cxnSpLocks/>
+          </p:cNvCxnSpPr>
+          <p:nvPr/>
+        </p:nvCxnSpPr>
+        <p:spPr>
+          <a:xfrm>
+            <a:off x="2208193" y="3396518"/>
+            <a:ext cx="204039" cy="345690"/>
+          </a:xfrm>
+          <a:prstGeom prst="line">
+            <a:avLst/>
+          </a:prstGeom>
+        </p:spPr>
+        <p:style>
+          <a:lnRef idx="1">
+            <a:schemeClr val="accent1"/>
+          </a:lnRef>
+          <a:fillRef idx="0">
+            <a:schemeClr val="accent1"/>
+          </a:fillRef>
+          <a:effectRef idx="0">
+            <a:schemeClr val="accent1"/>
+          </a:effectRef>
+          <a:fontRef idx="minor">
+            <a:schemeClr val="tx1"/>
+          </a:fontRef>
+        </p:style>
+      </p:cxnSp>
+      <p:cxnSp>
+        <p:nvCxnSpPr>
+          <p:cNvPr id="42" name="Straight Connector 41">
+            <a:extLst>
+              <a:ext uri="{FF2B5EF4-FFF2-40B4-BE49-F238E27FC236}">
+                <a16:creationId xmlns:a16="http://schemas.microsoft.com/office/drawing/2014/main" id="{A58DAD22-3D84-EAF4-25B1-D6CDED8F50AC}"/>
+              </a:ext>
+            </a:extLst>
+          </p:cNvPr>
+          <p:cNvCxnSpPr>
+            <a:cxnSpLocks/>
+            <a:stCxn id="33" idx="3"/>
+            <a:endCxn id="34" idx="7"/>
+          </p:cNvCxnSpPr>
+          <p:nvPr/>
+        </p:nvCxnSpPr>
+        <p:spPr>
+          <a:xfrm flipH="1">
+            <a:off x="1563880" y="3371205"/>
+            <a:ext cx="204039" cy="330287"/>
+          </a:xfrm>
+          <a:prstGeom prst="line">
+            <a:avLst/>
+          </a:prstGeom>
+        </p:spPr>
+        <p:style>
+          <a:lnRef idx="1">
+            <a:schemeClr val="accent1"/>
+          </a:lnRef>
+          <a:fillRef idx="0">
+            <a:schemeClr val="accent1"/>
+          </a:fillRef>
+          <a:effectRef idx="0">
+            <a:schemeClr val="accent1"/>
+          </a:effectRef>
+          <a:fontRef idx="minor">
+            <a:schemeClr val="tx1"/>
+          </a:fontRef>
+        </p:style>
+      </p:cxnSp>
       <p:grpSp>
         <p:nvGrpSpPr>
-          <p:cNvPr id="170" name="Group 169">
+          <p:cNvPr id="46" name="Group 45">
             <a:extLst>
               <a:ext uri="{FF2B5EF4-FFF2-40B4-BE49-F238E27FC236}">
-                <a16:creationId xmlns:a16="http://schemas.microsoft.com/office/drawing/2014/main" id="{29D38F2D-EF90-6165-5B62-397DF33A18BA}"/>
+                <a16:creationId xmlns:a16="http://schemas.microsoft.com/office/drawing/2014/main" id="{134116A6-CCDC-E175-CCEE-F930117F1DEE}"/>
               </a:ext>
             </a:extLst>
           </p:cNvPr>
@@ -2983,18 +3437,18 @@
         </p:nvGrpSpPr>
         <p:grpSpPr>
           <a:xfrm>
-            <a:off x="186540" y="1902340"/>
-            <a:ext cx="13667522" cy="3873620"/>
-            <a:chOff x="186540" y="1902340"/>
-            <a:chExt cx="10349940" cy="2933358"/>
+            <a:off x="186540" y="4515274"/>
+            <a:ext cx="870832" cy="1119264"/>
+            <a:chOff x="4067711" y="3179882"/>
+            <a:chExt cx="1099085" cy="1412632"/>
           </a:xfrm>
         </p:grpSpPr>
         <p:sp>
           <p:nvSpPr>
-            <p:cNvPr id="32" name="Oval 31">
+            <p:cNvPr id="36" name="Oval 35">
               <a:extLst>
                 <a:ext uri="{FF2B5EF4-FFF2-40B4-BE49-F238E27FC236}">
-                  <a16:creationId xmlns:a16="http://schemas.microsoft.com/office/drawing/2014/main" id="{17E7773B-29E7-91CC-1328-D84E1DD1E0CE}"/>
+                  <a16:creationId xmlns:a16="http://schemas.microsoft.com/office/drawing/2014/main" id="{AE3F6121-15BF-A581-0D72-EB11A55238C9}"/>
                 </a:ext>
               </a:extLst>
             </p:cNvPr>
@@ -3003,8 +3457,8 @@
           </p:nvSpPr>
           <p:spPr>
             <a:xfrm>
-              <a:off x="1669583" y="1904897"/>
-              <a:ext cx="527539" cy="527539"/>
+              <a:off x="4090963" y="3179882"/>
+              <a:ext cx="879231" cy="879231"/>
             </a:xfrm>
             <a:prstGeom prst="ellipse">
               <a:avLst/>
@@ -3035,18 +3489,653 @@
             <a:p>
               <a:pPr algn="ctr"/>
               <a:r>
-                <a:rPr lang="en-US" sz="1080" dirty="0"/>
-                <a:t>G</a:t>
+                <a:rPr lang="en-US" sz="2000" dirty="0"/>
+                <a:t>C1</a:t>
               </a:r>
             </a:p>
           </p:txBody>
         </p:sp>
+        <p:cxnSp>
+          <p:nvCxnSpPr>
+            <p:cNvPr id="43" name="Straight Connector 42">
+              <a:extLst>
+                <a:ext uri="{FF2B5EF4-FFF2-40B4-BE49-F238E27FC236}">
+                  <a16:creationId xmlns:a16="http://schemas.microsoft.com/office/drawing/2014/main" id="{DE8B31DB-5C8A-CEE8-ED30-403F12623A6D}"/>
+                </a:ext>
+              </a:extLst>
+            </p:cNvPr>
+            <p:cNvCxnSpPr>
+              <a:cxnSpLocks/>
+            </p:cNvCxnSpPr>
+            <p:nvPr/>
+          </p:nvCxnSpPr>
+          <p:spPr>
+            <a:xfrm flipH="1">
+              <a:off x="4067711" y="4019741"/>
+              <a:ext cx="292493" cy="572773"/>
+            </a:xfrm>
+            <a:prstGeom prst="line">
+              <a:avLst/>
+            </a:prstGeom>
+          </p:spPr>
+          <p:style>
+            <a:lnRef idx="1">
+              <a:schemeClr val="accent1"/>
+            </a:lnRef>
+            <a:fillRef idx="0">
+              <a:schemeClr val="accent1"/>
+            </a:fillRef>
+            <a:effectRef idx="0">
+              <a:schemeClr val="accent1"/>
+            </a:effectRef>
+            <a:fontRef idx="minor">
+              <a:schemeClr val="tx1"/>
+            </a:fontRef>
+          </p:style>
+        </p:cxnSp>
+        <p:cxnSp>
+          <p:nvCxnSpPr>
+            <p:cNvPr id="44" name="Straight Connector 43">
+              <a:extLst>
+                <a:ext uri="{FF2B5EF4-FFF2-40B4-BE49-F238E27FC236}">
+                  <a16:creationId xmlns:a16="http://schemas.microsoft.com/office/drawing/2014/main" id="{B45514DA-0279-C276-9F19-096C6CBCC53D}"/>
+                </a:ext>
+              </a:extLst>
+            </p:cNvPr>
+            <p:cNvCxnSpPr>
+              <a:cxnSpLocks/>
+              <a:stCxn id="36" idx="5"/>
+            </p:cNvCxnSpPr>
+            <p:nvPr/>
+          </p:nvCxnSpPr>
+          <p:spPr>
+            <a:xfrm>
+              <a:off x="4841433" y="3930353"/>
+              <a:ext cx="325363" cy="662161"/>
+            </a:xfrm>
+            <a:prstGeom prst="line">
+              <a:avLst/>
+            </a:prstGeom>
+          </p:spPr>
+          <p:style>
+            <a:lnRef idx="1">
+              <a:schemeClr val="accent1"/>
+            </a:lnRef>
+            <a:fillRef idx="0">
+              <a:schemeClr val="accent1"/>
+            </a:fillRef>
+            <a:effectRef idx="0">
+              <a:schemeClr val="accent1"/>
+            </a:effectRef>
+            <a:fontRef idx="minor">
+              <a:schemeClr val="tx1"/>
+            </a:fontRef>
+          </p:style>
+        </p:cxnSp>
+      </p:grpSp>
+      <p:sp>
+        <p:nvSpPr>
+          <p:cNvPr id="62" name="Arrow: Curved Down 61">
+            <a:extLst>
+              <a:ext uri="{FF2B5EF4-FFF2-40B4-BE49-F238E27FC236}">
+                <a16:creationId xmlns:a16="http://schemas.microsoft.com/office/drawing/2014/main" id="{03D372B4-5CA1-6D04-5FEE-4A20931EDC1C}"/>
+              </a:ext>
+            </a:extLst>
+          </p:cNvPr>
+          <p:cNvSpPr/>
+          <p:nvPr/>
+        </p:nvSpPr>
+        <p:spPr>
+          <a:xfrm>
+            <a:off x="2276216" y="2627908"/>
+            <a:ext cx="578919" cy="276256"/>
+          </a:xfrm>
+          <a:prstGeom prst="curvedDownArrow">
+            <a:avLst/>
+          </a:prstGeom>
+        </p:spPr>
+        <p:style>
+          <a:lnRef idx="2">
+            <a:schemeClr val="accent1">
+              <a:shade val="15000"/>
+            </a:schemeClr>
+          </a:lnRef>
+          <a:fillRef idx="1">
+            <a:schemeClr val="accent1"/>
+          </a:fillRef>
+          <a:effectRef idx="0">
+            <a:schemeClr val="accent1"/>
+          </a:effectRef>
+          <a:fontRef idx="minor">
+            <a:schemeClr val="lt1"/>
+          </a:fontRef>
+        </p:style>
+        <p:txBody>
+          <a:bodyPr rtlCol="0" anchor="ctr"/>
+          <a:lstStyle/>
+          <a:p>
+            <a:pPr algn="ctr"/>
+            <a:endParaRPr lang="en-US" sz="4800">
+              <a:solidFill>
+                <a:schemeClr val="tx1"/>
+              </a:solidFill>
+            </a:endParaRPr>
+          </a:p>
+        </p:txBody>
+      </p:sp>
+      <p:cxnSp>
+        <p:nvCxnSpPr>
+          <p:cNvPr id="63" name="Straight Connector 62">
+            <a:extLst>
+              <a:ext uri="{FF2B5EF4-FFF2-40B4-BE49-F238E27FC236}">
+                <a16:creationId xmlns:a16="http://schemas.microsoft.com/office/drawing/2014/main" id="{CC79D201-EB12-17E6-107F-023C43F648D8}"/>
+              </a:ext>
+            </a:extLst>
+          </p:cNvPr>
+          <p:cNvCxnSpPr>
+            <a:cxnSpLocks/>
+          </p:cNvCxnSpPr>
+          <p:nvPr/>
+        </p:nvCxnSpPr>
+        <p:spPr>
+          <a:xfrm flipH="1">
+            <a:off x="2914535" y="3396517"/>
+            <a:ext cx="129306" cy="319971"/>
+          </a:xfrm>
+          <a:prstGeom prst="line">
+            <a:avLst/>
+          </a:prstGeom>
+        </p:spPr>
+        <p:style>
+          <a:lnRef idx="1">
+            <a:schemeClr val="accent1"/>
+          </a:lnRef>
+          <a:fillRef idx="0">
+            <a:schemeClr val="accent1"/>
+          </a:fillRef>
+          <a:effectRef idx="0">
+            <a:schemeClr val="accent1"/>
+          </a:effectRef>
+          <a:fontRef idx="minor">
+            <a:schemeClr val="tx1"/>
+          </a:fontRef>
+        </p:style>
+      </p:cxnSp>
+      <p:cxnSp>
+        <p:nvCxnSpPr>
+          <p:cNvPr id="64" name="Straight Connector 63">
+            <a:extLst>
+              <a:ext uri="{FF2B5EF4-FFF2-40B4-BE49-F238E27FC236}">
+                <a16:creationId xmlns:a16="http://schemas.microsoft.com/office/drawing/2014/main" id="{64F56411-7FB1-5209-11B8-8A7A3F22E464}"/>
+              </a:ext>
+            </a:extLst>
+          </p:cNvPr>
+          <p:cNvCxnSpPr>
+            <a:cxnSpLocks/>
+          </p:cNvCxnSpPr>
+          <p:nvPr/>
+        </p:nvCxnSpPr>
+        <p:spPr>
+          <a:xfrm>
+            <a:off x="3331532" y="3378115"/>
+            <a:ext cx="161122" cy="295876"/>
+          </a:xfrm>
+          <a:prstGeom prst="line">
+            <a:avLst/>
+          </a:prstGeom>
+        </p:spPr>
+        <p:style>
+          <a:lnRef idx="1">
+            <a:schemeClr val="accent1"/>
+          </a:lnRef>
+          <a:fillRef idx="0">
+            <a:schemeClr val="accent1"/>
+          </a:fillRef>
+          <a:effectRef idx="0">
+            <a:schemeClr val="accent1"/>
+          </a:effectRef>
+          <a:fontRef idx="minor">
+            <a:schemeClr val="tx1"/>
+          </a:fontRef>
+        </p:style>
+      </p:cxnSp>
+      <p:sp>
+        <p:nvSpPr>
+          <p:cNvPr id="66" name="Oval 65">
+            <a:extLst>
+              <a:ext uri="{FF2B5EF4-FFF2-40B4-BE49-F238E27FC236}">
+                <a16:creationId xmlns:a16="http://schemas.microsoft.com/office/drawing/2014/main" id="{45C58CC5-8C51-1F56-1E09-DBF2C4C8EB7C}"/>
+              </a:ext>
+            </a:extLst>
+          </p:cNvPr>
+          <p:cNvSpPr/>
+          <p:nvPr/>
+        </p:nvSpPr>
+        <p:spPr>
+          <a:xfrm>
+            <a:off x="7029955" y="2842644"/>
+            <a:ext cx="696637" cy="696637"/>
+          </a:xfrm>
+          <a:prstGeom prst="ellipse">
+            <a:avLst/>
+          </a:prstGeom>
+          <a:solidFill>
+            <a:schemeClr val="tx1"/>
+          </a:solidFill>
+        </p:spPr>
+        <p:style>
+          <a:lnRef idx="2">
+            <a:schemeClr val="accent1">
+              <a:shade val="15000"/>
+            </a:schemeClr>
+          </a:lnRef>
+          <a:fillRef idx="1">
+            <a:schemeClr val="accent1"/>
+          </a:fillRef>
+          <a:effectRef idx="0">
+            <a:schemeClr val="accent1"/>
+          </a:effectRef>
+          <a:fontRef idx="minor">
+            <a:schemeClr val="lt1"/>
+          </a:fontRef>
+        </p:style>
+        <p:txBody>
+          <a:bodyPr rtlCol="0" anchor="ctr"/>
+          <a:lstStyle/>
+          <a:p>
+            <a:pPr algn="ctr"/>
+            <a:r>
+              <a:rPr lang="en-US" sz="4800" dirty="0"/>
+              <a:t>G</a:t>
+            </a:r>
+          </a:p>
+        </p:txBody>
+      </p:sp>
+      <p:sp>
+        <p:nvSpPr>
+          <p:cNvPr id="67" name="Oval 66">
+            <a:extLst>
+              <a:ext uri="{FF2B5EF4-FFF2-40B4-BE49-F238E27FC236}">
+                <a16:creationId xmlns:a16="http://schemas.microsoft.com/office/drawing/2014/main" id="{F461D42A-36C1-0ED0-3935-E455B3AB3112}"/>
+              </a:ext>
+            </a:extLst>
+          </p:cNvPr>
+          <p:cNvSpPr/>
+          <p:nvPr/>
+        </p:nvSpPr>
+        <p:spPr>
+          <a:xfrm>
+            <a:off x="6061208" y="2004359"/>
+            <a:ext cx="696637" cy="696637"/>
+          </a:xfrm>
+          <a:prstGeom prst="ellipse">
+            <a:avLst/>
+          </a:prstGeom>
+          <a:solidFill>
+            <a:srgbClr val="FF0000"/>
+          </a:solidFill>
+        </p:spPr>
+        <p:style>
+          <a:lnRef idx="2">
+            <a:schemeClr val="accent1">
+              <a:shade val="15000"/>
+            </a:schemeClr>
+          </a:lnRef>
+          <a:fillRef idx="1">
+            <a:schemeClr val="accent1"/>
+          </a:fillRef>
+          <a:effectRef idx="0">
+            <a:schemeClr val="accent1"/>
+          </a:effectRef>
+          <a:fontRef idx="minor">
+            <a:schemeClr val="lt1"/>
+          </a:fontRef>
+        </p:style>
+        <p:txBody>
+          <a:bodyPr rtlCol="0" anchor="ctr"/>
+          <a:lstStyle/>
+          <a:p>
+            <a:pPr algn="ctr"/>
+            <a:r>
+              <a:rPr lang="en-US" sz="4800" dirty="0"/>
+              <a:t>P</a:t>
+            </a:r>
+          </a:p>
+        </p:txBody>
+      </p:sp>
+      <p:sp>
+        <p:nvSpPr>
+          <p:cNvPr id="68" name="Oval 67">
+            <a:extLst>
+              <a:ext uri="{FF2B5EF4-FFF2-40B4-BE49-F238E27FC236}">
+                <a16:creationId xmlns:a16="http://schemas.microsoft.com/office/drawing/2014/main" id="{D610B6C8-2E98-D33B-84D5-296E52FEEDB7}"/>
+              </a:ext>
+            </a:extLst>
+          </p:cNvPr>
+          <p:cNvSpPr/>
+          <p:nvPr/>
+        </p:nvSpPr>
+        <p:spPr>
+          <a:xfrm>
+            <a:off x="5047283" y="2859829"/>
+            <a:ext cx="696637" cy="696637"/>
+          </a:xfrm>
+          <a:prstGeom prst="ellipse">
+            <a:avLst/>
+          </a:prstGeom>
+          <a:solidFill>
+            <a:srgbClr val="FF0000"/>
+          </a:solidFill>
+        </p:spPr>
+        <p:style>
+          <a:lnRef idx="2">
+            <a:schemeClr val="accent1">
+              <a:shade val="15000"/>
+            </a:schemeClr>
+          </a:lnRef>
+          <a:fillRef idx="1">
+            <a:schemeClr val="accent1"/>
+          </a:fillRef>
+          <a:effectRef idx="0">
+            <a:schemeClr val="accent1"/>
+          </a:effectRef>
+          <a:fontRef idx="minor">
+            <a:schemeClr val="lt1"/>
+          </a:fontRef>
+        </p:style>
+        <p:txBody>
+          <a:bodyPr rtlCol="0" anchor="ctr"/>
+          <a:lstStyle/>
+          <a:p>
+            <a:pPr algn="ctr"/>
+            <a:r>
+              <a:rPr lang="en-US" sz="4800" dirty="0"/>
+              <a:t>N</a:t>
+            </a:r>
+          </a:p>
+        </p:txBody>
+      </p:sp>
+      <p:sp>
+        <p:nvSpPr>
+          <p:cNvPr id="69" name="Oval 68">
+            <a:extLst>
+              <a:ext uri="{FF2B5EF4-FFF2-40B4-BE49-F238E27FC236}">
+                <a16:creationId xmlns:a16="http://schemas.microsoft.com/office/drawing/2014/main" id="{74A0E971-1E56-FFB9-3957-C32BD2883D27}"/>
+              </a:ext>
+            </a:extLst>
+          </p:cNvPr>
+          <p:cNvSpPr/>
+          <p:nvPr/>
+        </p:nvSpPr>
+        <p:spPr>
+          <a:xfrm>
+            <a:off x="7723100" y="3756898"/>
+            <a:ext cx="696637" cy="696637"/>
+          </a:xfrm>
+          <a:prstGeom prst="ellipse">
+            <a:avLst/>
+          </a:prstGeom>
+          <a:solidFill>
+            <a:schemeClr val="tx1"/>
+          </a:solidFill>
+        </p:spPr>
+        <p:style>
+          <a:lnRef idx="2">
+            <a:schemeClr val="accent1">
+              <a:shade val="15000"/>
+            </a:schemeClr>
+          </a:lnRef>
+          <a:fillRef idx="1">
+            <a:schemeClr val="accent1"/>
+          </a:fillRef>
+          <a:effectRef idx="0">
+            <a:schemeClr val="accent1"/>
+          </a:effectRef>
+          <a:fontRef idx="minor">
+            <a:schemeClr val="lt1"/>
+          </a:fontRef>
+        </p:style>
+        <p:txBody>
+          <a:bodyPr rtlCol="0" anchor="ctr"/>
+          <a:lstStyle/>
+          <a:p>
+            <a:pPr algn="ctr"/>
+            <a:r>
+              <a:rPr lang="en-US" sz="4800" dirty="0"/>
+              <a:t>U</a:t>
+            </a:r>
+          </a:p>
+        </p:txBody>
+      </p:sp>
+      <p:cxnSp>
+        <p:nvCxnSpPr>
+          <p:cNvPr id="70" name="Straight Connector 69">
+            <a:extLst>
+              <a:ext uri="{FF2B5EF4-FFF2-40B4-BE49-F238E27FC236}">
+                <a16:creationId xmlns:a16="http://schemas.microsoft.com/office/drawing/2014/main" id="{484556A7-ECEA-122A-3C3A-C4DABFAA311C}"/>
+              </a:ext>
+            </a:extLst>
+          </p:cNvPr>
+          <p:cNvCxnSpPr>
+            <a:cxnSpLocks/>
+            <a:stCxn id="66" idx="0"/>
+            <a:endCxn id="67" idx="5"/>
+          </p:cNvCxnSpPr>
+          <p:nvPr/>
+        </p:nvCxnSpPr>
+        <p:spPr>
+          <a:xfrm flipH="1" flipV="1">
+            <a:off x="6655822" y="2598974"/>
+            <a:ext cx="722450" cy="243669"/>
+          </a:xfrm>
+          <a:prstGeom prst="line">
+            <a:avLst/>
+          </a:prstGeom>
+          <a:ln>
+            <a:solidFill>
+              <a:schemeClr val="accent1"/>
+            </a:solidFill>
+          </a:ln>
+        </p:spPr>
+        <p:style>
+          <a:lnRef idx="1">
+            <a:schemeClr val="dk1"/>
+          </a:lnRef>
+          <a:fillRef idx="0">
+            <a:schemeClr val="dk1"/>
+          </a:fillRef>
+          <a:effectRef idx="0">
+            <a:schemeClr val="dk1"/>
+          </a:effectRef>
+          <a:fontRef idx="minor">
+            <a:schemeClr val="tx1"/>
+          </a:fontRef>
+        </p:style>
+      </p:cxnSp>
+      <p:cxnSp>
+        <p:nvCxnSpPr>
+          <p:cNvPr id="71" name="Straight Connector 70">
+            <a:extLst>
+              <a:ext uri="{FF2B5EF4-FFF2-40B4-BE49-F238E27FC236}">
+                <a16:creationId xmlns:a16="http://schemas.microsoft.com/office/drawing/2014/main" id="{6981D046-ABF6-D8C4-513E-AE315A920D94}"/>
+              </a:ext>
+            </a:extLst>
+          </p:cNvPr>
+          <p:cNvCxnSpPr>
+            <a:stCxn id="66" idx="5"/>
+            <a:endCxn id="69" idx="1"/>
+          </p:cNvCxnSpPr>
+          <p:nvPr/>
+        </p:nvCxnSpPr>
+        <p:spPr>
+          <a:xfrm>
+            <a:off x="7624569" y="3437258"/>
+            <a:ext cx="200548" cy="421657"/>
+          </a:xfrm>
+          <a:prstGeom prst="line">
+            <a:avLst/>
+          </a:prstGeom>
+        </p:spPr>
+        <p:style>
+          <a:lnRef idx="1">
+            <a:schemeClr val="accent1"/>
+          </a:lnRef>
+          <a:fillRef idx="0">
+            <a:schemeClr val="accent1"/>
+          </a:fillRef>
+          <a:effectRef idx="0">
+            <a:schemeClr val="accent1"/>
+          </a:effectRef>
+          <a:fontRef idx="minor">
+            <a:schemeClr val="tx1"/>
+          </a:fontRef>
+        </p:style>
+      </p:cxnSp>
+      <p:cxnSp>
+        <p:nvCxnSpPr>
+          <p:cNvPr id="72" name="Straight Connector 71">
+            <a:extLst>
+              <a:ext uri="{FF2B5EF4-FFF2-40B4-BE49-F238E27FC236}">
+                <a16:creationId xmlns:a16="http://schemas.microsoft.com/office/drawing/2014/main" id="{8C44EB5B-B924-9394-C472-A2F1725180AF}"/>
+              </a:ext>
+            </a:extLst>
+          </p:cNvPr>
+          <p:cNvCxnSpPr>
+            <a:cxnSpLocks/>
+            <a:stCxn id="68" idx="5"/>
+          </p:cNvCxnSpPr>
+          <p:nvPr/>
+        </p:nvCxnSpPr>
+        <p:spPr>
+          <a:xfrm>
+            <a:off x="5641899" y="3454445"/>
+            <a:ext cx="284170" cy="423207"/>
+          </a:xfrm>
+          <a:prstGeom prst="line">
+            <a:avLst/>
+          </a:prstGeom>
+        </p:spPr>
+        <p:style>
+          <a:lnRef idx="1">
+            <a:schemeClr val="accent1"/>
+          </a:lnRef>
+          <a:fillRef idx="0">
+            <a:schemeClr val="accent1"/>
+          </a:fillRef>
+          <a:effectRef idx="0">
+            <a:schemeClr val="accent1"/>
+          </a:effectRef>
+          <a:fontRef idx="minor">
+            <a:schemeClr val="tx1"/>
+          </a:fontRef>
+        </p:style>
+      </p:cxnSp>
+      <p:cxnSp>
+        <p:nvCxnSpPr>
+          <p:cNvPr id="73" name="Straight Connector 72">
+            <a:extLst>
+              <a:ext uri="{FF2B5EF4-FFF2-40B4-BE49-F238E27FC236}">
+                <a16:creationId xmlns:a16="http://schemas.microsoft.com/office/drawing/2014/main" id="{90732301-9B2F-E57B-D1FA-C0B43F3BC30F}"/>
+              </a:ext>
+            </a:extLst>
+          </p:cNvPr>
+          <p:cNvCxnSpPr>
+            <a:cxnSpLocks/>
+            <a:stCxn id="68" idx="3"/>
+            <a:endCxn id="77" idx="7"/>
+          </p:cNvCxnSpPr>
+          <p:nvPr/>
+        </p:nvCxnSpPr>
+        <p:spPr>
+          <a:xfrm flipH="1">
+            <a:off x="4877595" y="3454445"/>
+            <a:ext cx="271707" cy="423207"/>
+          </a:xfrm>
+          <a:prstGeom prst="line">
+            <a:avLst/>
+          </a:prstGeom>
+        </p:spPr>
+        <p:style>
+          <a:lnRef idx="1">
+            <a:schemeClr val="accent1"/>
+          </a:lnRef>
+          <a:fillRef idx="0">
+            <a:schemeClr val="accent1"/>
+          </a:fillRef>
+          <a:effectRef idx="0">
+            <a:schemeClr val="accent1"/>
+          </a:effectRef>
+          <a:fontRef idx="minor">
+            <a:schemeClr val="tx1"/>
+          </a:fontRef>
+        </p:style>
+      </p:cxnSp>
+      <p:cxnSp>
+        <p:nvCxnSpPr>
+          <p:cNvPr id="75" name="Straight Connector 74">
+            <a:extLst>
+              <a:ext uri="{FF2B5EF4-FFF2-40B4-BE49-F238E27FC236}">
+                <a16:creationId xmlns:a16="http://schemas.microsoft.com/office/drawing/2014/main" id="{83F6DCD9-2EEB-B7B0-53A3-1237AFF90540}"/>
+              </a:ext>
+            </a:extLst>
+          </p:cNvPr>
+          <p:cNvCxnSpPr>
+            <a:cxnSpLocks/>
+            <a:stCxn id="67" idx="3"/>
+            <a:endCxn id="68" idx="7"/>
+          </p:cNvCxnSpPr>
+          <p:nvPr/>
+        </p:nvCxnSpPr>
+        <p:spPr>
+          <a:xfrm flipH="1">
+            <a:off x="5641898" y="2598974"/>
+            <a:ext cx="521329" cy="362874"/>
+          </a:xfrm>
+          <a:prstGeom prst="line">
+            <a:avLst/>
+          </a:prstGeom>
+        </p:spPr>
+        <p:style>
+          <a:lnRef idx="1">
+            <a:schemeClr val="accent1"/>
+          </a:lnRef>
+          <a:fillRef idx="0">
+            <a:schemeClr val="accent1"/>
+          </a:fillRef>
+          <a:effectRef idx="0">
+            <a:schemeClr val="accent1"/>
+          </a:effectRef>
+          <a:fontRef idx="minor">
+            <a:schemeClr val="tx1"/>
+          </a:fontRef>
+        </p:style>
+      </p:cxnSp>
+      <p:grpSp>
+        <p:nvGrpSpPr>
+          <p:cNvPr id="76" name="Group 75">
+            <a:extLst>
+              <a:ext uri="{FF2B5EF4-FFF2-40B4-BE49-F238E27FC236}">
+                <a16:creationId xmlns:a16="http://schemas.microsoft.com/office/drawing/2014/main" id="{2C77CA36-4025-5D97-BDDF-72924E0E472A}"/>
+              </a:ext>
+            </a:extLst>
+          </p:cNvPr>
+          <p:cNvGrpSpPr/>
+          <p:nvPr/>
+        </p:nvGrpSpPr>
+        <p:grpSpPr>
+          <a:xfrm>
+            <a:off x="4264556" y="3775631"/>
+            <a:ext cx="870832" cy="1119264"/>
+            <a:chOff x="4067711" y="3179882"/>
+            <a:chExt cx="1099085" cy="1412632"/>
+          </a:xfrm>
+        </p:grpSpPr>
         <p:sp>
           <p:nvSpPr>
-            <p:cNvPr id="33" name="Oval 32">
+            <p:cNvPr id="77" name="Oval 76">
               <a:extLst>
                 <a:ext uri="{FF2B5EF4-FFF2-40B4-BE49-F238E27FC236}">
-                  <a16:creationId xmlns:a16="http://schemas.microsoft.com/office/drawing/2014/main" id="{F633009A-CF9B-E185-BF6C-497A2173B31D}"/>
+                  <a16:creationId xmlns:a16="http://schemas.microsoft.com/office/drawing/2014/main" id="{014FF677-A5F5-3523-E8A7-C8881113F9A8}"/>
                 </a:ext>
               </a:extLst>
             </p:cNvPr>
@@ -3055,112 +4144,8 @@
           </p:nvSpPr>
           <p:spPr>
             <a:xfrm>
-              <a:off x="1306810" y="2564379"/>
-              <a:ext cx="527539" cy="527539"/>
-            </a:xfrm>
-            <a:prstGeom prst="ellipse">
-              <a:avLst/>
-            </a:prstGeom>
-            <a:solidFill>
-              <a:srgbClr val="FF0000"/>
-            </a:solidFill>
-          </p:spPr>
-          <p:style>
-            <a:lnRef idx="2">
-              <a:schemeClr val="accent1">
-                <a:shade val="15000"/>
-              </a:schemeClr>
-            </a:lnRef>
-            <a:fillRef idx="1">
-              <a:schemeClr val="accent1"/>
-            </a:fillRef>
-            <a:effectRef idx="0">
-              <a:schemeClr val="accent1"/>
-            </a:effectRef>
-            <a:fontRef idx="minor">
-              <a:schemeClr val="lt1"/>
-            </a:fontRef>
-          </p:style>
-          <p:txBody>
-            <a:bodyPr rtlCol="0" anchor="ctr"/>
-            <a:lstStyle/>
-            <a:p>
-              <a:pPr algn="ctr"/>
-              <a:r>
-                <a:rPr lang="en-US" sz="1080" dirty="0"/>
-                <a:t>P</a:t>
-              </a:r>
-            </a:p>
-          </p:txBody>
-        </p:sp>
-        <p:sp>
-          <p:nvSpPr>
-            <p:cNvPr id="34" name="Oval 33">
-              <a:extLst>
-                <a:ext uri="{FF2B5EF4-FFF2-40B4-BE49-F238E27FC236}">
-                  <a16:creationId xmlns:a16="http://schemas.microsoft.com/office/drawing/2014/main" id="{9FCB32AA-D11A-CA31-77B9-6CB4E05A35B7}"/>
-                </a:ext>
-              </a:extLst>
-            </p:cNvPr>
-            <p:cNvSpPr/>
-            <p:nvPr/>
-          </p:nvSpPr>
-          <p:spPr>
-            <a:xfrm>
-              <a:off x="779271" y="3187519"/>
-              <a:ext cx="527539" cy="527539"/>
-            </a:xfrm>
-            <a:prstGeom prst="ellipse">
-              <a:avLst/>
-            </a:prstGeom>
-            <a:solidFill>
-              <a:srgbClr val="FF0000"/>
-            </a:solidFill>
-          </p:spPr>
-          <p:style>
-            <a:lnRef idx="2">
-              <a:schemeClr val="accent1">
-                <a:shade val="15000"/>
-              </a:schemeClr>
-            </a:lnRef>
-            <a:fillRef idx="1">
-              <a:schemeClr val="accent1"/>
-            </a:fillRef>
-            <a:effectRef idx="0">
-              <a:schemeClr val="accent1"/>
-            </a:effectRef>
-            <a:fontRef idx="minor">
-              <a:schemeClr val="lt1"/>
-            </a:fontRef>
-          </p:style>
-          <p:txBody>
-            <a:bodyPr rtlCol="0" anchor="ctr"/>
-            <a:lstStyle/>
-            <a:p>
-              <a:pPr algn="ctr"/>
-              <a:r>
-                <a:rPr lang="en-US" sz="1080" dirty="0"/>
-                <a:t>N</a:t>
-              </a:r>
-            </a:p>
-          </p:txBody>
-        </p:sp>
-        <p:sp>
-          <p:nvSpPr>
-            <p:cNvPr id="35" name="Oval 34">
-              <a:extLst>
-                <a:ext uri="{FF2B5EF4-FFF2-40B4-BE49-F238E27FC236}">
-                  <a16:creationId xmlns:a16="http://schemas.microsoft.com/office/drawing/2014/main" id="{2742E342-4D0E-EC2B-AB3F-A55306F8CF02}"/>
-                </a:ext>
-              </a:extLst>
-            </p:cNvPr>
-            <p:cNvSpPr/>
-            <p:nvPr/>
-          </p:nvSpPr>
-          <p:spPr>
-            <a:xfrm>
-              <a:off x="2197121" y="2539701"/>
-              <a:ext cx="527539" cy="527539"/>
+              <a:off x="4090962" y="3179882"/>
+              <a:ext cx="879231" cy="879231"/>
             </a:xfrm>
             <a:prstGeom prst="ellipse">
               <a:avLst/>
@@ -3191,459 +4176,18 @@
             <a:p>
               <a:pPr algn="ctr"/>
               <a:r>
-                <a:rPr lang="en-US" sz="1080" dirty="0"/>
-                <a:t>U</a:t>
+                <a:rPr lang="en-US" sz="2000" dirty="0"/>
+                <a:t>C1</a:t>
               </a:r>
             </a:p>
           </p:txBody>
         </p:sp>
         <p:cxnSp>
           <p:nvCxnSpPr>
-            <p:cNvPr id="37" name="Straight Connector 36">
+            <p:cNvPr id="78" name="Straight Connector 77">
               <a:extLst>
                 <a:ext uri="{FF2B5EF4-FFF2-40B4-BE49-F238E27FC236}">
-                  <a16:creationId xmlns:a16="http://schemas.microsoft.com/office/drawing/2014/main" id="{6C7FAFEC-CE48-31F1-1796-37B1268C03C7}"/>
-                </a:ext>
-              </a:extLst>
-            </p:cNvPr>
-            <p:cNvCxnSpPr>
-              <a:cxnSpLocks/>
-              <a:stCxn id="32" idx="3"/>
-              <a:endCxn id="33" idx="0"/>
-            </p:cNvCxnSpPr>
-            <p:nvPr/>
-          </p:nvCxnSpPr>
-          <p:spPr>
-            <a:xfrm flipH="1">
-              <a:off x="1570580" y="2355179"/>
-              <a:ext cx="176259" cy="209199"/>
-            </a:xfrm>
-            <a:prstGeom prst="line">
-              <a:avLst/>
-            </a:prstGeom>
-            <a:ln>
-              <a:solidFill>
-                <a:schemeClr val="accent1"/>
-              </a:solidFill>
-            </a:ln>
-          </p:spPr>
-          <p:style>
-            <a:lnRef idx="1">
-              <a:schemeClr val="dk1"/>
-            </a:lnRef>
-            <a:fillRef idx="0">
-              <a:schemeClr val="dk1"/>
-            </a:fillRef>
-            <a:effectRef idx="0">
-              <a:schemeClr val="dk1"/>
-            </a:effectRef>
-            <a:fontRef idx="minor">
-              <a:schemeClr val="tx1"/>
-            </a:fontRef>
-          </p:style>
-        </p:cxnSp>
-        <p:cxnSp>
-          <p:nvCxnSpPr>
-            <p:cNvPr id="38" name="Straight Connector 37">
-              <a:extLst>
-                <a:ext uri="{FF2B5EF4-FFF2-40B4-BE49-F238E27FC236}">
-                  <a16:creationId xmlns:a16="http://schemas.microsoft.com/office/drawing/2014/main" id="{FD78B819-EAE6-AC81-5D01-A409CFEE25D5}"/>
-                </a:ext>
-              </a:extLst>
-            </p:cNvPr>
-            <p:cNvCxnSpPr>
-              <a:stCxn id="32" idx="5"/>
-              <a:endCxn id="35" idx="1"/>
-            </p:cNvCxnSpPr>
-            <p:nvPr/>
-          </p:nvCxnSpPr>
-          <p:spPr>
-            <a:xfrm>
-              <a:off x="2119866" y="2355178"/>
-              <a:ext cx="154511" cy="261778"/>
-            </a:xfrm>
-            <a:prstGeom prst="line">
-              <a:avLst/>
-            </a:prstGeom>
-          </p:spPr>
-          <p:style>
-            <a:lnRef idx="1">
-              <a:schemeClr val="accent1"/>
-            </a:lnRef>
-            <a:fillRef idx="0">
-              <a:schemeClr val="accent1"/>
-            </a:fillRef>
-            <a:effectRef idx="0">
-              <a:schemeClr val="accent1"/>
-            </a:effectRef>
-            <a:fontRef idx="minor">
-              <a:schemeClr val="tx1"/>
-            </a:fontRef>
-          </p:style>
-        </p:cxnSp>
-        <p:cxnSp>
-          <p:nvCxnSpPr>
-            <p:cNvPr id="39" name="Straight Connector 38">
-              <a:extLst>
-                <a:ext uri="{FF2B5EF4-FFF2-40B4-BE49-F238E27FC236}">
-                  <a16:creationId xmlns:a16="http://schemas.microsoft.com/office/drawing/2014/main" id="{5DED9CA0-3A90-800A-C8A3-F0D7DD86E450}"/>
-                </a:ext>
-              </a:extLst>
-            </p:cNvPr>
-            <p:cNvCxnSpPr>
-              <a:cxnSpLocks/>
-              <a:stCxn id="34" idx="5"/>
-            </p:cNvCxnSpPr>
-            <p:nvPr/>
-          </p:nvCxnSpPr>
-          <p:spPr>
-            <a:xfrm>
-              <a:off x="1229554" y="3637802"/>
-              <a:ext cx="174411" cy="486449"/>
-            </a:xfrm>
-            <a:prstGeom prst="line">
-              <a:avLst/>
-            </a:prstGeom>
-          </p:spPr>
-          <p:style>
-            <a:lnRef idx="1">
-              <a:schemeClr val="accent1"/>
-            </a:lnRef>
-            <a:fillRef idx="0">
-              <a:schemeClr val="accent1"/>
-            </a:fillRef>
-            <a:effectRef idx="0">
-              <a:schemeClr val="accent1"/>
-            </a:effectRef>
-            <a:fontRef idx="minor">
-              <a:schemeClr val="tx1"/>
-            </a:fontRef>
-          </p:style>
-        </p:cxnSp>
-        <p:cxnSp>
-          <p:nvCxnSpPr>
-            <p:cNvPr id="40" name="Straight Connector 39">
-              <a:extLst>
-                <a:ext uri="{FF2B5EF4-FFF2-40B4-BE49-F238E27FC236}">
-                  <a16:creationId xmlns:a16="http://schemas.microsoft.com/office/drawing/2014/main" id="{F8C55A89-5BB0-5CEB-A1DD-6DABB2E85A19}"/>
-                </a:ext>
-              </a:extLst>
-            </p:cNvPr>
-            <p:cNvCxnSpPr>
-              <a:cxnSpLocks/>
-              <a:stCxn id="34" idx="3"/>
-              <a:endCxn id="36" idx="7"/>
-            </p:cNvCxnSpPr>
-            <p:nvPr/>
-          </p:nvCxnSpPr>
-          <p:spPr>
-            <a:xfrm flipH="1">
-              <a:off x="650772" y="3637801"/>
-              <a:ext cx="205754" cy="320480"/>
-            </a:xfrm>
-            <a:prstGeom prst="line">
-              <a:avLst/>
-            </a:prstGeom>
-          </p:spPr>
-          <p:style>
-            <a:lnRef idx="1">
-              <a:schemeClr val="accent1"/>
-            </a:lnRef>
-            <a:fillRef idx="0">
-              <a:schemeClr val="accent1"/>
-            </a:fillRef>
-            <a:effectRef idx="0">
-              <a:schemeClr val="accent1"/>
-            </a:effectRef>
-            <a:fontRef idx="minor">
-              <a:schemeClr val="tx1"/>
-            </a:fontRef>
-          </p:style>
-        </p:cxnSp>
-        <p:cxnSp>
-          <p:nvCxnSpPr>
-            <p:cNvPr id="41" name="Straight Connector 40">
-              <a:extLst>
-                <a:ext uri="{FF2B5EF4-FFF2-40B4-BE49-F238E27FC236}">
-                  <a16:creationId xmlns:a16="http://schemas.microsoft.com/office/drawing/2014/main" id="{A56B485C-C9D2-2024-6CD5-E3F6E275199E}"/>
-                </a:ext>
-              </a:extLst>
-            </p:cNvPr>
-            <p:cNvCxnSpPr>
-              <a:cxnSpLocks/>
-            </p:cNvCxnSpPr>
-            <p:nvPr/>
-          </p:nvCxnSpPr>
-          <p:spPr>
-            <a:xfrm>
-              <a:off x="1717468" y="3033829"/>
-              <a:ext cx="154512" cy="261779"/>
-            </a:xfrm>
-            <a:prstGeom prst="line">
-              <a:avLst/>
-            </a:prstGeom>
-          </p:spPr>
-          <p:style>
-            <a:lnRef idx="1">
-              <a:schemeClr val="accent1"/>
-            </a:lnRef>
-            <a:fillRef idx="0">
-              <a:schemeClr val="accent1"/>
-            </a:fillRef>
-            <a:effectRef idx="0">
-              <a:schemeClr val="accent1"/>
-            </a:effectRef>
-            <a:fontRef idx="minor">
-              <a:schemeClr val="tx1"/>
-            </a:fontRef>
-          </p:style>
-        </p:cxnSp>
-        <p:cxnSp>
-          <p:nvCxnSpPr>
-            <p:cNvPr id="42" name="Straight Connector 41">
-              <a:extLst>
-                <a:ext uri="{FF2B5EF4-FFF2-40B4-BE49-F238E27FC236}">
-                  <a16:creationId xmlns:a16="http://schemas.microsoft.com/office/drawing/2014/main" id="{A58DAD22-3D84-EAF4-25B1-D6CDED8F50AC}"/>
-                </a:ext>
-              </a:extLst>
-            </p:cNvPr>
-            <p:cNvCxnSpPr>
-              <a:cxnSpLocks/>
-              <a:stCxn id="33" idx="3"/>
-              <a:endCxn id="34" idx="7"/>
-            </p:cNvCxnSpPr>
-            <p:nvPr/>
-          </p:nvCxnSpPr>
-          <p:spPr>
-            <a:xfrm flipH="1">
-              <a:off x="1229552" y="3014660"/>
-              <a:ext cx="154512" cy="250115"/>
-            </a:xfrm>
-            <a:prstGeom prst="line">
-              <a:avLst/>
-            </a:prstGeom>
-          </p:spPr>
-          <p:style>
-            <a:lnRef idx="1">
-              <a:schemeClr val="accent1"/>
-            </a:lnRef>
-            <a:fillRef idx="0">
-              <a:schemeClr val="accent1"/>
-            </a:fillRef>
-            <a:effectRef idx="0">
-              <a:schemeClr val="accent1"/>
-            </a:effectRef>
-            <a:fontRef idx="minor">
-              <a:schemeClr val="tx1"/>
-            </a:fontRef>
-          </p:style>
-        </p:cxnSp>
-        <p:grpSp>
-          <p:nvGrpSpPr>
-            <p:cNvPr id="46" name="Group 45">
-              <a:extLst>
-                <a:ext uri="{FF2B5EF4-FFF2-40B4-BE49-F238E27FC236}">
-                  <a16:creationId xmlns:a16="http://schemas.microsoft.com/office/drawing/2014/main" id="{134116A6-CCDC-E175-CCEE-F930117F1DEE}"/>
-                </a:ext>
-              </a:extLst>
-            </p:cNvPr>
-            <p:cNvGrpSpPr/>
-            <p:nvPr/>
-          </p:nvGrpSpPr>
-          <p:grpSpPr>
-            <a:xfrm>
-              <a:off x="186540" y="3881024"/>
-              <a:ext cx="659451" cy="847580"/>
-              <a:chOff x="4067711" y="3179882"/>
-              <a:chExt cx="1099085" cy="1412632"/>
-            </a:xfrm>
-          </p:grpSpPr>
-          <p:sp>
-            <p:nvSpPr>
-              <p:cNvPr id="36" name="Oval 35">
-                <a:extLst>
-                  <a:ext uri="{FF2B5EF4-FFF2-40B4-BE49-F238E27FC236}">
-                    <a16:creationId xmlns:a16="http://schemas.microsoft.com/office/drawing/2014/main" id="{AE3F6121-15BF-A581-0D72-EB11A55238C9}"/>
-                  </a:ext>
-                </a:extLst>
-              </p:cNvPr>
-              <p:cNvSpPr/>
-              <p:nvPr/>
-            </p:nvSpPr>
-            <p:spPr>
-              <a:xfrm>
-                <a:off x="4090962" y="3179882"/>
-                <a:ext cx="879231" cy="879231"/>
-              </a:xfrm>
-              <a:prstGeom prst="ellipse">
-                <a:avLst/>
-              </a:prstGeom>
-              <a:solidFill>
-                <a:schemeClr val="tx1"/>
-              </a:solidFill>
-            </p:spPr>
-            <p:style>
-              <a:lnRef idx="2">
-                <a:schemeClr val="accent1">
-                  <a:shade val="15000"/>
-                </a:schemeClr>
-              </a:lnRef>
-              <a:fillRef idx="1">
-                <a:schemeClr val="accent1"/>
-              </a:fillRef>
-              <a:effectRef idx="0">
-                <a:schemeClr val="accent1"/>
-              </a:effectRef>
-              <a:fontRef idx="minor">
-                <a:schemeClr val="lt1"/>
-              </a:fontRef>
-            </p:style>
-            <p:txBody>
-              <a:bodyPr rtlCol="0" anchor="ctr"/>
-              <a:lstStyle/>
-              <a:p>
-                <a:pPr algn="ctr"/>
-                <a:r>
-                  <a:rPr lang="en-US" sz="1080" dirty="0"/>
-                  <a:t>C1</a:t>
-                </a:r>
-              </a:p>
-            </p:txBody>
-          </p:sp>
-          <p:cxnSp>
-            <p:nvCxnSpPr>
-              <p:cNvPr id="43" name="Straight Connector 42">
-                <a:extLst>
-                  <a:ext uri="{FF2B5EF4-FFF2-40B4-BE49-F238E27FC236}">
-                    <a16:creationId xmlns:a16="http://schemas.microsoft.com/office/drawing/2014/main" id="{DE8B31DB-5C8A-CEE8-ED30-403F12623A6D}"/>
-                  </a:ext>
-                </a:extLst>
-              </p:cNvPr>
-              <p:cNvCxnSpPr>
-                <a:cxnSpLocks/>
-              </p:cNvCxnSpPr>
-              <p:nvPr/>
-            </p:nvCxnSpPr>
-            <p:spPr>
-              <a:xfrm flipH="1">
-                <a:off x="4067711" y="4019741"/>
-                <a:ext cx="292493" cy="572773"/>
-              </a:xfrm>
-              <a:prstGeom prst="line">
-                <a:avLst/>
-              </a:prstGeom>
-            </p:spPr>
-            <p:style>
-              <a:lnRef idx="1">
-                <a:schemeClr val="accent1"/>
-              </a:lnRef>
-              <a:fillRef idx="0">
-                <a:schemeClr val="accent1"/>
-              </a:fillRef>
-              <a:effectRef idx="0">
-                <a:schemeClr val="accent1"/>
-              </a:effectRef>
-              <a:fontRef idx="minor">
-                <a:schemeClr val="tx1"/>
-              </a:fontRef>
-            </p:style>
-          </p:cxnSp>
-          <p:cxnSp>
-            <p:nvCxnSpPr>
-              <p:cNvPr id="44" name="Straight Connector 43">
-                <a:extLst>
-                  <a:ext uri="{FF2B5EF4-FFF2-40B4-BE49-F238E27FC236}">
-                    <a16:creationId xmlns:a16="http://schemas.microsoft.com/office/drawing/2014/main" id="{B45514DA-0279-C276-9F19-096C6CBCC53D}"/>
-                  </a:ext>
-                </a:extLst>
-              </p:cNvPr>
-              <p:cNvCxnSpPr>
-                <a:cxnSpLocks/>
-                <a:stCxn id="36" idx="5"/>
-              </p:cNvCxnSpPr>
-              <p:nvPr/>
-            </p:nvCxnSpPr>
-            <p:spPr>
-              <a:xfrm>
-                <a:off x="4841433" y="3930353"/>
-                <a:ext cx="325363" cy="662161"/>
-              </a:xfrm>
-              <a:prstGeom prst="line">
-                <a:avLst/>
-              </a:prstGeom>
-            </p:spPr>
-            <p:style>
-              <a:lnRef idx="1">
-                <a:schemeClr val="accent1"/>
-              </a:lnRef>
-              <a:fillRef idx="0">
-                <a:schemeClr val="accent1"/>
-              </a:fillRef>
-              <a:effectRef idx="0">
-                <a:schemeClr val="accent1"/>
-              </a:effectRef>
-              <a:fontRef idx="minor">
-                <a:schemeClr val="tx1"/>
-              </a:fontRef>
-            </p:style>
-          </p:cxnSp>
-        </p:grpSp>
-        <p:sp>
-          <p:nvSpPr>
-            <p:cNvPr id="62" name="Arrow: Curved Down 61">
-              <a:extLst>
-                <a:ext uri="{FF2B5EF4-FFF2-40B4-BE49-F238E27FC236}">
-                  <a16:creationId xmlns:a16="http://schemas.microsoft.com/office/drawing/2014/main" id="{03D372B4-5CA1-6D04-5FEE-4A20931EDC1C}"/>
-                </a:ext>
-              </a:extLst>
-            </p:cNvPr>
-            <p:cNvSpPr/>
-            <p:nvPr/>
-          </p:nvSpPr>
-          <p:spPr>
-            <a:xfrm>
-              <a:off x="1768979" y="2451787"/>
-              <a:ext cx="438395" cy="209199"/>
-            </a:xfrm>
-            <a:prstGeom prst="curvedDownArrow">
-              <a:avLst/>
-            </a:prstGeom>
-          </p:spPr>
-          <p:style>
-            <a:lnRef idx="2">
-              <a:schemeClr val="accent1">
-                <a:shade val="15000"/>
-              </a:schemeClr>
-            </a:lnRef>
-            <a:fillRef idx="1">
-              <a:schemeClr val="accent1"/>
-            </a:fillRef>
-            <a:effectRef idx="0">
-              <a:schemeClr val="accent1"/>
-            </a:effectRef>
-            <a:fontRef idx="minor">
-              <a:schemeClr val="lt1"/>
-            </a:fontRef>
-          </p:style>
-          <p:txBody>
-            <a:bodyPr rtlCol="0" anchor="ctr"/>
-            <a:lstStyle/>
-            <a:p>
-              <a:pPr algn="ctr"/>
-              <a:endParaRPr lang="en-US" sz="1080">
-                <a:solidFill>
-                  <a:schemeClr val="tx1"/>
-                </a:solidFill>
-              </a:endParaRPr>
-            </a:p>
-          </p:txBody>
-        </p:sp>
-        <p:cxnSp>
-          <p:nvCxnSpPr>
-            <p:cNvPr id="63" name="Straight Connector 62">
-              <a:extLst>
-                <a:ext uri="{FF2B5EF4-FFF2-40B4-BE49-F238E27FC236}">
-                  <a16:creationId xmlns:a16="http://schemas.microsoft.com/office/drawing/2014/main" id="{CC79D201-EB12-17E6-107F-023C43F648D8}"/>
+                  <a16:creationId xmlns:a16="http://schemas.microsoft.com/office/drawing/2014/main" id="{3B780698-4C09-DE72-DF14-9F13CBA269E3}"/>
                 </a:ext>
               </a:extLst>
             </p:cNvPr>
@@ -3654,8 +4198,8 @@
           </p:nvCxnSpPr>
           <p:spPr>
             <a:xfrm flipH="1">
-              <a:off x="2252356" y="3033828"/>
-              <a:ext cx="97919" cy="242303"/>
+              <a:off x="4067711" y="4019741"/>
+              <a:ext cx="292493" cy="572773"/>
             </a:xfrm>
             <a:prstGeom prst="line">
               <a:avLst/>
@@ -3678,22 +4222,23 @@
         </p:cxnSp>
         <p:cxnSp>
           <p:nvCxnSpPr>
-            <p:cNvPr id="64" name="Straight Connector 63">
+            <p:cNvPr id="79" name="Straight Connector 78">
               <a:extLst>
                 <a:ext uri="{FF2B5EF4-FFF2-40B4-BE49-F238E27FC236}">
-                  <a16:creationId xmlns:a16="http://schemas.microsoft.com/office/drawing/2014/main" id="{64F56411-7FB1-5209-11B8-8A7A3F22E464}"/>
+                  <a16:creationId xmlns:a16="http://schemas.microsoft.com/office/drawing/2014/main" id="{262930B7-C41A-1248-55A6-8D24C363EFDE}"/>
                 </a:ext>
               </a:extLst>
             </p:cNvPr>
             <p:cNvCxnSpPr>
               <a:cxnSpLocks/>
+              <a:stCxn id="77" idx="5"/>
             </p:cNvCxnSpPr>
             <p:nvPr/>
           </p:nvCxnSpPr>
           <p:spPr>
             <a:xfrm>
-              <a:off x="2568133" y="3019893"/>
-              <a:ext cx="122012" cy="224057"/>
+              <a:off x="4841433" y="3930353"/>
+              <a:ext cx="325363" cy="662161"/>
             </a:xfrm>
             <a:prstGeom prst="line">
               <a:avLst/>
@@ -3714,12 +4259,1073 @@
             </a:fontRef>
           </p:style>
         </p:cxnSp>
+      </p:grpSp>
+      <p:cxnSp>
+        <p:nvCxnSpPr>
+          <p:cNvPr id="81" name="Straight Connector 80">
+            <a:extLst>
+              <a:ext uri="{FF2B5EF4-FFF2-40B4-BE49-F238E27FC236}">
+                <a16:creationId xmlns:a16="http://schemas.microsoft.com/office/drawing/2014/main" id="{7467BD60-1C5D-79DC-2824-98D5D04C1783}"/>
+              </a:ext>
+            </a:extLst>
+          </p:cNvPr>
+          <p:cNvCxnSpPr>
+            <a:cxnSpLocks/>
+            <a:stCxn id="69" idx="3"/>
+          </p:cNvCxnSpPr>
+          <p:nvPr/>
+        </p:nvCxnSpPr>
+        <p:spPr>
+          <a:xfrm flipH="1">
+            <a:off x="7723097" y="4351513"/>
+            <a:ext cx="102020" cy="471048"/>
+          </a:xfrm>
+          <a:prstGeom prst="line">
+            <a:avLst/>
+          </a:prstGeom>
+        </p:spPr>
+        <p:style>
+          <a:lnRef idx="1">
+            <a:schemeClr val="accent1"/>
+          </a:lnRef>
+          <a:fillRef idx="0">
+            <a:schemeClr val="accent1"/>
+          </a:fillRef>
+          <a:effectRef idx="0">
+            <a:schemeClr val="accent1"/>
+          </a:effectRef>
+          <a:fontRef idx="minor">
+            <a:schemeClr val="tx1"/>
+          </a:fontRef>
+        </p:style>
+      </p:cxnSp>
+      <p:cxnSp>
+        <p:nvCxnSpPr>
+          <p:cNvPr id="82" name="Straight Connector 81">
+            <a:extLst>
+              <a:ext uri="{FF2B5EF4-FFF2-40B4-BE49-F238E27FC236}">
+                <a16:creationId xmlns:a16="http://schemas.microsoft.com/office/drawing/2014/main" id="{99779D45-AFC8-84A8-3DDE-84BF76E31DA4}"/>
+              </a:ext>
+            </a:extLst>
+          </p:cNvPr>
+          <p:cNvCxnSpPr>
+            <a:cxnSpLocks/>
+            <a:stCxn id="69" idx="5"/>
+          </p:cNvCxnSpPr>
+          <p:nvPr/>
+        </p:nvCxnSpPr>
+        <p:spPr>
+          <a:xfrm>
+            <a:off x="8317714" y="4351514"/>
+            <a:ext cx="251387" cy="405776"/>
+          </a:xfrm>
+          <a:prstGeom prst="line">
+            <a:avLst/>
+          </a:prstGeom>
+        </p:spPr>
+        <p:style>
+          <a:lnRef idx="1">
+            <a:schemeClr val="accent1"/>
+          </a:lnRef>
+          <a:fillRef idx="0">
+            <a:schemeClr val="accent1"/>
+          </a:fillRef>
+          <a:effectRef idx="0">
+            <a:schemeClr val="accent1"/>
+          </a:effectRef>
+          <a:fontRef idx="minor">
+            <a:schemeClr val="tx1"/>
+          </a:fontRef>
+        </p:style>
+      </p:cxnSp>
+      <p:cxnSp>
+        <p:nvCxnSpPr>
+          <p:cNvPr id="92" name="Straight Connector 91">
+            <a:extLst>
+              <a:ext uri="{FF2B5EF4-FFF2-40B4-BE49-F238E27FC236}">
+                <a16:creationId xmlns:a16="http://schemas.microsoft.com/office/drawing/2014/main" id="{D64BD572-BBA9-4DCB-D41A-4CC4FE722C64}"/>
+              </a:ext>
+            </a:extLst>
+          </p:cNvPr>
+          <p:cNvCxnSpPr>
+            <a:cxnSpLocks/>
+          </p:cNvCxnSpPr>
+          <p:nvPr/>
+        </p:nvCxnSpPr>
+        <p:spPr>
+          <a:xfrm flipH="1">
+            <a:off x="7110085" y="3496374"/>
+            <a:ext cx="146325" cy="338377"/>
+          </a:xfrm>
+          <a:prstGeom prst="line">
+            <a:avLst/>
+          </a:prstGeom>
+        </p:spPr>
+        <p:style>
+          <a:lnRef idx="1">
+            <a:schemeClr val="accent1"/>
+          </a:lnRef>
+          <a:fillRef idx="0">
+            <a:schemeClr val="accent1"/>
+          </a:fillRef>
+          <a:effectRef idx="0">
+            <a:schemeClr val="accent1"/>
+          </a:effectRef>
+          <a:fontRef idx="minor">
+            <a:schemeClr val="tx1"/>
+          </a:fontRef>
+        </p:style>
+      </p:cxnSp>
+      <p:sp>
+        <p:nvSpPr>
+          <p:cNvPr id="112" name="Oval 111">
+            <a:extLst>
+              <a:ext uri="{FF2B5EF4-FFF2-40B4-BE49-F238E27FC236}">
+                <a16:creationId xmlns:a16="http://schemas.microsoft.com/office/drawing/2014/main" id="{B22B2A15-F92D-410E-5545-D406B74EE6FA}"/>
+              </a:ext>
+            </a:extLst>
+          </p:cNvPr>
+          <p:cNvSpPr/>
+          <p:nvPr/>
+        </p:nvSpPr>
+        <p:spPr>
+          <a:xfrm>
+            <a:off x="1485241" y="4498906"/>
+            <a:ext cx="696637" cy="696637"/>
+          </a:xfrm>
+          <a:prstGeom prst="ellipse">
+            <a:avLst/>
+          </a:prstGeom>
+          <a:solidFill>
+            <a:schemeClr val="tx1"/>
+          </a:solidFill>
+        </p:spPr>
+        <p:style>
+          <a:lnRef idx="2">
+            <a:schemeClr val="accent1">
+              <a:shade val="15000"/>
+            </a:schemeClr>
+          </a:lnRef>
+          <a:fillRef idx="1">
+            <a:schemeClr val="accent1"/>
+          </a:fillRef>
+          <a:effectRef idx="0">
+            <a:schemeClr val="accent1"/>
+          </a:effectRef>
+          <a:fontRef idx="minor">
+            <a:schemeClr val="lt1"/>
+          </a:fontRef>
+        </p:style>
+        <p:txBody>
+          <a:bodyPr rtlCol="0" anchor="ctr"/>
+          <a:lstStyle/>
+          <a:p>
+            <a:pPr algn="ctr"/>
+            <a:r>
+              <a:rPr lang="en-US" sz="2000" dirty="0"/>
+              <a:t>C2</a:t>
+            </a:r>
+          </a:p>
+        </p:txBody>
+      </p:sp>
+      <p:cxnSp>
+        <p:nvCxnSpPr>
+          <p:cNvPr id="113" name="Straight Connector 112">
+            <a:extLst>
+              <a:ext uri="{FF2B5EF4-FFF2-40B4-BE49-F238E27FC236}">
+                <a16:creationId xmlns:a16="http://schemas.microsoft.com/office/drawing/2014/main" id="{CB1CBA6D-52FD-02E5-B7CB-37BB8FF0CBE2}"/>
+              </a:ext>
+            </a:extLst>
+          </p:cNvPr>
+          <p:cNvCxnSpPr>
+            <a:cxnSpLocks/>
+          </p:cNvCxnSpPr>
+          <p:nvPr/>
+        </p:nvCxnSpPr>
+        <p:spPr>
+          <a:xfrm flipH="1">
+            <a:off x="1505162" y="5150896"/>
+            <a:ext cx="115875" cy="193675"/>
+          </a:xfrm>
+          <a:prstGeom prst="line">
+            <a:avLst/>
+          </a:prstGeom>
+        </p:spPr>
+        <p:style>
+          <a:lnRef idx="1">
+            <a:schemeClr val="accent1"/>
+          </a:lnRef>
+          <a:fillRef idx="0">
+            <a:schemeClr val="accent1"/>
+          </a:fillRef>
+          <a:effectRef idx="0">
+            <a:schemeClr val="accent1"/>
+          </a:effectRef>
+          <a:fontRef idx="minor">
+            <a:schemeClr val="tx1"/>
+          </a:fontRef>
+        </p:style>
+      </p:cxnSp>
+      <p:cxnSp>
+        <p:nvCxnSpPr>
+          <p:cNvPr id="114" name="Straight Connector 113">
+            <a:extLst>
+              <a:ext uri="{FF2B5EF4-FFF2-40B4-BE49-F238E27FC236}">
+                <a16:creationId xmlns:a16="http://schemas.microsoft.com/office/drawing/2014/main" id="{71E6E851-E401-6BAD-834F-033260BB4773}"/>
+              </a:ext>
+            </a:extLst>
+          </p:cNvPr>
+          <p:cNvCxnSpPr>
+            <a:cxnSpLocks/>
+          </p:cNvCxnSpPr>
+          <p:nvPr/>
+        </p:nvCxnSpPr>
+        <p:spPr>
+          <a:xfrm>
+            <a:off x="2099781" y="5121455"/>
+            <a:ext cx="82097" cy="305804"/>
+          </a:xfrm>
+          <a:prstGeom prst="line">
+            <a:avLst/>
+          </a:prstGeom>
+        </p:spPr>
+        <p:style>
+          <a:lnRef idx="1">
+            <a:schemeClr val="accent1"/>
+          </a:lnRef>
+          <a:fillRef idx="0">
+            <a:schemeClr val="accent1"/>
+          </a:fillRef>
+          <a:effectRef idx="0">
+            <a:schemeClr val="accent1"/>
+          </a:effectRef>
+          <a:fontRef idx="minor">
+            <a:schemeClr val="tx1"/>
+          </a:fontRef>
+        </p:style>
+      </p:cxnSp>
+      <p:sp>
+        <p:nvSpPr>
+          <p:cNvPr id="115" name="Oval 114">
+            <a:extLst>
+              <a:ext uri="{FF2B5EF4-FFF2-40B4-BE49-F238E27FC236}">
+                <a16:creationId xmlns:a16="http://schemas.microsoft.com/office/drawing/2014/main" id="{B5C44B34-0101-71F5-557D-E7B4319B1221}"/>
+              </a:ext>
+            </a:extLst>
+          </p:cNvPr>
+          <p:cNvSpPr/>
+          <p:nvPr/>
+        </p:nvSpPr>
+        <p:spPr>
+          <a:xfrm>
+            <a:off x="2132592" y="3673992"/>
+            <a:ext cx="696637" cy="696637"/>
+          </a:xfrm>
+          <a:prstGeom prst="ellipse">
+            <a:avLst/>
+          </a:prstGeom>
+          <a:solidFill>
+            <a:schemeClr val="tx1"/>
+          </a:solidFill>
+        </p:spPr>
+        <p:style>
+          <a:lnRef idx="2">
+            <a:schemeClr val="accent1">
+              <a:shade val="15000"/>
+            </a:schemeClr>
+          </a:lnRef>
+          <a:fillRef idx="1">
+            <a:schemeClr val="accent1"/>
+          </a:fillRef>
+          <a:effectRef idx="0">
+            <a:schemeClr val="accent1"/>
+          </a:effectRef>
+          <a:fontRef idx="minor">
+            <a:schemeClr val="lt1"/>
+          </a:fontRef>
+        </p:style>
+        <p:txBody>
+          <a:bodyPr rtlCol="0" anchor="ctr"/>
+          <a:lstStyle/>
+          <a:p>
+            <a:pPr algn="ctr"/>
+            <a:r>
+              <a:rPr lang="en-US" sz="4800" dirty="0"/>
+              <a:t>S</a:t>
+            </a:r>
+          </a:p>
+        </p:txBody>
+      </p:sp>
+      <p:cxnSp>
+        <p:nvCxnSpPr>
+          <p:cNvPr id="116" name="Straight Connector 115">
+            <a:extLst>
+              <a:ext uri="{FF2B5EF4-FFF2-40B4-BE49-F238E27FC236}">
+                <a16:creationId xmlns:a16="http://schemas.microsoft.com/office/drawing/2014/main" id="{EC303F48-C0F0-EB53-D7EB-B56B882C5A16}"/>
+              </a:ext>
+            </a:extLst>
+          </p:cNvPr>
+          <p:cNvCxnSpPr>
+            <a:cxnSpLocks/>
+            <a:stCxn id="115" idx="3"/>
+          </p:cNvCxnSpPr>
+          <p:nvPr/>
+        </p:nvCxnSpPr>
+        <p:spPr>
+          <a:xfrm flipH="1">
+            <a:off x="2168803" y="4268608"/>
+            <a:ext cx="65809" cy="166963"/>
+          </a:xfrm>
+          <a:prstGeom prst="line">
+            <a:avLst/>
+          </a:prstGeom>
+        </p:spPr>
+        <p:style>
+          <a:lnRef idx="1">
+            <a:schemeClr val="accent1"/>
+          </a:lnRef>
+          <a:fillRef idx="0">
+            <a:schemeClr val="accent1"/>
+          </a:fillRef>
+          <a:effectRef idx="0">
+            <a:schemeClr val="accent1"/>
+          </a:effectRef>
+          <a:fontRef idx="minor">
+            <a:schemeClr val="tx1"/>
+          </a:fontRef>
+        </p:style>
+      </p:cxnSp>
+      <p:cxnSp>
+        <p:nvCxnSpPr>
+          <p:cNvPr id="117" name="Straight Connector 116">
+            <a:extLst>
+              <a:ext uri="{FF2B5EF4-FFF2-40B4-BE49-F238E27FC236}">
+                <a16:creationId xmlns:a16="http://schemas.microsoft.com/office/drawing/2014/main" id="{7FDECA90-4CAD-94AA-470F-2ED90EA2F225}"/>
+              </a:ext>
+            </a:extLst>
+          </p:cNvPr>
+          <p:cNvCxnSpPr>
+            <a:cxnSpLocks/>
+          </p:cNvCxnSpPr>
+          <p:nvPr/>
+        </p:nvCxnSpPr>
+        <p:spPr>
+          <a:xfrm>
+            <a:off x="2716923" y="4250230"/>
+            <a:ext cx="112304" cy="185339"/>
+          </a:xfrm>
+          <a:prstGeom prst="line">
+            <a:avLst/>
+          </a:prstGeom>
+        </p:spPr>
+        <p:style>
+          <a:lnRef idx="1">
+            <a:schemeClr val="accent1"/>
+          </a:lnRef>
+          <a:fillRef idx="0">
+            <a:schemeClr val="accent1"/>
+          </a:fillRef>
+          <a:effectRef idx="0">
+            <a:schemeClr val="accent1"/>
+          </a:effectRef>
+          <a:fontRef idx="minor">
+            <a:schemeClr val="tx1"/>
+          </a:fontRef>
+        </p:style>
+      </p:cxnSp>
+      <p:sp>
+        <p:nvSpPr>
+          <p:cNvPr id="124" name="Oval 123">
+            <a:extLst>
+              <a:ext uri="{FF2B5EF4-FFF2-40B4-BE49-F238E27FC236}">
+                <a16:creationId xmlns:a16="http://schemas.microsoft.com/office/drawing/2014/main" id="{2B11ECDB-5E2A-6E97-30E7-2A0E64B0EB98}"/>
+              </a:ext>
+            </a:extLst>
+          </p:cNvPr>
+          <p:cNvSpPr/>
+          <p:nvPr/>
+        </p:nvSpPr>
+        <p:spPr>
+          <a:xfrm>
+            <a:off x="5468540" y="3829096"/>
+            <a:ext cx="696637" cy="696637"/>
+          </a:xfrm>
+          <a:prstGeom prst="ellipse">
+            <a:avLst/>
+          </a:prstGeom>
+          <a:solidFill>
+            <a:schemeClr val="tx1"/>
+          </a:solidFill>
+        </p:spPr>
+        <p:style>
+          <a:lnRef idx="2">
+            <a:schemeClr val="accent1">
+              <a:shade val="15000"/>
+            </a:schemeClr>
+          </a:lnRef>
+          <a:fillRef idx="1">
+            <a:schemeClr val="accent1"/>
+          </a:fillRef>
+          <a:effectRef idx="0">
+            <a:schemeClr val="accent1"/>
+          </a:effectRef>
+          <a:fontRef idx="minor">
+            <a:schemeClr val="lt1"/>
+          </a:fontRef>
+        </p:style>
+        <p:txBody>
+          <a:bodyPr rtlCol="0" anchor="ctr"/>
+          <a:lstStyle/>
+          <a:p>
+            <a:pPr algn="ctr"/>
+            <a:r>
+              <a:rPr lang="en-US" sz="2000" dirty="0"/>
+              <a:t>C2</a:t>
+            </a:r>
+          </a:p>
+        </p:txBody>
+      </p:sp>
+      <p:cxnSp>
+        <p:nvCxnSpPr>
+          <p:cNvPr id="125" name="Straight Connector 124">
+            <a:extLst>
+              <a:ext uri="{FF2B5EF4-FFF2-40B4-BE49-F238E27FC236}">
+                <a16:creationId xmlns:a16="http://schemas.microsoft.com/office/drawing/2014/main" id="{4B757B2C-563F-7B7F-ADA7-D56901A2B3FC}"/>
+              </a:ext>
+            </a:extLst>
+          </p:cNvPr>
+          <p:cNvCxnSpPr>
+            <a:cxnSpLocks/>
+          </p:cNvCxnSpPr>
+          <p:nvPr/>
+        </p:nvCxnSpPr>
+        <p:spPr>
+          <a:xfrm flipH="1">
+            <a:off x="5495953" y="4481084"/>
+            <a:ext cx="108385" cy="317277"/>
+          </a:xfrm>
+          <a:prstGeom prst="line">
+            <a:avLst/>
+          </a:prstGeom>
+        </p:spPr>
+        <p:style>
+          <a:lnRef idx="1">
+            <a:schemeClr val="accent1"/>
+          </a:lnRef>
+          <a:fillRef idx="0">
+            <a:schemeClr val="accent1"/>
+          </a:fillRef>
+          <a:effectRef idx="0">
+            <a:schemeClr val="accent1"/>
+          </a:effectRef>
+          <a:fontRef idx="minor">
+            <a:schemeClr val="tx1"/>
+          </a:fontRef>
+        </p:style>
+      </p:cxnSp>
+      <p:cxnSp>
+        <p:nvCxnSpPr>
+          <p:cNvPr id="126" name="Straight Connector 125">
+            <a:extLst>
+              <a:ext uri="{FF2B5EF4-FFF2-40B4-BE49-F238E27FC236}">
+                <a16:creationId xmlns:a16="http://schemas.microsoft.com/office/drawing/2014/main" id="{2CE44B38-FAC9-2EC2-4FD4-9652C78EB90D}"/>
+              </a:ext>
+            </a:extLst>
+          </p:cNvPr>
+          <p:cNvCxnSpPr>
+            <a:cxnSpLocks/>
+          </p:cNvCxnSpPr>
+          <p:nvPr/>
+        </p:nvCxnSpPr>
+        <p:spPr>
+          <a:xfrm>
+            <a:off x="6083077" y="4451648"/>
+            <a:ext cx="197228" cy="346715"/>
+          </a:xfrm>
+          <a:prstGeom prst="line">
+            <a:avLst/>
+          </a:prstGeom>
+        </p:spPr>
+        <p:style>
+          <a:lnRef idx="1">
+            <a:schemeClr val="accent1"/>
+          </a:lnRef>
+          <a:fillRef idx="0">
+            <a:schemeClr val="accent1"/>
+          </a:fillRef>
+          <a:effectRef idx="0">
+            <a:schemeClr val="accent1"/>
+          </a:effectRef>
+          <a:fontRef idx="minor">
+            <a:schemeClr val="tx1"/>
+          </a:fontRef>
+        </p:style>
+      </p:cxnSp>
+      <p:sp>
+        <p:nvSpPr>
+          <p:cNvPr id="132" name="Oval 131">
+            <a:extLst>
+              <a:ext uri="{FF2B5EF4-FFF2-40B4-BE49-F238E27FC236}">
+                <a16:creationId xmlns:a16="http://schemas.microsoft.com/office/drawing/2014/main" id="{826666E2-1EBB-93CB-067F-36E425446072}"/>
+              </a:ext>
+            </a:extLst>
+          </p:cNvPr>
+          <p:cNvSpPr/>
+          <p:nvPr/>
+        </p:nvSpPr>
+        <p:spPr>
+          <a:xfrm>
+            <a:off x="6640871" y="3834558"/>
+            <a:ext cx="696637" cy="696637"/>
+          </a:xfrm>
+          <a:prstGeom prst="ellipse">
+            <a:avLst/>
+          </a:prstGeom>
+          <a:solidFill>
+            <a:schemeClr val="tx1"/>
+          </a:solidFill>
+        </p:spPr>
+        <p:style>
+          <a:lnRef idx="2">
+            <a:schemeClr val="accent1">
+              <a:shade val="15000"/>
+            </a:schemeClr>
+          </a:lnRef>
+          <a:fillRef idx="1">
+            <a:schemeClr val="accent1"/>
+          </a:fillRef>
+          <a:effectRef idx="0">
+            <a:schemeClr val="accent1"/>
+          </a:effectRef>
+          <a:fontRef idx="minor">
+            <a:schemeClr val="lt1"/>
+          </a:fontRef>
+        </p:style>
+        <p:txBody>
+          <a:bodyPr rtlCol="0" anchor="ctr"/>
+          <a:lstStyle/>
+          <a:p>
+            <a:pPr algn="ctr"/>
+            <a:r>
+              <a:rPr lang="en-US" sz="4800" dirty="0"/>
+              <a:t>S</a:t>
+            </a:r>
+          </a:p>
+        </p:txBody>
+      </p:sp>
+      <p:cxnSp>
+        <p:nvCxnSpPr>
+          <p:cNvPr id="135" name="Straight Connector 134">
+            <a:extLst>
+              <a:ext uri="{FF2B5EF4-FFF2-40B4-BE49-F238E27FC236}">
+                <a16:creationId xmlns:a16="http://schemas.microsoft.com/office/drawing/2014/main" id="{39C1F9DC-1F9E-E182-C399-2DD83548A2C6}"/>
+              </a:ext>
+            </a:extLst>
+          </p:cNvPr>
+          <p:cNvCxnSpPr>
+            <a:cxnSpLocks/>
+          </p:cNvCxnSpPr>
+          <p:nvPr/>
+        </p:nvCxnSpPr>
+        <p:spPr>
+          <a:xfrm flipH="1">
+            <a:off x="6671331" y="4477542"/>
+            <a:ext cx="108385" cy="317277"/>
+          </a:xfrm>
+          <a:prstGeom prst="line">
+            <a:avLst/>
+          </a:prstGeom>
+        </p:spPr>
+        <p:style>
+          <a:lnRef idx="1">
+            <a:schemeClr val="accent1"/>
+          </a:lnRef>
+          <a:fillRef idx="0">
+            <a:schemeClr val="accent1"/>
+          </a:fillRef>
+          <a:effectRef idx="0">
+            <a:schemeClr val="accent1"/>
+          </a:effectRef>
+          <a:fontRef idx="minor">
+            <a:schemeClr val="tx1"/>
+          </a:fontRef>
+        </p:style>
+      </p:cxnSp>
+      <p:cxnSp>
+        <p:nvCxnSpPr>
+          <p:cNvPr id="136" name="Straight Connector 135">
+            <a:extLst>
+              <a:ext uri="{FF2B5EF4-FFF2-40B4-BE49-F238E27FC236}">
+                <a16:creationId xmlns:a16="http://schemas.microsoft.com/office/drawing/2014/main" id="{FEE5E9CF-B0EA-D180-3D78-A947EB9EFC5A}"/>
+              </a:ext>
+            </a:extLst>
+          </p:cNvPr>
+          <p:cNvCxnSpPr>
+            <a:cxnSpLocks/>
+          </p:cNvCxnSpPr>
+          <p:nvPr/>
+        </p:nvCxnSpPr>
+        <p:spPr>
+          <a:xfrm>
+            <a:off x="7207003" y="4448106"/>
+            <a:ext cx="197228" cy="346715"/>
+          </a:xfrm>
+          <a:prstGeom prst="line">
+            <a:avLst/>
+          </a:prstGeom>
+        </p:spPr>
+        <p:style>
+          <a:lnRef idx="1">
+            <a:schemeClr val="accent1"/>
+          </a:lnRef>
+          <a:fillRef idx="0">
+            <a:schemeClr val="accent1"/>
+          </a:fillRef>
+          <a:effectRef idx="0">
+            <a:schemeClr val="accent1"/>
+          </a:effectRef>
+          <a:fontRef idx="minor">
+            <a:schemeClr val="tx1"/>
+          </a:fontRef>
+        </p:style>
+      </p:cxnSp>
+      <p:sp>
+        <p:nvSpPr>
+          <p:cNvPr id="140" name="Oval 139">
+            <a:extLst>
+              <a:ext uri="{FF2B5EF4-FFF2-40B4-BE49-F238E27FC236}">
+                <a16:creationId xmlns:a16="http://schemas.microsoft.com/office/drawing/2014/main" id="{4C59DBF0-6304-2BC2-6214-65158FCF4BCD}"/>
+              </a:ext>
+            </a:extLst>
+          </p:cNvPr>
+          <p:cNvSpPr/>
+          <p:nvPr/>
+        </p:nvSpPr>
+        <p:spPr>
+          <a:xfrm>
+            <a:off x="12101491" y="2740627"/>
+            <a:ext cx="696637" cy="696637"/>
+          </a:xfrm>
+          <a:prstGeom prst="ellipse">
+            <a:avLst/>
+          </a:prstGeom>
+          <a:solidFill>
+            <a:srgbClr val="FF0000"/>
+          </a:solidFill>
+        </p:spPr>
+        <p:style>
+          <a:lnRef idx="2">
+            <a:schemeClr val="accent1">
+              <a:shade val="15000"/>
+            </a:schemeClr>
+          </a:lnRef>
+          <a:fillRef idx="1">
+            <a:schemeClr val="accent1"/>
+          </a:fillRef>
+          <a:effectRef idx="0">
+            <a:schemeClr val="accent1"/>
+          </a:effectRef>
+          <a:fontRef idx="minor">
+            <a:schemeClr val="lt1"/>
+          </a:fontRef>
+        </p:style>
+        <p:txBody>
+          <a:bodyPr rtlCol="0" anchor="ctr"/>
+          <a:lstStyle/>
+          <a:p>
+            <a:pPr algn="ctr"/>
+            <a:r>
+              <a:rPr lang="en-US" sz="4800" dirty="0"/>
+              <a:t>G</a:t>
+            </a:r>
+          </a:p>
+        </p:txBody>
+      </p:sp>
+      <p:sp>
+        <p:nvSpPr>
+          <p:cNvPr id="141" name="Oval 140">
+            <a:extLst>
+              <a:ext uri="{FF2B5EF4-FFF2-40B4-BE49-F238E27FC236}">
+                <a16:creationId xmlns:a16="http://schemas.microsoft.com/office/drawing/2014/main" id="{774094E5-B2F6-EA19-FD56-F12BFA6A3AF7}"/>
+              </a:ext>
+            </a:extLst>
+          </p:cNvPr>
+          <p:cNvSpPr/>
+          <p:nvPr/>
+        </p:nvSpPr>
+        <p:spPr>
+          <a:xfrm>
+            <a:off x="11132744" y="1902341"/>
+            <a:ext cx="696637" cy="696637"/>
+          </a:xfrm>
+          <a:prstGeom prst="ellipse">
+            <a:avLst/>
+          </a:prstGeom>
+          <a:solidFill>
+            <a:schemeClr val="tx1"/>
+          </a:solidFill>
+        </p:spPr>
+        <p:style>
+          <a:lnRef idx="2">
+            <a:schemeClr val="accent1">
+              <a:shade val="15000"/>
+            </a:schemeClr>
+          </a:lnRef>
+          <a:fillRef idx="1">
+            <a:schemeClr val="accent1"/>
+          </a:fillRef>
+          <a:effectRef idx="0">
+            <a:schemeClr val="accent1"/>
+          </a:effectRef>
+          <a:fontRef idx="minor">
+            <a:schemeClr val="lt1"/>
+          </a:fontRef>
+        </p:style>
+        <p:txBody>
+          <a:bodyPr rtlCol="0" anchor="ctr"/>
+          <a:lstStyle/>
+          <a:p>
+            <a:pPr algn="ctr"/>
+            <a:r>
+              <a:rPr lang="en-US" sz="4800" dirty="0"/>
+              <a:t>P</a:t>
+            </a:r>
+          </a:p>
+        </p:txBody>
+      </p:sp>
+      <p:sp>
+        <p:nvSpPr>
+          <p:cNvPr id="142" name="Oval 141">
+            <a:extLst>
+              <a:ext uri="{FF2B5EF4-FFF2-40B4-BE49-F238E27FC236}">
+                <a16:creationId xmlns:a16="http://schemas.microsoft.com/office/drawing/2014/main" id="{3B34A82D-CA22-0242-E8FD-E1E009E011D2}"/>
+              </a:ext>
+            </a:extLst>
+          </p:cNvPr>
+          <p:cNvSpPr/>
+          <p:nvPr/>
+        </p:nvSpPr>
+        <p:spPr>
+          <a:xfrm>
+            <a:off x="10118820" y="2757812"/>
+            <a:ext cx="696637" cy="696637"/>
+          </a:xfrm>
+          <a:prstGeom prst="ellipse">
+            <a:avLst/>
+          </a:prstGeom>
+          <a:solidFill>
+            <a:srgbClr val="FF0000"/>
+          </a:solidFill>
+        </p:spPr>
+        <p:style>
+          <a:lnRef idx="2">
+            <a:schemeClr val="accent1">
+              <a:shade val="15000"/>
+            </a:schemeClr>
+          </a:lnRef>
+          <a:fillRef idx="1">
+            <a:schemeClr val="accent1"/>
+          </a:fillRef>
+          <a:effectRef idx="0">
+            <a:schemeClr val="accent1"/>
+          </a:effectRef>
+          <a:fontRef idx="minor">
+            <a:schemeClr val="lt1"/>
+          </a:fontRef>
+        </p:style>
+        <p:txBody>
+          <a:bodyPr rtlCol="0" anchor="ctr"/>
+          <a:lstStyle/>
+          <a:p>
+            <a:pPr algn="ctr"/>
+            <a:r>
+              <a:rPr lang="en-US" sz="4800" dirty="0"/>
+              <a:t>N</a:t>
+            </a:r>
+          </a:p>
+        </p:txBody>
+      </p:sp>
+      <p:sp>
+        <p:nvSpPr>
+          <p:cNvPr id="143" name="Oval 142">
+            <a:extLst>
+              <a:ext uri="{FF2B5EF4-FFF2-40B4-BE49-F238E27FC236}">
+                <a16:creationId xmlns:a16="http://schemas.microsoft.com/office/drawing/2014/main" id="{9C32469C-0302-AEA3-6AD8-1DCB3F8096BC}"/>
+              </a:ext>
+            </a:extLst>
+          </p:cNvPr>
+          <p:cNvSpPr/>
+          <p:nvPr/>
+        </p:nvSpPr>
+        <p:spPr>
+          <a:xfrm>
+            <a:off x="12794637" y="3654878"/>
+            <a:ext cx="696637" cy="696637"/>
+          </a:xfrm>
+          <a:prstGeom prst="ellipse">
+            <a:avLst/>
+          </a:prstGeom>
+          <a:solidFill>
+            <a:schemeClr val="tx1"/>
+          </a:solidFill>
+        </p:spPr>
+        <p:style>
+          <a:lnRef idx="2">
+            <a:schemeClr val="accent1">
+              <a:shade val="15000"/>
+            </a:schemeClr>
+          </a:lnRef>
+          <a:fillRef idx="1">
+            <a:schemeClr val="accent1"/>
+          </a:fillRef>
+          <a:effectRef idx="0">
+            <a:schemeClr val="accent1"/>
+          </a:effectRef>
+          <a:fontRef idx="minor">
+            <a:schemeClr val="lt1"/>
+          </a:fontRef>
+        </p:style>
+        <p:txBody>
+          <a:bodyPr rtlCol="0" anchor="ctr"/>
+          <a:lstStyle/>
+          <a:p>
+            <a:pPr algn="ctr"/>
+            <a:r>
+              <a:rPr lang="en-US" sz="4800" dirty="0"/>
+              <a:t>U</a:t>
+            </a:r>
+          </a:p>
+        </p:txBody>
+      </p:sp>
+      <p:cxnSp>
+        <p:nvCxnSpPr>
+          <p:cNvPr id="144" name="Straight Connector 143">
+            <a:extLst>
+              <a:ext uri="{FF2B5EF4-FFF2-40B4-BE49-F238E27FC236}">
+                <a16:creationId xmlns:a16="http://schemas.microsoft.com/office/drawing/2014/main" id="{A7771747-55D2-4033-82A2-79BE8B0145A2}"/>
+              </a:ext>
+            </a:extLst>
+          </p:cNvPr>
+          <p:cNvCxnSpPr>
+            <a:cxnSpLocks/>
+            <a:stCxn id="140" idx="0"/>
+            <a:endCxn id="141" idx="5"/>
+          </p:cNvCxnSpPr>
+          <p:nvPr/>
+        </p:nvCxnSpPr>
+        <p:spPr>
+          <a:xfrm flipH="1" flipV="1">
+            <a:off x="11727358" y="2496955"/>
+            <a:ext cx="722450" cy="243669"/>
+          </a:xfrm>
+          <a:prstGeom prst="line">
+            <a:avLst/>
+          </a:prstGeom>
+          <a:ln>
+            <a:solidFill>
+              <a:schemeClr val="accent1"/>
+            </a:solidFill>
+          </a:ln>
+        </p:spPr>
+        <p:style>
+          <a:lnRef idx="1">
+            <a:schemeClr val="dk1"/>
+          </a:lnRef>
+          <a:fillRef idx="0">
+            <a:schemeClr val="dk1"/>
+          </a:fillRef>
+          <a:effectRef idx="0">
+            <a:schemeClr val="dk1"/>
+          </a:effectRef>
+          <a:fontRef idx="minor">
+            <a:schemeClr val="tx1"/>
+          </a:fontRef>
+        </p:style>
+      </p:cxnSp>
+      <p:cxnSp>
+        <p:nvCxnSpPr>
+          <p:cNvPr id="145" name="Straight Connector 144">
+            <a:extLst>
+              <a:ext uri="{FF2B5EF4-FFF2-40B4-BE49-F238E27FC236}">
+                <a16:creationId xmlns:a16="http://schemas.microsoft.com/office/drawing/2014/main" id="{50B9D1CF-AE66-A858-0226-A76E48C2E859}"/>
+              </a:ext>
+            </a:extLst>
+          </p:cNvPr>
+          <p:cNvCxnSpPr>
+            <a:stCxn id="140" idx="5"/>
+            <a:endCxn id="143" idx="1"/>
+          </p:cNvCxnSpPr>
+          <p:nvPr/>
+        </p:nvCxnSpPr>
+        <p:spPr>
+          <a:xfrm>
+            <a:off x="12696106" y="3335241"/>
+            <a:ext cx="200548" cy="421657"/>
+          </a:xfrm>
+          <a:prstGeom prst="line">
+            <a:avLst/>
+          </a:prstGeom>
+        </p:spPr>
+        <p:style>
+          <a:lnRef idx="1">
+            <a:schemeClr val="accent1"/>
+          </a:lnRef>
+          <a:fillRef idx="0">
+            <a:schemeClr val="accent1"/>
+          </a:fillRef>
+          <a:effectRef idx="0">
+            <a:schemeClr val="accent1"/>
+          </a:effectRef>
+          <a:fontRef idx="minor">
+            <a:schemeClr val="tx1"/>
+          </a:fontRef>
+        </p:style>
+      </p:cxnSp>
+      <p:cxnSp>
+        <p:nvCxnSpPr>
+          <p:cNvPr id="146" name="Straight Connector 145">
+            <a:extLst>
+              <a:ext uri="{FF2B5EF4-FFF2-40B4-BE49-F238E27FC236}">
+                <a16:creationId xmlns:a16="http://schemas.microsoft.com/office/drawing/2014/main" id="{BD2C3B6C-B477-0A6C-F7F5-AB8082049896}"/>
+              </a:ext>
+            </a:extLst>
+          </p:cNvPr>
+          <p:cNvCxnSpPr>
+            <a:cxnSpLocks/>
+            <a:stCxn id="142" idx="5"/>
+          </p:cNvCxnSpPr>
+          <p:nvPr/>
+        </p:nvCxnSpPr>
+        <p:spPr>
+          <a:xfrm>
+            <a:off x="10713436" y="3352427"/>
+            <a:ext cx="284170" cy="423207"/>
+          </a:xfrm>
+          <a:prstGeom prst="line">
+            <a:avLst/>
+          </a:prstGeom>
+        </p:spPr>
+        <p:style>
+          <a:lnRef idx="1">
+            <a:schemeClr val="accent1"/>
+          </a:lnRef>
+          <a:fillRef idx="0">
+            <a:schemeClr val="accent1"/>
+          </a:fillRef>
+          <a:effectRef idx="0">
+            <a:schemeClr val="accent1"/>
+          </a:effectRef>
+          <a:fontRef idx="minor">
+            <a:schemeClr val="tx1"/>
+          </a:fontRef>
+        </p:style>
+      </p:cxnSp>
+      <p:cxnSp>
+        <p:nvCxnSpPr>
+          <p:cNvPr id="147" name="Straight Connector 146">
+            <a:extLst>
+              <a:ext uri="{FF2B5EF4-FFF2-40B4-BE49-F238E27FC236}">
+                <a16:creationId xmlns:a16="http://schemas.microsoft.com/office/drawing/2014/main" id="{AB3CBD43-BA80-2582-2ADF-AF0F57D1FD8A}"/>
+              </a:ext>
+            </a:extLst>
+          </p:cNvPr>
+          <p:cNvCxnSpPr>
+            <a:cxnSpLocks/>
+            <a:stCxn id="142" idx="3"/>
+            <a:endCxn id="150" idx="7"/>
+          </p:cNvCxnSpPr>
+          <p:nvPr/>
+        </p:nvCxnSpPr>
+        <p:spPr>
+          <a:xfrm flipH="1">
+            <a:off x="9949131" y="3352427"/>
+            <a:ext cx="271707" cy="423207"/>
+          </a:xfrm>
+          <a:prstGeom prst="line">
+            <a:avLst/>
+          </a:prstGeom>
+        </p:spPr>
+        <p:style>
+          <a:lnRef idx="1">
+            <a:schemeClr val="accent1"/>
+          </a:lnRef>
+          <a:fillRef idx="0">
+            <a:schemeClr val="accent1"/>
+          </a:fillRef>
+          <a:effectRef idx="0">
+            <a:schemeClr val="accent1"/>
+          </a:effectRef>
+          <a:fontRef idx="minor">
+            <a:schemeClr val="tx1"/>
+          </a:fontRef>
+        </p:style>
+      </p:cxnSp>
+      <p:cxnSp>
+        <p:nvCxnSpPr>
+          <p:cNvPr id="148" name="Straight Connector 147">
+            <a:extLst>
+              <a:ext uri="{FF2B5EF4-FFF2-40B4-BE49-F238E27FC236}">
+                <a16:creationId xmlns:a16="http://schemas.microsoft.com/office/drawing/2014/main" id="{7FB49634-6F82-E411-BDF1-B77DE6BD0C88}"/>
+              </a:ext>
+            </a:extLst>
+          </p:cNvPr>
+          <p:cNvCxnSpPr>
+            <a:cxnSpLocks/>
+            <a:stCxn id="141" idx="3"/>
+            <a:endCxn id="142" idx="7"/>
+          </p:cNvCxnSpPr>
+          <p:nvPr/>
+        </p:nvCxnSpPr>
+        <p:spPr>
+          <a:xfrm flipH="1">
+            <a:off x="10713435" y="2496955"/>
+            <a:ext cx="521329" cy="362874"/>
+          </a:xfrm>
+          <a:prstGeom prst="line">
+            <a:avLst/>
+          </a:prstGeom>
+        </p:spPr>
+        <p:style>
+          <a:lnRef idx="1">
+            <a:schemeClr val="accent1"/>
+          </a:lnRef>
+          <a:fillRef idx="0">
+            <a:schemeClr val="accent1"/>
+          </a:fillRef>
+          <a:effectRef idx="0">
+            <a:schemeClr val="accent1"/>
+          </a:effectRef>
+          <a:fontRef idx="minor">
+            <a:schemeClr val="tx1"/>
+          </a:fontRef>
+        </p:style>
+      </p:cxnSp>
+      <p:grpSp>
+        <p:nvGrpSpPr>
+          <p:cNvPr id="149" name="Group 148">
+            <a:extLst>
+              <a:ext uri="{FF2B5EF4-FFF2-40B4-BE49-F238E27FC236}">
+                <a16:creationId xmlns:a16="http://schemas.microsoft.com/office/drawing/2014/main" id="{D4F3CECE-2093-EF1F-E9A1-00F19BA60EB6}"/>
+              </a:ext>
+            </a:extLst>
+          </p:cNvPr>
+          <p:cNvGrpSpPr/>
+          <p:nvPr/>
+        </p:nvGrpSpPr>
+        <p:grpSpPr>
+          <a:xfrm>
+            <a:off x="9336093" y="3673614"/>
+            <a:ext cx="870832" cy="1119264"/>
+            <a:chOff x="4067711" y="3179882"/>
+            <a:chExt cx="1099085" cy="1412632"/>
+          </a:xfrm>
+        </p:grpSpPr>
         <p:sp>
           <p:nvSpPr>
-            <p:cNvPr id="66" name="Oval 65">
+            <p:cNvPr id="150" name="Oval 149">
               <a:extLst>
                 <a:ext uri="{FF2B5EF4-FFF2-40B4-BE49-F238E27FC236}">
-                  <a16:creationId xmlns:a16="http://schemas.microsoft.com/office/drawing/2014/main" id="{45C58CC5-8C51-1F56-1E09-DBF2C4C8EB7C}"/>
+                  <a16:creationId xmlns:a16="http://schemas.microsoft.com/office/drawing/2014/main" id="{6D5F07BE-6069-47F7-E95B-044D63D98906}"/>
                 </a:ext>
               </a:extLst>
             </p:cNvPr>
@@ -3728,8 +5334,8 @@
           </p:nvSpPr>
           <p:spPr>
             <a:xfrm>
-              <a:off x="5368821" y="2614399"/>
-              <a:ext cx="527539" cy="527539"/>
+              <a:off x="4090962" y="3179882"/>
+              <a:ext cx="879231" cy="879231"/>
             </a:xfrm>
             <a:prstGeom prst="ellipse">
               <a:avLst/>
@@ -3760,605 +5366,18 @@
             <a:p>
               <a:pPr algn="ctr"/>
               <a:r>
-                <a:rPr lang="en-US" sz="1080" dirty="0"/>
-                <a:t>G</a:t>
-              </a:r>
-            </a:p>
-          </p:txBody>
-        </p:sp>
-        <p:sp>
-          <p:nvSpPr>
-            <p:cNvPr id="67" name="Oval 66">
-              <a:extLst>
-                <a:ext uri="{FF2B5EF4-FFF2-40B4-BE49-F238E27FC236}">
-                  <a16:creationId xmlns:a16="http://schemas.microsoft.com/office/drawing/2014/main" id="{F461D42A-36C1-0ED0-3935-E455B3AB3112}"/>
-                </a:ext>
-              </a:extLst>
-            </p:cNvPr>
-            <p:cNvSpPr/>
-            <p:nvPr/>
-          </p:nvSpPr>
-          <p:spPr>
-            <a:xfrm>
-              <a:off x="4635222" y="1979595"/>
-              <a:ext cx="527539" cy="527539"/>
-            </a:xfrm>
-            <a:prstGeom prst="ellipse">
-              <a:avLst/>
-            </a:prstGeom>
-            <a:solidFill>
-              <a:srgbClr val="FF0000"/>
-            </a:solidFill>
-          </p:spPr>
-          <p:style>
-            <a:lnRef idx="2">
-              <a:schemeClr val="accent1">
-                <a:shade val="15000"/>
-              </a:schemeClr>
-            </a:lnRef>
-            <a:fillRef idx="1">
-              <a:schemeClr val="accent1"/>
-            </a:fillRef>
-            <a:effectRef idx="0">
-              <a:schemeClr val="accent1"/>
-            </a:effectRef>
-            <a:fontRef idx="minor">
-              <a:schemeClr val="lt1"/>
-            </a:fontRef>
-          </p:style>
-          <p:txBody>
-            <a:bodyPr rtlCol="0" anchor="ctr"/>
-            <a:lstStyle/>
-            <a:p>
-              <a:pPr algn="ctr"/>
-              <a:r>
-                <a:rPr lang="en-US" sz="1080" dirty="0"/>
-                <a:t>P</a:t>
-              </a:r>
-            </a:p>
-          </p:txBody>
-        </p:sp>
-        <p:sp>
-          <p:nvSpPr>
-            <p:cNvPr id="68" name="Oval 67">
-              <a:extLst>
-                <a:ext uri="{FF2B5EF4-FFF2-40B4-BE49-F238E27FC236}">
-                  <a16:creationId xmlns:a16="http://schemas.microsoft.com/office/drawing/2014/main" id="{D610B6C8-2E98-D33B-84D5-296E52FEEDB7}"/>
-                </a:ext>
-              </a:extLst>
-            </p:cNvPr>
-            <p:cNvSpPr/>
-            <p:nvPr/>
-          </p:nvSpPr>
-          <p:spPr>
-            <a:xfrm>
-              <a:off x="3867412" y="2627413"/>
-              <a:ext cx="527539" cy="527539"/>
-            </a:xfrm>
-            <a:prstGeom prst="ellipse">
-              <a:avLst/>
-            </a:prstGeom>
-            <a:solidFill>
-              <a:srgbClr val="FF0000"/>
-            </a:solidFill>
-          </p:spPr>
-          <p:style>
-            <a:lnRef idx="2">
-              <a:schemeClr val="accent1">
-                <a:shade val="15000"/>
-              </a:schemeClr>
-            </a:lnRef>
-            <a:fillRef idx="1">
-              <a:schemeClr val="accent1"/>
-            </a:fillRef>
-            <a:effectRef idx="0">
-              <a:schemeClr val="accent1"/>
-            </a:effectRef>
-            <a:fontRef idx="minor">
-              <a:schemeClr val="lt1"/>
-            </a:fontRef>
-          </p:style>
-          <p:txBody>
-            <a:bodyPr rtlCol="0" anchor="ctr"/>
-            <a:lstStyle/>
-            <a:p>
-              <a:pPr algn="ctr"/>
-              <a:r>
-                <a:rPr lang="en-US" sz="1080" dirty="0"/>
-                <a:t>N</a:t>
-              </a:r>
-            </a:p>
-          </p:txBody>
-        </p:sp>
-        <p:sp>
-          <p:nvSpPr>
-            <p:cNvPr id="69" name="Oval 68">
-              <a:extLst>
-                <a:ext uri="{FF2B5EF4-FFF2-40B4-BE49-F238E27FC236}">
-                  <a16:creationId xmlns:a16="http://schemas.microsoft.com/office/drawing/2014/main" id="{74A0E971-1E56-FFB9-3957-C32BD2883D27}"/>
-                </a:ext>
-              </a:extLst>
-            </p:cNvPr>
-            <p:cNvSpPr/>
-            <p:nvPr/>
-          </p:nvSpPr>
-          <p:spPr>
-            <a:xfrm>
-              <a:off x="5893715" y="3306732"/>
-              <a:ext cx="527539" cy="527539"/>
-            </a:xfrm>
-            <a:prstGeom prst="ellipse">
-              <a:avLst/>
-            </a:prstGeom>
-            <a:solidFill>
-              <a:schemeClr val="tx1"/>
-            </a:solidFill>
-          </p:spPr>
-          <p:style>
-            <a:lnRef idx="2">
-              <a:schemeClr val="accent1">
-                <a:shade val="15000"/>
-              </a:schemeClr>
-            </a:lnRef>
-            <a:fillRef idx="1">
-              <a:schemeClr val="accent1"/>
-            </a:fillRef>
-            <a:effectRef idx="0">
-              <a:schemeClr val="accent1"/>
-            </a:effectRef>
-            <a:fontRef idx="minor">
-              <a:schemeClr val="lt1"/>
-            </a:fontRef>
-          </p:style>
-          <p:txBody>
-            <a:bodyPr rtlCol="0" anchor="ctr"/>
-            <a:lstStyle/>
-            <a:p>
-              <a:pPr algn="ctr"/>
-              <a:r>
-                <a:rPr lang="en-US" sz="1080" dirty="0"/>
-                <a:t>U</a:t>
+                <a:rPr lang="en-US" sz="2000" dirty="0"/>
+                <a:t>C1</a:t>
               </a:r>
             </a:p>
           </p:txBody>
         </p:sp>
         <p:cxnSp>
           <p:nvCxnSpPr>
-            <p:cNvPr id="70" name="Straight Connector 69">
+            <p:cNvPr id="151" name="Straight Connector 150">
               <a:extLst>
                 <a:ext uri="{FF2B5EF4-FFF2-40B4-BE49-F238E27FC236}">
-                  <a16:creationId xmlns:a16="http://schemas.microsoft.com/office/drawing/2014/main" id="{484556A7-ECEA-122A-3C3A-C4DABFAA311C}"/>
-                </a:ext>
-              </a:extLst>
-            </p:cNvPr>
-            <p:cNvCxnSpPr>
-              <a:cxnSpLocks/>
-              <a:stCxn id="66" idx="0"/>
-              <a:endCxn id="67" idx="5"/>
-            </p:cNvCxnSpPr>
-            <p:nvPr/>
-          </p:nvCxnSpPr>
-          <p:spPr>
-            <a:xfrm flipH="1" flipV="1">
-              <a:off x="5085503" y="2429876"/>
-              <a:ext cx="547086" cy="184522"/>
-            </a:xfrm>
-            <a:prstGeom prst="line">
-              <a:avLst/>
-            </a:prstGeom>
-            <a:ln>
-              <a:solidFill>
-                <a:schemeClr val="accent1"/>
-              </a:solidFill>
-            </a:ln>
-          </p:spPr>
-          <p:style>
-            <a:lnRef idx="1">
-              <a:schemeClr val="dk1"/>
-            </a:lnRef>
-            <a:fillRef idx="0">
-              <a:schemeClr val="dk1"/>
-            </a:fillRef>
-            <a:effectRef idx="0">
-              <a:schemeClr val="dk1"/>
-            </a:effectRef>
-            <a:fontRef idx="minor">
-              <a:schemeClr val="tx1"/>
-            </a:fontRef>
-          </p:style>
-        </p:cxnSp>
-        <p:cxnSp>
-          <p:nvCxnSpPr>
-            <p:cNvPr id="71" name="Straight Connector 70">
-              <a:extLst>
-                <a:ext uri="{FF2B5EF4-FFF2-40B4-BE49-F238E27FC236}">
-                  <a16:creationId xmlns:a16="http://schemas.microsoft.com/office/drawing/2014/main" id="{6981D046-ABF6-D8C4-513E-AE315A920D94}"/>
-                </a:ext>
-              </a:extLst>
-            </p:cNvPr>
-            <p:cNvCxnSpPr>
-              <a:stCxn id="66" idx="5"/>
-              <a:endCxn id="69" idx="1"/>
-            </p:cNvCxnSpPr>
-            <p:nvPr/>
-          </p:nvCxnSpPr>
-          <p:spPr>
-            <a:xfrm>
-              <a:off x="5819101" y="3064680"/>
-              <a:ext cx="151868" cy="319306"/>
-            </a:xfrm>
-            <a:prstGeom prst="line">
-              <a:avLst/>
-            </a:prstGeom>
-          </p:spPr>
-          <p:style>
-            <a:lnRef idx="1">
-              <a:schemeClr val="accent1"/>
-            </a:lnRef>
-            <a:fillRef idx="0">
-              <a:schemeClr val="accent1"/>
-            </a:fillRef>
-            <a:effectRef idx="0">
-              <a:schemeClr val="accent1"/>
-            </a:effectRef>
-            <a:fontRef idx="minor">
-              <a:schemeClr val="tx1"/>
-            </a:fontRef>
-          </p:style>
-        </p:cxnSp>
-        <p:cxnSp>
-          <p:nvCxnSpPr>
-            <p:cNvPr id="72" name="Straight Connector 71">
-              <a:extLst>
-                <a:ext uri="{FF2B5EF4-FFF2-40B4-BE49-F238E27FC236}">
-                  <a16:creationId xmlns:a16="http://schemas.microsoft.com/office/drawing/2014/main" id="{8C44EB5B-B924-9394-C472-A2F1725180AF}"/>
-                </a:ext>
-              </a:extLst>
-            </p:cNvPr>
-            <p:cNvCxnSpPr>
-              <a:cxnSpLocks/>
-              <a:stCxn id="68" idx="5"/>
-            </p:cNvCxnSpPr>
-            <p:nvPr/>
-          </p:nvCxnSpPr>
-          <p:spPr>
-            <a:xfrm>
-              <a:off x="4317694" y="3077695"/>
-              <a:ext cx="215192" cy="320480"/>
-            </a:xfrm>
-            <a:prstGeom prst="line">
-              <a:avLst/>
-            </a:prstGeom>
-          </p:spPr>
-          <p:style>
-            <a:lnRef idx="1">
-              <a:schemeClr val="accent1"/>
-            </a:lnRef>
-            <a:fillRef idx="0">
-              <a:schemeClr val="accent1"/>
-            </a:fillRef>
-            <a:effectRef idx="0">
-              <a:schemeClr val="accent1"/>
-            </a:effectRef>
-            <a:fontRef idx="minor">
-              <a:schemeClr val="tx1"/>
-            </a:fontRef>
-          </p:style>
-        </p:cxnSp>
-        <p:cxnSp>
-          <p:nvCxnSpPr>
-            <p:cNvPr id="73" name="Straight Connector 72">
-              <a:extLst>
-                <a:ext uri="{FF2B5EF4-FFF2-40B4-BE49-F238E27FC236}">
-                  <a16:creationId xmlns:a16="http://schemas.microsoft.com/office/drawing/2014/main" id="{90732301-9B2F-E57B-D1FA-C0B43F3BC30F}"/>
-                </a:ext>
-              </a:extLst>
-            </p:cNvPr>
-            <p:cNvCxnSpPr>
-              <a:cxnSpLocks/>
-              <a:stCxn id="68" idx="3"/>
-              <a:endCxn id="77" idx="7"/>
-            </p:cNvCxnSpPr>
-            <p:nvPr/>
-          </p:nvCxnSpPr>
-          <p:spPr>
-            <a:xfrm flipH="1">
-              <a:off x="3738913" y="3077695"/>
-              <a:ext cx="205754" cy="320480"/>
-            </a:xfrm>
-            <a:prstGeom prst="line">
-              <a:avLst/>
-            </a:prstGeom>
-          </p:spPr>
-          <p:style>
-            <a:lnRef idx="1">
-              <a:schemeClr val="accent1"/>
-            </a:lnRef>
-            <a:fillRef idx="0">
-              <a:schemeClr val="accent1"/>
-            </a:fillRef>
-            <a:effectRef idx="0">
-              <a:schemeClr val="accent1"/>
-            </a:effectRef>
-            <a:fontRef idx="minor">
-              <a:schemeClr val="tx1"/>
-            </a:fontRef>
-          </p:style>
-        </p:cxnSp>
-        <p:cxnSp>
-          <p:nvCxnSpPr>
-            <p:cNvPr id="75" name="Straight Connector 74">
-              <a:extLst>
-                <a:ext uri="{FF2B5EF4-FFF2-40B4-BE49-F238E27FC236}">
-                  <a16:creationId xmlns:a16="http://schemas.microsoft.com/office/drawing/2014/main" id="{83F6DCD9-2EEB-B7B0-53A3-1237AFF90540}"/>
-                </a:ext>
-              </a:extLst>
-            </p:cNvPr>
-            <p:cNvCxnSpPr>
-              <a:cxnSpLocks/>
-              <a:stCxn id="67" idx="3"/>
-              <a:endCxn id="68" idx="7"/>
-            </p:cNvCxnSpPr>
-            <p:nvPr/>
-          </p:nvCxnSpPr>
-          <p:spPr>
-            <a:xfrm flipH="1">
-              <a:off x="4317693" y="2429876"/>
-              <a:ext cx="394784" cy="274792"/>
-            </a:xfrm>
-            <a:prstGeom prst="line">
-              <a:avLst/>
-            </a:prstGeom>
-          </p:spPr>
-          <p:style>
-            <a:lnRef idx="1">
-              <a:schemeClr val="accent1"/>
-            </a:lnRef>
-            <a:fillRef idx="0">
-              <a:schemeClr val="accent1"/>
-            </a:fillRef>
-            <a:effectRef idx="0">
-              <a:schemeClr val="accent1"/>
-            </a:effectRef>
-            <a:fontRef idx="minor">
-              <a:schemeClr val="tx1"/>
-            </a:fontRef>
-          </p:style>
-        </p:cxnSp>
-        <p:grpSp>
-          <p:nvGrpSpPr>
-            <p:cNvPr id="76" name="Group 75">
-              <a:extLst>
-                <a:ext uri="{FF2B5EF4-FFF2-40B4-BE49-F238E27FC236}">
-                  <a16:creationId xmlns:a16="http://schemas.microsoft.com/office/drawing/2014/main" id="{2C77CA36-4025-5D97-BDDF-72924E0E472A}"/>
-                </a:ext>
-              </a:extLst>
-            </p:cNvPr>
-            <p:cNvGrpSpPr/>
-            <p:nvPr/>
-          </p:nvGrpSpPr>
-          <p:grpSpPr>
-            <a:xfrm>
-              <a:off x="3274680" y="3320918"/>
-              <a:ext cx="659451" cy="847580"/>
-              <a:chOff x="4067711" y="3179882"/>
-              <a:chExt cx="1099085" cy="1412632"/>
-            </a:xfrm>
-          </p:grpSpPr>
-          <p:sp>
-            <p:nvSpPr>
-              <p:cNvPr id="77" name="Oval 76">
-                <a:extLst>
-                  <a:ext uri="{FF2B5EF4-FFF2-40B4-BE49-F238E27FC236}">
-                    <a16:creationId xmlns:a16="http://schemas.microsoft.com/office/drawing/2014/main" id="{014FF677-A5F5-3523-E8A7-C8881113F9A8}"/>
-                  </a:ext>
-                </a:extLst>
-              </p:cNvPr>
-              <p:cNvSpPr/>
-              <p:nvPr/>
-            </p:nvSpPr>
-            <p:spPr>
-              <a:xfrm>
-                <a:off x="4090962" y="3179882"/>
-                <a:ext cx="879231" cy="879231"/>
-              </a:xfrm>
-              <a:prstGeom prst="ellipse">
-                <a:avLst/>
-              </a:prstGeom>
-              <a:solidFill>
-                <a:schemeClr val="tx1"/>
-              </a:solidFill>
-            </p:spPr>
-            <p:style>
-              <a:lnRef idx="2">
-                <a:schemeClr val="accent1">
-                  <a:shade val="15000"/>
-                </a:schemeClr>
-              </a:lnRef>
-              <a:fillRef idx="1">
-                <a:schemeClr val="accent1"/>
-              </a:fillRef>
-              <a:effectRef idx="0">
-                <a:schemeClr val="accent1"/>
-              </a:effectRef>
-              <a:fontRef idx="minor">
-                <a:schemeClr val="lt1"/>
-              </a:fontRef>
-            </p:style>
-            <p:txBody>
-              <a:bodyPr rtlCol="0" anchor="ctr"/>
-              <a:lstStyle/>
-              <a:p>
-                <a:pPr algn="ctr"/>
-                <a:r>
-                  <a:rPr lang="en-US" sz="1080" dirty="0"/>
-                  <a:t>C1</a:t>
-                </a:r>
-              </a:p>
-            </p:txBody>
-          </p:sp>
-          <p:cxnSp>
-            <p:nvCxnSpPr>
-              <p:cNvPr id="78" name="Straight Connector 77">
-                <a:extLst>
-                  <a:ext uri="{FF2B5EF4-FFF2-40B4-BE49-F238E27FC236}">
-                    <a16:creationId xmlns:a16="http://schemas.microsoft.com/office/drawing/2014/main" id="{3B780698-4C09-DE72-DF14-9F13CBA269E3}"/>
-                  </a:ext>
-                </a:extLst>
-              </p:cNvPr>
-              <p:cNvCxnSpPr>
-                <a:cxnSpLocks/>
-              </p:cNvCxnSpPr>
-              <p:nvPr/>
-            </p:nvCxnSpPr>
-            <p:spPr>
-              <a:xfrm flipH="1">
-                <a:off x="4067711" y="4019741"/>
-                <a:ext cx="292493" cy="572773"/>
-              </a:xfrm>
-              <a:prstGeom prst="line">
-                <a:avLst/>
-              </a:prstGeom>
-            </p:spPr>
-            <p:style>
-              <a:lnRef idx="1">
-                <a:schemeClr val="accent1"/>
-              </a:lnRef>
-              <a:fillRef idx="0">
-                <a:schemeClr val="accent1"/>
-              </a:fillRef>
-              <a:effectRef idx="0">
-                <a:schemeClr val="accent1"/>
-              </a:effectRef>
-              <a:fontRef idx="minor">
-                <a:schemeClr val="tx1"/>
-              </a:fontRef>
-            </p:style>
-          </p:cxnSp>
-          <p:cxnSp>
-            <p:nvCxnSpPr>
-              <p:cNvPr id="79" name="Straight Connector 78">
-                <a:extLst>
-                  <a:ext uri="{FF2B5EF4-FFF2-40B4-BE49-F238E27FC236}">
-                    <a16:creationId xmlns:a16="http://schemas.microsoft.com/office/drawing/2014/main" id="{262930B7-C41A-1248-55A6-8D24C363EFDE}"/>
-                  </a:ext>
-                </a:extLst>
-              </p:cNvPr>
-              <p:cNvCxnSpPr>
-                <a:cxnSpLocks/>
-                <a:stCxn id="77" idx="5"/>
-              </p:cNvCxnSpPr>
-              <p:nvPr/>
-            </p:nvCxnSpPr>
-            <p:spPr>
-              <a:xfrm>
-                <a:off x="4841433" y="3930353"/>
-                <a:ext cx="325363" cy="662161"/>
-              </a:xfrm>
-              <a:prstGeom prst="line">
-                <a:avLst/>
-              </a:prstGeom>
-            </p:spPr>
-            <p:style>
-              <a:lnRef idx="1">
-                <a:schemeClr val="accent1"/>
-              </a:lnRef>
-              <a:fillRef idx="0">
-                <a:schemeClr val="accent1"/>
-              </a:fillRef>
-              <a:effectRef idx="0">
-                <a:schemeClr val="accent1"/>
-              </a:effectRef>
-              <a:fontRef idx="minor">
-                <a:schemeClr val="tx1"/>
-              </a:fontRef>
-            </p:style>
-          </p:cxnSp>
-        </p:grpSp>
-        <p:cxnSp>
-          <p:nvCxnSpPr>
-            <p:cNvPr id="81" name="Straight Connector 80">
-              <a:extLst>
-                <a:ext uri="{FF2B5EF4-FFF2-40B4-BE49-F238E27FC236}">
-                  <a16:creationId xmlns:a16="http://schemas.microsoft.com/office/drawing/2014/main" id="{7467BD60-1C5D-79DC-2824-98D5D04C1783}"/>
-                </a:ext>
-              </a:extLst>
-            </p:cNvPr>
-            <p:cNvCxnSpPr>
-              <a:cxnSpLocks/>
-              <a:stCxn id="69" idx="3"/>
-            </p:cNvCxnSpPr>
-            <p:nvPr/>
-          </p:nvCxnSpPr>
-          <p:spPr>
-            <a:xfrm flipH="1">
-              <a:off x="5893713" y="3757013"/>
-              <a:ext cx="77256" cy="356708"/>
-            </a:xfrm>
-            <a:prstGeom prst="line">
-              <a:avLst/>
-            </a:prstGeom>
-          </p:spPr>
-          <p:style>
-            <a:lnRef idx="1">
-              <a:schemeClr val="accent1"/>
-            </a:lnRef>
-            <a:fillRef idx="0">
-              <a:schemeClr val="accent1"/>
-            </a:fillRef>
-            <a:effectRef idx="0">
-              <a:schemeClr val="accent1"/>
-            </a:effectRef>
-            <a:fontRef idx="minor">
-              <a:schemeClr val="tx1"/>
-            </a:fontRef>
-          </p:style>
-        </p:cxnSp>
-        <p:cxnSp>
-          <p:nvCxnSpPr>
-            <p:cNvPr id="82" name="Straight Connector 81">
-              <a:extLst>
-                <a:ext uri="{FF2B5EF4-FFF2-40B4-BE49-F238E27FC236}">
-                  <a16:creationId xmlns:a16="http://schemas.microsoft.com/office/drawing/2014/main" id="{99779D45-AFC8-84A8-3DDE-84BF76E31DA4}"/>
-                </a:ext>
-              </a:extLst>
-            </p:cNvPr>
-            <p:cNvCxnSpPr>
-              <a:cxnSpLocks/>
-              <a:stCxn id="69" idx="5"/>
-            </p:cNvCxnSpPr>
-            <p:nvPr/>
-          </p:nvCxnSpPr>
-          <p:spPr>
-            <a:xfrm>
-              <a:off x="6343996" y="3757014"/>
-              <a:ext cx="190367" cy="307280"/>
-            </a:xfrm>
-            <a:prstGeom prst="line">
-              <a:avLst/>
-            </a:prstGeom>
-          </p:spPr>
-          <p:style>
-            <a:lnRef idx="1">
-              <a:schemeClr val="accent1"/>
-            </a:lnRef>
-            <a:fillRef idx="0">
-              <a:schemeClr val="accent1"/>
-            </a:fillRef>
-            <a:effectRef idx="0">
-              <a:schemeClr val="accent1"/>
-            </a:effectRef>
-            <a:fontRef idx="minor">
-              <a:schemeClr val="tx1"/>
-            </a:fontRef>
-          </p:style>
-        </p:cxnSp>
-        <p:cxnSp>
-          <p:nvCxnSpPr>
-            <p:cNvPr id="92" name="Straight Connector 91">
-              <a:extLst>
-                <a:ext uri="{FF2B5EF4-FFF2-40B4-BE49-F238E27FC236}">
-                  <a16:creationId xmlns:a16="http://schemas.microsoft.com/office/drawing/2014/main" id="{D64BD572-BBA9-4DCB-D41A-4CC4FE722C64}"/>
+                  <a16:creationId xmlns:a16="http://schemas.microsoft.com/office/drawing/2014/main" id="{CF9A58A5-D181-105A-FE90-BA3BF5D5D5FC}"/>
                 </a:ext>
               </a:extLst>
             </p:cNvPr>
@@ -4369,98 +5388,8 @@
           </p:nvCxnSpPr>
           <p:spPr>
             <a:xfrm flipH="1">
-              <a:off x="5429500" y="3109446"/>
-              <a:ext cx="110807" cy="256241"/>
-            </a:xfrm>
-            <a:prstGeom prst="line">
-              <a:avLst/>
-            </a:prstGeom>
-          </p:spPr>
-          <p:style>
-            <a:lnRef idx="1">
-              <a:schemeClr val="accent1"/>
-            </a:lnRef>
-            <a:fillRef idx="0">
-              <a:schemeClr val="accent1"/>
-            </a:fillRef>
-            <a:effectRef idx="0">
-              <a:schemeClr val="accent1"/>
-            </a:effectRef>
-            <a:fontRef idx="minor">
-              <a:schemeClr val="tx1"/>
-            </a:fontRef>
-          </p:style>
-        </p:cxnSp>
-        <p:sp>
-          <p:nvSpPr>
-            <p:cNvPr id="112" name="Oval 111">
-              <a:extLst>
-                <a:ext uri="{FF2B5EF4-FFF2-40B4-BE49-F238E27FC236}">
-                  <a16:creationId xmlns:a16="http://schemas.microsoft.com/office/drawing/2014/main" id="{B22B2A15-F92D-410E-5545-D406B74EE6FA}"/>
-                </a:ext>
-              </a:extLst>
-            </p:cNvPr>
-            <p:cNvSpPr/>
-            <p:nvPr/>
-          </p:nvSpPr>
-          <p:spPr>
-            <a:xfrm>
-              <a:off x="1170001" y="3868629"/>
-              <a:ext cx="527539" cy="527539"/>
-            </a:xfrm>
-            <a:prstGeom prst="ellipse">
-              <a:avLst/>
-            </a:prstGeom>
-            <a:solidFill>
-              <a:schemeClr val="tx1"/>
-            </a:solidFill>
-          </p:spPr>
-          <p:style>
-            <a:lnRef idx="2">
-              <a:schemeClr val="accent1">
-                <a:shade val="15000"/>
-              </a:schemeClr>
-            </a:lnRef>
-            <a:fillRef idx="1">
-              <a:schemeClr val="accent1"/>
-            </a:fillRef>
-            <a:effectRef idx="0">
-              <a:schemeClr val="accent1"/>
-            </a:effectRef>
-            <a:fontRef idx="minor">
-              <a:schemeClr val="lt1"/>
-            </a:fontRef>
-          </p:style>
-          <p:txBody>
-            <a:bodyPr rtlCol="0" anchor="ctr"/>
-            <a:lstStyle/>
-            <a:p>
-              <a:pPr algn="ctr"/>
-              <a:r>
-                <a:rPr lang="en-US" sz="1080" dirty="0"/>
-                <a:t>C2</a:t>
-              </a:r>
-            </a:p>
-          </p:txBody>
-        </p:sp>
-        <p:cxnSp>
-          <p:nvCxnSpPr>
-            <p:cNvPr id="113" name="Straight Connector 112">
-              <a:extLst>
-                <a:ext uri="{FF2B5EF4-FFF2-40B4-BE49-F238E27FC236}">
-                  <a16:creationId xmlns:a16="http://schemas.microsoft.com/office/drawing/2014/main" id="{CB1CBA6D-52FD-02E5-B7CB-37BB8FF0CBE2}"/>
-                </a:ext>
-              </a:extLst>
-            </p:cNvPr>
-            <p:cNvCxnSpPr>
-              <a:cxnSpLocks/>
-            </p:cNvCxnSpPr>
-            <p:nvPr/>
-          </p:nvCxnSpPr>
-          <p:spPr>
-            <a:xfrm flipH="1">
-              <a:off x="1185087" y="4362358"/>
-              <a:ext cx="87748" cy="146663"/>
+              <a:off x="4067711" y="4019741"/>
+              <a:ext cx="292493" cy="572773"/>
             </a:xfrm>
             <a:prstGeom prst="line">
               <a:avLst/>
@@ -4483,22 +5412,23 @@
         </p:cxnSp>
         <p:cxnSp>
           <p:nvCxnSpPr>
-            <p:cNvPr id="114" name="Straight Connector 113">
+            <p:cNvPr id="152" name="Straight Connector 151">
               <a:extLst>
                 <a:ext uri="{FF2B5EF4-FFF2-40B4-BE49-F238E27FC236}">
-                  <a16:creationId xmlns:a16="http://schemas.microsoft.com/office/drawing/2014/main" id="{71E6E851-E401-6BAD-834F-033260BB4773}"/>
+                  <a16:creationId xmlns:a16="http://schemas.microsoft.com/office/drawing/2014/main" id="{46694E59-C20F-E220-B5CE-9D3B91E45F25}"/>
                 </a:ext>
               </a:extLst>
             </p:cNvPr>
             <p:cNvCxnSpPr>
               <a:cxnSpLocks/>
+              <a:stCxn id="150" idx="5"/>
             </p:cNvCxnSpPr>
             <p:nvPr/>
           </p:nvCxnSpPr>
           <p:spPr>
             <a:xfrm>
-              <a:off x="1635371" y="4340064"/>
-              <a:ext cx="62169" cy="231575"/>
+              <a:off x="4841433" y="3930353"/>
+              <a:ext cx="325363" cy="662161"/>
             </a:xfrm>
             <a:prstGeom prst="line">
               <a:avLst/>
@@ -4519,1521 +5449,575 @@
             </a:fontRef>
           </p:style>
         </p:cxnSp>
-        <p:sp>
-          <p:nvSpPr>
-            <p:cNvPr id="115" name="Oval 114">
-              <a:extLst>
-                <a:ext uri="{FF2B5EF4-FFF2-40B4-BE49-F238E27FC236}">
-                  <a16:creationId xmlns:a16="http://schemas.microsoft.com/office/drawing/2014/main" id="{B5C44B34-0101-71F5-557D-E7B4319B1221}"/>
-                </a:ext>
-              </a:extLst>
-            </p:cNvPr>
-            <p:cNvSpPr/>
-            <p:nvPr/>
-          </p:nvSpPr>
-          <p:spPr>
-            <a:xfrm>
-              <a:off x="1660218" y="3243950"/>
-              <a:ext cx="527539" cy="527539"/>
-            </a:xfrm>
-            <a:prstGeom prst="ellipse">
-              <a:avLst/>
-            </a:prstGeom>
-            <a:solidFill>
-              <a:schemeClr val="tx1"/>
-            </a:solidFill>
-          </p:spPr>
-          <p:style>
-            <a:lnRef idx="2">
-              <a:schemeClr val="accent1">
-                <a:shade val="15000"/>
-              </a:schemeClr>
-            </a:lnRef>
-            <a:fillRef idx="1">
-              <a:schemeClr val="accent1"/>
-            </a:fillRef>
-            <a:effectRef idx="0">
-              <a:schemeClr val="accent1"/>
-            </a:effectRef>
-            <a:fontRef idx="minor">
-              <a:schemeClr val="lt1"/>
-            </a:fontRef>
-          </p:style>
-          <p:txBody>
-            <a:bodyPr rtlCol="0" anchor="ctr"/>
-            <a:lstStyle/>
-            <a:p>
-              <a:pPr algn="ctr"/>
-              <a:r>
-                <a:rPr lang="en-US" sz="1080" dirty="0"/>
-                <a:t>S</a:t>
-              </a:r>
-            </a:p>
-          </p:txBody>
-        </p:sp>
-        <p:cxnSp>
-          <p:nvCxnSpPr>
-            <p:cNvPr id="116" name="Straight Connector 115">
-              <a:extLst>
-                <a:ext uri="{FF2B5EF4-FFF2-40B4-BE49-F238E27FC236}">
-                  <a16:creationId xmlns:a16="http://schemas.microsoft.com/office/drawing/2014/main" id="{EC303F48-C0F0-EB53-D7EB-B56B882C5A16}"/>
-                </a:ext>
-              </a:extLst>
-            </p:cNvPr>
-            <p:cNvCxnSpPr>
-              <a:cxnSpLocks/>
-              <a:stCxn id="115" idx="3"/>
-            </p:cNvCxnSpPr>
-            <p:nvPr/>
-          </p:nvCxnSpPr>
-          <p:spPr>
-            <a:xfrm flipH="1">
-              <a:off x="1687639" y="3694232"/>
-              <a:ext cx="49835" cy="126435"/>
-            </a:xfrm>
-            <a:prstGeom prst="line">
-              <a:avLst/>
-            </a:prstGeom>
-          </p:spPr>
-          <p:style>
-            <a:lnRef idx="1">
-              <a:schemeClr val="accent1"/>
-            </a:lnRef>
-            <a:fillRef idx="0">
-              <a:schemeClr val="accent1"/>
-            </a:fillRef>
-            <a:effectRef idx="0">
-              <a:schemeClr val="accent1"/>
-            </a:effectRef>
-            <a:fontRef idx="minor">
-              <a:schemeClr val="tx1"/>
-            </a:fontRef>
-          </p:style>
-        </p:cxnSp>
-        <p:cxnSp>
-          <p:nvCxnSpPr>
-            <p:cNvPr id="117" name="Straight Connector 116">
-              <a:extLst>
-                <a:ext uri="{FF2B5EF4-FFF2-40B4-BE49-F238E27FC236}">
-                  <a16:creationId xmlns:a16="http://schemas.microsoft.com/office/drawing/2014/main" id="{7FDECA90-4CAD-94AA-470F-2ED90EA2F225}"/>
-                </a:ext>
-              </a:extLst>
-            </p:cNvPr>
-            <p:cNvCxnSpPr>
-              <a:cxnSpLocks/>
-            </p:cNvCxnSpPr>
-            <p:nvPr/>
-          </p:nvCxnSpPr>
-          <p:spPr>
-            <a:xfrm>
-              <a:off x="2102711" y="3680315"/>
-              <a:ext cx="85044" cy="140351"/>
-            </a:xfrm>
-            <a:prstGeom prst="line">
-              <a:avLst/>
-            </a:prstGeom>
-          </p:spPr>
-          <p:style>
-            <a:lnRef idx="1">
-              <a:schemeClr val="accent1"/>
-            </a:lnRef>
-            <a:fillRef idx="0">
-              <a:schemeClr val="accent1"/>
-            </a:fillRef>
-            <a:effectRef idx="0">
-              <a:schemeClr val="accent1"/>
-            </a:effectRef>
-            <a:fontRef idx="minor">
-              <a:schemeClr val="tx1"/>
-            </a:fontRef>
-          </p:style>
-        </p:cxnSp>
-        <p:sp>
-          <p:nvSpPr>
-            <p:cNvPr id="124" name="Oval 123">
-              <a:extLst>
-                <a:ext uri="{FF2B5EF4-FFF2-40B4-BE49-F238E27FC236}">
-                  <a16:creationId xmlns:a16="http://schemas.microsoft.com/office/drawing/2014/main" id="{2B11ECDB-5E2A-6E97-30E7-2A0E64B0EB98}"/>
-                </a:ext>
-              </a:extLst>
-            </p:cNvPr>
-            <p:cNvSpPr/>
-            <p:nvPr/>
-          </p:nvSpPr>
-          <p:spPr>
-            <a:xfrm>
-              <a:off x="4186415" y="3361405"/>
-              <a:ext cx="527539" cy="527539"/>
-            </a:xfrm>
-            <a:prstGeom prst="ellipse">
-              <a:avLst/>
-            </a:prstGeom>
-            <a:solidFill>
-              <a:schemeClr val="tx1"/>
-            </a:solidFill>
-          </p:spPr>
-          <p:style>
-            <a:lnRef idx="2">
-              <a:schemeClr val="accent1">
-                <a:shade val="15000"/>
-              </a:schemeClr>
-            </a:lnRef>
-            <a:fillRef idx="1">
-              <a:schemeClr val="accent1"/>
-            </a:fillRef>
-            <a:effectRef idx="0">
-              <a:schemeClr val="accent1"/>
-            </a:effectRef>
-            <a:fontRef idx="minor">
-              <a:schemeClr val="lt1"/>
-            </a:fontRef>
-          </p:style>
-          <p:txBody>
-            <a:bodyPr rtlCol="0" anchor="ctr"/>
-            <a:lstStyle/>
-            <a:p>
-              <a:pPr algn="ctr"/>
-              <a:r>
-                <a:rPr lang="en-US" sz="1080" dirty="0"/>
-                <a:t>C2</a:t>
-              </a:r>
-            </a:p>
-          </p:txBody>
-        </p:sp>
-        <p:cxnSp>
-          <p:nvCxnSpPr>
-            <p:cNvPr id="125" name="Straight Connector 124">
-              <a:extLst>
-                <a:ext uri="{FF2B5EF4-FFF2-40B4-BE49-F238E27FC236}">
-                  <a16:creationId xmlns:a16="http://schemas.microsoft.com/office/drawing/2014/main" id="{4B757B2C-563F-7B7F-ADA7-D56901A2B3FC}"/>
-                </a:ext>
-              </a:extLst>
-            </p:cNvPr>
-            <p:cNvCxnSpPr>
-              <a:cxnSpLocks/>
-            </p:cNvCxnSpPr>
-            <p:nvPr/>
-          </p:nvCxnSpPr>
-          <p:spPr>
-            <a:xfrm flipH="1">
-              <a:off x="4207174" y="3855133"/>
-              <a:ext cx="82076" cy="240263"/>
-            </a:xfrm>
-            <a:prstGeom prst="line">
-              <a:avLst/>
-            </a:prstGeom>
-          </p:spPr>
-          <p:style>
-            <a:lnRef idx="1">
-              <a:schemeClr val="accent1"/>
-            </a:lnRef>
-            <a:fillRef idx="0">
-              <a:schemeClr val="accent1"/>
-            </a:fillRef>
-            <a:effectRef idx="0">
-              <a:schemeClr val="accent1"/>
-            </a:effectRef>
-            <a:fontRef idx="minor">
-              <a:schemeClr val="tx1"/>
-            </a:fontRef>
-          </p:style>
-        </p:cxnSp>
-        <p:cxnSp>
-          <p:nvCxnSpPr>
-            <p:cNvPr id="126" name="Straight Connector 125">
-              <a:extLst>
-                <a:ext uri="{FF2B5EF4-FFF2-40B4-BE49-F238E27FC236}">
-                  <a16:creationId xmlns:a16="http://schemas.microsoft.com/office/drawing/2014/main" id="{2CE44B38-FAC9-2EC2-4FD4-9652C78EB90D}"/>
-                </a:ext>
-              </a:extLst>
-            </p:cNvPr>
-            <p:cNvCxnSpPr>
-              <a:cxnSpLocks/>
-            </p:cNvCxnSpPr>
-            <p:nvPr/>
-          </p:nvCxnSpPr>
-          <p:spPr>
-            <a:xfrm>
-              <a:off x="4651783" y="3832842"/>
-              <a:ext cx="149354" cy="262555"/>
-            </a:xfrm>
-            <a:prstGeom prst="line">
-              <a:avLst/>
-            </a:prstGeom>
-          </p:spPr>
-          <p:style>
-            <a:lnRef idx="1">
-              <a:schemeClr val="accent1"/>
-            </a:lnRef>
-            <a:fillRef idx="0">
-              <a:schemeClr val="accent1"/>
-            </a:fillRef>
-            <a:effectRef idx="0">
-              <a:schemeClr val="accent1"/>
-            </a:effectRef>
-            <a:fontRef idx="minor">
-              <a:schemeClr val="tx1"/>
-            </a:fontRef>
-          </p:style>
-        </p:cxnSp>
-        <p:sp>
-          <p:nvSpPr>
-            <p:cNvPr id="132" name="Oval 131">
-              <a:extLst>
-                <a:ext uri="{FF2B5EF4-FFF2-40B4-BE49-F238E27FC236}">
-                  <a16:creationId xmlns:a16="http://schemas.microsoft.com/office/drawing/2014/main" id="{826666E2-1EBB-93CB-067F-36E425446072}"/>
-                </a:ext>
-              </a:extLst>
-            </p:cNvPr>
-            <p:cNvSpPr/>
-            <p:nvPr/>
-          </p:nvSpPr>
-          <p:spPr>
-            <a:xfrm>
-              <a:off x="5074181" y="3365541"/>
-              <a:ext cx="527539" cy="527539"/>
-            </a:xfrm>
-            <a:prstGeom prst="ellipse">
-              <a:avLst/>
-            </a:prstGeom>
-            <a:solidFill>
-              <a:schemeClr val="tx1"/>
-            </a:solidFill>
-          </p:spPr>
-          <p:style>
-            <a:lnRef idx="2">
-              <a:schemeClr val="accent1">
-                <a:shade val="15000"/>
-              </a:schemeClr>
-            </a:lnRef>
-            <a:fillRef idx="1">
-              <a:schemeClr val="accent1"/>
-            </a:fillRef>
-            <a:effectRef idx="0">
-              <a:schemeClr val="accent1"/>
-            </a:effectRef>
-            <a:fontRef idx="minor">
-              <a:schemeClr val="lt1"/>
-            </a:fontRef>
-          </p:style>
-          <p:txBody>
-            <a:bodyPr rtlCol="0" anchor="ctr"/>
-            <a:lstStyle/>
-            <a:p>
-              <a:pPr algn="ctr"/>
-              <a:r>
-                <a:rPr lang="en-US" sz="1080" dirty="0"/>
-                <a:t>S</a:t>
-              </a:r>
-            </a:p>
-          </p:txBody>
-        </p:sp>
-        <p:cxnSp>
-          <p:nvCxnSpPr>
-            <p:cNvPr id="135" name="Straight Connector 134">
-              <a:extLst>
-                <a:ext uri="{FF2B5EF4-FFF2-40B4-BE49-F238E27FC236}">
-                  <a16:creationId xmlns:a16="http://schemas.microsoft.com/office/drawing/2014/main" id="{39C1F9DC-1F9E-E182-C399-2DD83548A2C6}"/>
-                </a:ext>
-              </a:extLst>
-            </p:cNvPr>
-            <p:cNvCxnSpPr>
-              <a:cxnSpLocks/>
-            </p:cNvCxnSpPr>
-            <p:nvPr/>
-          </p:nvCxnSpPr>
-          <p:spPr>
-            <a:xfrm flipH="1">
-              <a:off x="5097247" y="3852451"/>
-              <a:ext cx="82076" cy="240263"/>
-            </a:xfrm>
-            <a:prstGeom prst="line">
-              <a:avLst/>
-            </a:prstGeom>
-          </p:spPr>
-          <p:style>
-            <a:lnRef idx="1">
-              <a:schemeClr val="accent1"/>
-            </a:lnRef>
-            <a:fillRef idx="0">
-              <a:schemeClr val="accent1"/>
-            </a:fillRef>
-            <a:effectRef idx="0">
-              <a:schemeClr val="accent1"/>
-            </a:effectRef>
-            <a:fontRef idx="minor">
-              <a:schemeClr val="tx1"/>
-            </a:fontRef>
-          </p:style>
-        </p:cxnSp>
-        <p:cxnSp>
-          <p:nvCxnSpPr>
-            <p:cNvPr id="136" name="Straight Connector 135">
-              <a:extLst>
-                <a:ext uri="{FF2B5EF4-FFF2-40B4-BE49-F238E27FC236}">
-                  <a16:creationId xmlns:a16="http://schemas.microsoft.com/office/drawing/2014/main" id="{FEE5E9CF-B0EA-D180-3D78-A947EB9EFC5A}"/>
-                </a:ext>
-              </a:extLst>
-            </p:cNvPr>
-            <p:cNvCxnSpPr>
-              <a:cxnSpLocks/>
-            </p:cNvCxnSpPr>
-            <p:nvPr/>
-          </p:nvCxnSpPr>
-          <p:spPr>
-            <a:xfrm>
-              <a:off x="5502893" y="3830160"/>
-              <a:ext cx="149354" cy="262555"/>
-            </a:xfrm>
-            <a:prstGeom prst="line">
-              <a:avLst/>
-            </a:prstGeom>
-          </p:spPr>
-          <p:style>
-            <a:lnRef idx="1">
-              <a:schemeClr val="accent1"/>
-            </a:lnRef>
-            <a:fillRef idx="0">
-              <a:schemeClr val="accent1"/>
-            </a:fillRef>
-            <a:effectRef idx="0">
-              <a:schemeClr val="accent1"/>
-            </a:effectRef>
-            <a:fontRef idx="minor">
-              <a:schemeClr val="tx1"/>
-            </a:fontRef>
-          </p:style>
-        </p:cxnSp>
-        <p:sp>
-          <p:nvSpPr>
-            <p:cNvPr id="140" name="Oval 139">
-              <a:extLst>
-                <a:ext uri="{FF2B5EF4-FFF2-40B4-BE49-F238E27FC236}">
-                  <a16:creationId xmlns:a16="http://schemas.microsoft.com/office/drawing/2014/main" id="{4C59DBF0-6304-2BC2-6214-65158FCF4BCD}"/>
-                </a:ext>
-              </a:extLst>
-            </p:cNvPr>
-            <p:cNvSpPr/>
-            <p:nvPr/>
-          </p:nvSpPr>
-          <p:spPr>
-            <a:xfrm>
-              <a:off x="9209319" y="2537145"/>
-              <a:ext cx="527539" cy="527539"/>
-            </a:xfrm>
-            <a:prstGeom prst="ellipse">
-              <a:avLst/>
-            </a:prstGeom>
-            <a:solidFill>
-              <a:srgbClr val="FF0000"/>
-            </a:solidFill>
-          </p:spPr>
-          <p:style>
-            <a:lnRef idx="2">
-              <a:schemeClr val="accent1">
-                <a:shade val="15000"/>
-              </a:schemeClr>
-            </a:lnRef>
-            <a:fillRef idx="1">
-              <a:schemeClr val="accent1"/>
-            </a:fillRef>
-            <a:effectRef idx="0">
-              <a:schemeClr val="accent1"/>
-            </a:effectRef>
-            <a:fontRef idx="minor">
-              <a:schemeClr val="lt1"/>
-            </a:fontRef>
-          </p:style>
-          <p:txBody>
-            <a:bodyPr rtlCol="0" anchor="ctr"/>
-            <a:lstStyle/>
-            <a:p>
-              <a:pPr algn="ctr"/>
-              <a:r>
-                <a:rPr lang="en-US" sz="1080" dirty="0"/>
-                <a:t>G</a:t>
-              </a:r>
-            </a:p>
-          </p:txBody>
-        </p:sp>
-        <p:sp>
-          <p:nvSpPr>
-            <p:cNvPr id="141" name="Oval 140">
-              <a:extLst>
-                <a:ext uri="{FF2B5EF4-FFF2-40B4-BE49-F238E27FC236}">
-                  <a16:creationId xmlns:a16="http://schemas.microsoft.com/office/drawing/2014/main" id="{774094E5-B2F6-EA19-FD56-F12BFA6A3AF7}"/>
-                </a:ext>
-              </a:extLst>
-            </p:cNvPr>
-            <p:cNvSpPr/>
-            <p:nvPr/>
-          </p:nvSpPr>
-          <p:spPr>
-            <a:xfrm>
-              <a:off x="8475720" y="1902340"/>
-              <a:ext cx="527539" cy="527539"/>
-            </a:xfrm>
-            <a:prstGeom prst="ellipse">
-              <a:avLst/>
-            </a:prstGeom>
-            <a:solidFill>
-              <a:schemeClr val="tx1"/>
-            </a:solidFill>
-          </p:spPr>
-          <p:style>
-            <a:lnRef idx="2">
-              <a:schemeClr val="accent1">
-                <a:shade val="15000"/>
-              </a:schemeClr>
-            </a:lnRef>
-            <a:fillRef idx="1">
-              <a:schemeClr val="accent1"/>
-            </a:fillRef>
-            <a:effectRef idx="0">
-              <a:schemeClr val="accent1"/>
-            </a:effectRef>
-            <a:fontRef idx="minor">
-              <a:schemeClr val="lt1"/>
-            </a:fontRef>
-          </p:style>
-          <p:txBody>
-            <a:bodyPr rtlCol="0" anchor="ctr"/>
-            <a:lstStyle/>
-            <a:p>
-              <a:pPr algn="ctr"/>
-              <a:r>
-                <a:rPr lang="en-US" sz="1080" dirty="0"/>
-                <a:t>P</a:t>
-              </a:r>
-            </a:p>
-          </p:txBody>
-        </p:sp>
-        <p:sp>
-          <p:nvSpPr>
-            <p:cNvPr id="142" name="Oval 141">
-              <a:extLst>
-                <a:ext uri="{FF2B5EF4-FFF2-40B4-BE49-F238E27FC236}">
-                  <a16:creationId xmlns:a16="http://schemas.microsoft.com/office/drawing/2014/main" id="{3B34A82D-CA22-0242-E8FD-E1E009E011D2}"/>
-                </a:ext>
-              </a:extLst>
-            </p:cNvPr>
-            <p:cNvSpPr/>
-            <p:nvPr/>
-          </p:nvSpPr>
-          <p:spPr>
-            <a:xfrm>
-              <a:off x="7707911" y="2550159"/>
-              <a:ext cx="527539" cy="527539"/>
-            </a:xfrm>
-            <a:prstGeom prst="ellipse">
-              <a:avLst/>
-            </a:prstGeom>
-            <a:solidFill>
-              <a:srgbClr val="FF0000"/>
-            </a:solidFill>
-          </p:spPr>
-          <p:style>
-            <a:lnRef idx="2">
-              <a:schemeClr val="accent1">
-                <a:shade val="15000"/>
-              </a:schemeClr>
-            </a:lnRef>
-            <a:fillRef idx="1">
-              <a:schemeClr val="accent1"/>
-            </a:fillRef>
-            <a:effectRef idx="0">
-              <a:schemeClr val="accent1"/>
-            </a:effectRef>
-            <a:fontRef idx="minor">
-              <a:schemeClr val="lt1"/>
-            </a:fontRef>
-          </p:style>
-          <p:txBody>
-            <a:bodyPr rtlCol="0" anchor="ctr"/>
-            <a:lstStyle/>
-            <a:p>
-              <a:pPr algn="ctr"/>
-              <a:r>
-                <a:rPr lang="en-US" sz="1080" dirty="0"/>
-                <a:t>N</a:t>
-              </a:r>
-            </a:p>
-          </p:txBody>
-        </p:sp>
-        <p:sp>
-          <p:nvSpPr>
-            <p:cNvPr id="143" name="Oval 142">
-              <a:extLst>
-                <a:ext uri="{FF2B5EF4-FFF2-40B4-BE49-F238E27FC236}">
-                  <a16:creationId xmlns:a16="http://schemas.microsoft.com/office/drawing/2014/main" id="{9C32469C-0302-AEA3-6AD8-1DCB3F8096BC}"/>
-                </a:ext>
-              </a:extLst>
-            </p:cNvPr>
-            <p:cNvSpPr/>
-            <p:nvPr/>
-          </p:nvSpPr>
-          <p:spPr>
-            <a:xfrm>
-              <a:off x="9734214" y="3229476"/>
-              <a:ext cx="527539" cy="527539"/>
-            </a:xfrm>
-            <a:prstGeom prst="ellipse">
-              <a:avLst/>
-            </a:prstGeom>
-            <a:solidFill>
-              <a:schemeClr val="tx1"/>
-            </a:solidFill>
-          </p:spPr>
-          <p:style>
-            <a:lnRef idx="2">
-              <a:schemeClr val="accent1">
-                <a:shade val="15000"/>
-              </a:schemeClr>
-            </a:lnRef>
-            <a:fillRef idx="1">
-              <a:schemeClr val="accent1"/>
-            </a:fillRef>
-            <a:effectRef idx="0">
-              <a:schemeClr val="accent1"/>
-            </a:effectRef>
-            <a:fontRef idx="minor">
-              <a:schemeClr val="lt1"/>
-            </a:fontRef>
-          </p:style>
-          <p:txBody>
-            <a:bodyPr rtlCol="0" anchor="ctr"/>
-            <a:lstStyle/>
-            <a:p>
-              <a:pPr algn="ctr"/>
-              <a:r>
-                <a:rPr lang="en-US" sz="1080" dirty="0"/>
-                <a:t>U</a:t>
-              </a:r>
-            </a:p>
-          </p:txBody>
-        </p:sp>
-        <p:cxnSp>
-          <p:nvCxnSpPr>
-            <p:cNvPr id="144" name="Straight Connector 143">
-              <a:extLst>
-                <a:ext uri="{FF2B5EF4-FFF2-40B4-BE49-F238E27FC236}">
-                  <a16:creationId xmlns:a16="http://schemas.microsoft.com/office/drawing/2014/main" id="{A7771747-55D2-4033-82A2-79BE8B0145A2}"/>
-                </a:ext>
-              </a:extLst>
-            </p:cNvPr>
-            <p:cNvCxnSpPr>
-              <a:cxnSpLocks/>
-              <a:stCxn id="140" idx="0"/>
-              <a:endCxn id="141" idx="5"/>
-            </p:cNvCxnSpPr>
-            <p:nvPr/>
-          </p:nvCxnSpPr>
-          <p:spPr>
-            <a:xfrm flipH="1" flipV="1">
-              <a:off x="8926001" y="2352621"/>
-              <a:ext cx="547086" cy="184522"/>
-            </a:xfrm>
-            <a:prstGeom prst="line">
-              <a:avLst/>
-            </a:prstGeom>
-            <a:ln>
-              <a:solidFill>
-                <a:schemeClr val="accent1"/>
-              </a:solidFill>
-            </a:ln>
-          </p:spPr>
-          <p:style>
-            <a:lnRef idx="1">
-              <a:schemeClr val="dk1"/>
-            </a:lnRef>
-            <a:fillRef idx="0">
-              <a:schemeClr val="dk1"/>
-            </a:fillRef>
-            <a:effectRef idx="0">
-              <a:schemeClr val="dk1"/>
-            </a:effectRef>
-            <a:fontRef idx="minor">
-              <a:schemeClr val="tx1"/>
-            </a:fontRef>
-          </p:style>
-        </p:cxnSp>
-        <p:cxnSp>
-          <p:nvCxnSpPr>
-            <p:cNvPr id="145" name="Straight Connector 144">
-              <a:extLst>
-                <a:ext uri="{FF2B5EF4-FFF2-40B4-BE49-F238E27FC236}">
-                  <a16:creationId xmlns:a16="http://schemas.microsoft.com/office/drawing/2014/main" id="{50B9D1CF-AE66-A858-0226-A76E48C2E859}"/>
-                </a:ext>
-              </a:extLst>
-            </p:cNvPr>
-            <p:cNvCxnSpPr>
-              <a:stCxn id="140" idx="5"/>
-              <a:endCxn id="143" idx="1"/>
-            </p:cNvCxnSpPr>
-            <p:nvPr/>
-          </p:nvCxnSpPr>
-          <p:spPr>
-            <a:xfrm>
-              <a:off x="9659600" y="2987426"/>
-              <a:ext cx="151868" cy="319306"/>
-            </a:xfrm>
-            <a:prstGeom prst="line">
-              <a:avLst/>
-            </a:prstGeom>
-          </p:spPr>
-          <p:style>
-            <a:lnRef idx="1">
-              <a:schemeClr val="accent1"/>
-            </a:lnRef>
-            <a:fillRef idx="0">
-              <a:schemeClr val="accent1"/>
-            </a:fillRef>
-            <a:effectRef idx="0">
-              <a:schemeClr val="accent1"/>
-            </a:effectRef>
-            <a:fontRef idx="minor">
-              <a:schemeClr val="tx1"/>
-            </a:fontRef>
-          </p:style>
-        </p:cxnSp>
-        <p:cxnSp>
-          <p:nvCxnSpPr>
-            <p:cNvPr id="146" name="Straight Connector 145">
-              <a:extLst>
-                <a:ext uri="{FF2B5EF4-FFF2-40B4-BE49-F238E27FC236}">
-                  <a16:creationId xmlns:a16="http://schemas.microsoft.com/office/drawing/2014/main" id="{BD2C3B6C-B477-0A6C-F7F5-AB8082049896}"/>
-                </a:ext>
-              </a:extLst>
-            </p:cNvPr>
-            <p:cNvCxnSpPr>
-              <a:cxnSpLocks/>
-              <a:stCxn id="142" idx="5"/>
-            </p:cNvCxnSpPr>
-            <p:nvPr/>
-          </p:nvCxnSpPr>
-          <p:spPr>
-            <a:xfrm>
-              <a:off x="8158193" y="3000440"/>
-              <a:ext cx="215192" cy="320480"/>
-            </a:xfrm>
-            <a:prstGeom prst="line">
-              <a:avLst/>
-            </a:prstGeom>
-          </p:spPr>
-          <p:style>
-            <a:lnRef idx="1">
-              <a:schemeClr val="accent1"/>
-            </a:lnRef>
-            <a:fillRef idx="0">
-              <a:schemeClr val="accent1"/>
-            </a:fillRef>
-            <a:effectRef idx="0">
-              <a:schemeClr val="accent1"/>
-            </a:effectRef>
-            <a:fontRef idx="minor">
-              <a:schemeClr val="tx1"/>
-            </a:fontRef>
-          </p:style>
-        </p:cxnSp>
-        <p:cxnSp>
-          <p:nvCxnSpPr>
-            <p:cNvPr id="147" name="Straight Connector 146">
-              <a:extLst>
-                <a:ext uri="{FF2B5EF4-FFF2-40B4-BE49-F238E27FC236}">
-                  <a16:creationId xmlns:a16="http://schemas.microsoft.com/office/drawing/2014/main" id="{AB3CBD43-BA80-2582-2ADF-AF0F57D1FD8A}"/>
-                </a:ext>
-              </a:extLst>
-            </p:cNvPr>
-            <p:cNvCxnSpPr>
-              <a:cxnSpLocks/>
-              <a:stCxn id="142" idx="3"/>
-              <a:endCxn id="150" idx="7"/>
-            </p:cNvCxnSpPr>
-            <p:nvPr/>
-          </p:nvCxnSpPr>
-          <p:spPr>
-            <a:xfrm flipH="1">
-              <a:off x="7579411" y="3000440"/>
-              <a:ext cx="205754" cy="320480"/>
-            </a:xfrm>
-            <a:prstGeom prst="line">
-              <a:avLst/>
-            </a:prstGeom>
-          </p:spPr>
-          <p:style>
-            <a:lnRef idx="1">
-              <a:schemeClr val="accent1"/>
-            </a:lnRef>
-            <a:fillRef idx="0">
-              <a:schemeClr val="accent1"/>
-            </a:fillRef>
-            <a:effectRef idx="0">
-              <a:schemeClr val="accent1"/>
-            </a:effectRef>
-            <a:fontRef idx="minor">
-              <a:schemeClr val="tx1"/>
-            </a:fontRef>
-          </p:style>
-        </p:cxnSp>
-        <p:cxnSp>
-          <p:nvCxnSpPr>
-            <p:cNvPr id="148" name="Straight Connector 147">
-              <a:extLst>
-                <a:ext uri="{FF2B5EF4-FFF2-40B4-BE49-F238E27FC236}">
-                  <a16:creationId xmlns:a16="http://schemas.microsoft.com/office/drawing/2014/main" id="{7FB49634-6F82-E411-BDF1-B77DE6BD0C88}"/>
-                </a:ext>
-              </a:extLst>
-            </p:cNvPr>
-            <p:cNvCxnSpPr>
-              <a:cxnSpLocks/>
-              <a:stCxn id="141" idx="3"/>
-              <a:endCxn id="142" idx="7"/>
-            </p:cNvCxnSpPr>
-            <p:nvPr/>
-          </p:nvCxnSpPr>
-          <p:spPr>
-            <a:xfrm flipH="1">
-              <a:off x="8158192" y="2352621"/>
-              <a:ext cx="394784" cy="274792"/>
-            </a:xfrm>
-            <a:prstGeom prst="line">
-              <a:avLst/>
-            </a:prstGeom>
-          </p:spPr>
-          <p:style>
-            <a:lnRef idx="1">
-              <a:schemeClr val="accent1"/>
-            </a:lnRef>
-            <a:fillRef idx="0">
-              <a:schemeClr val="accent1"/>
-            </a:fillRef>
-            <a:effectRef idx="0">
-              <a:schemeClr val="accent1"/>
-            </a:effectRef>
-            <a:fontRef idx="minor">
-              <a:schemeClr val="tx1"/>
-            </a:fontRef>
-          </p:style>
-        </p:cxnSp>
-        <p:grpSp>
-          <p:nvGrpSpPr>
-            <p:cNvPr id="149" name="Group 148">
-              <a:extLst>
-                <a:ext uri="{FF2B5EF4-FFF2-40B4-BE49-F238E27FC236}">
-                  <a16:creationId xmlns:a16="http://schemas.microsoft.com/office/drawing/2014/main" id="{D4F3CECE-2093-EF1F-E9A1-00F19BA60EB6}"/>
-                </a:ext>
-              </a:extLst>
-            </p:cNvPr>
-            <p:cNvGrpSpPr/>
-            <p:nvPr/>
-          </p:nvGrpSpPr>
-          <p:grpSpPr>
-            <a:xfrm>
-              <a:off x="7115179" y="3243664"/>
-              <a:ext cx="659451" cy="847580"/>
-              <a:chOff x="4067711" y="3179882"/>
-              <a:chExt cx="1099085" cy="1412632"/>
-            </a:xfrm>
-          </p:grpSpPr>
-          <p:sp>
-            <p:nvSpPr>
-              <p:cNvPr id="150" name="Oval 149">
-                <a:extLst>
-                  <a:ext uri="{FF2B5EF4-FFF2-40B4-BE49-F238E27FC236}">
-                    <a16:creationId xmlns:a16="http://schemas.microsoft.com/office/drawing/2014/main" id="{6D5F07BE-6069-47F7-E95B-044D63D98906}"/>
-                  </a:ext>
-                </a:extLst>
-              </p:cNvPr>
-              <p:cNvSpPr/>
-              <p:nvPr/>
-            </p:nvSpPr>
-            <p:spPr>
-              <a:xfrm>
-                <a:off x="4090962" y="3179882"/>
-                <a:ext cx="879231" cy="879231"/>
-              </a:xfrm>
-              <a:prstGeom prst="ellipse">
-                <a:avLst/>
-              </a:prstGeom>
-              <a:solidFill>
-                <a:schemeClr val="tx1"/>
-              </a:solidFill>
-            </p:spPr>
-            <p:style>
-              <a:lnRef idx="2">
-                <a:schemeClr val="accent1">
-                  <a:shade val="15000"/>
-                </a:schemeClr>
-              </a:lnRef>
-              <a:fillRef idx="1">
-                <a:schemeClr val="accent1"/>
-              </a:fillRef>
-              <a:effectRef idx="0">
-                <a:schemeClr val="accent1"/>
-              </a:effectRef>
-              <a:fontRef idx="minor">
-                <a:schemeClr val="lt1"/>
-              </a:fontRef>
-            </p:style>
-            <p:txBody>
-              <a:bodyPr rtlCol="0" anchor="ctr"/>
-              <a:lstStyle/>
-              <a:p>
-                <a:pPr algn="ctr"/>
-                <a:r>
-                  <a:rPr lang="en-US" sz="1080" dirty="0"/>
-                  <a:t>C1</a:t>
-                </a:r>
-              </a:p>
-            </p:txBody>
-          </p:sp>
-          <p:cxnSp>
-            <p:nvCxnSpPr>
-              <p:cNvPr id="151" name="Straight Connector 150">
-                <a:extLst>
-                  <a:ext uri="{FF2B5EF4-FFF2-40B4-BE49-F238E27FC236}">
-                    <a16:creationId xmlns:a16="http://schemas.microsoft.com/office/drawing/2014/main" id="{CF9A58A5-D181-105A-FE90-BA3BF5D5D5FC}"/>
-                  </a:ext>
-                </a:extLst>
-              </p:cNvPr>
-              <p:cNvCxnSpPr>
-                <a:cxnSpLocks/>
-              </p:cNvCxnSpPr>
-              <p:nvPr/>
-            </p:nvCxnSpPr>
-            <p:spPr>
-              <a:xfrm flipH="1">
-                <a:off x="4067711" y="4019741"/>
-                <a:ext cx="292493" cy="572773"/>
-              </a:xfrm>
-              <a:prstGeom prst="line">
-                <a:avLst/>
-              </a:prstGeom>
-            </p:spPr>
-            <p:style>
-              <a:lnRef idx="1">
-                <a:schemeClr val="accent1"/>
-              </a:lnRef>
-              <a:fillRef idx="0">
-                <a:schemeClr val="accent1"/>
-              </a:fillRef>
-              <a:effectRef idx="0">
-                <a:schemeClr val="accent1"/>
-              </a:effectRef>
-              <a:fontRef idx="minor">
-                <a:schemeClr val="tx1"/>
-              </a:fontRef>
-            </p:style>
-          </p:cxnSp>
-          <p:cxnSp>
-            <p:nvCxnSpPr>
-              <p:cNvPr id="152" name="Straight Connector 151">
-                <a:extLst>
-                  <a:ext uri="{FF2B5EF4-FFF2-40B4-BE49-F238E27FC236}">
-                    <a16:creationId xmlns:a16="http://schemas.microsoft.com/office/drawing/2014/main" id="{46694E59-C20F-E220-B5CE-9D3B91E45F25}"/>
-                  </a:ext>
-                </a:extLst>
-              </p:cNvPr>
-              <p:cNvCxnSpPr>
-                <a:cxnSpLocks/>
-                <a:stCxn id="150" idx="5"/>
-              </p:cNvCxnSpPr>
-              <p:nvPr/>
-            </p:nvCxnSpPr>
-            <p:spPr>
-              <a:xfrm>
-                <a:off x="4841433" y="3930353"/>
-                <a:ext cx="325363" cy="662161"/>
-              </a:xfrm>
-              <a:prstGeom prst="line">
-                <a:avLst/>
-              </a:prstGeom>
-            </p:spPr>
-            <p:style>
-              <a:lnRef idx="1">
-                <a:schemeClr val="accent1"/>
-              </a:lnRef>
-              <a:fillRef idx="0">
-                <a:schemeClr val="accent1"/>
-              </a:fillRef>
-              <a:effectRef idx="0">
-                <a:schemeClr val="accent1"/>
-              </a:effectRef>
-              <a:fontRef idx="minor">
-                <a:schemeClr val="tx1"/>
-              </a:fontRef>
-            </p:style>
-          </p:cxnSp>
-        </p:grpSp>
-        <p:cxnSp>
-          <p:nvCxnSpPr>
-            <p:cNvPr id="153" name="Straight Connector 152">
-              <a:extLst>
-                <a:ext uri="{FF2B5EF4-FFF2-40B4-BE49-F238E27FC236}">
-                  <a16:creationId xmlns:a16="http://schemas.microsoft.com/office/drawing/2014/main" id="{42124AF9-13FC-A3E9-8ED3-65296B2F02EF}"/>
-                </a:ext>
-              </a:extLst>
-            </p:cNvPr>
-            <p:cNvCxnSpPr>
-              <a:cxnSpLocks/>
-              <a:stCxn id="143" idx="3"/>
-            </p:cNvCxnSpPr>
-            <p:nvPr/>
-          </p:nvCxnSpPr>
-          <p:spPr>
-            <a:xfrm flipH="1">
-              <a:off x="9734212" y="3679758"/>
-              <a:ext cx="77256" cy="356708"/>
-            </a:xfrm>
-            <a:prstGeom prst="line">
-              <a:avLst/>
-            </a:prstGeom>
-          </p:spPr>
-          <p:style>
-            <a:lnRef idx="1">
-              <a:schemeClr val="accent1"/>
-            </a:lnRef>
-            <a:fillRef idx="0">
-              <a:schemeClr val="accent1"/>
-            </a:fillRef>
-            <a:effectRef idx="0">
-              <a:schemeClr val="accent1"/>
-            </a:effectRef>
-            <a:fontRef idx="minor">
-              <a:schemeClr val="tx1"/>
-            </a:fontRef>
-          </p:style>
-        </p:cxnSp>
-        <p:cxnSp>
-          <p:nvCxnSpPr>
-            <p:cNvPr id="154" name="Straight Connector 153">
-              <a:extLst>
-                <a:ext uri="{FF2B5EF4-FFF2-40B4-BE49-F238E27FC236}">
-                  <a16:creationId xmlns:a16="http://schemas.microsoft.com/office/drawing/2014/main" id="{D2DBA4E2-BC70-55A3-D8D3-E66348FC4DD3}"/>
-                </a:ext>
-              </a:extLst>
-            </p:cNvPr>
-            <p:cNvCxnSpPr>
-              <a:cxnSpLocks/>
-            </p:cNvCxnSpPr>
-            <p:nvPr/>
-          </p:nvCxnSpPr>
-          <p:spPr>
-            <a:xfrm>
-              <a:off x="10128511" y="3713738"/>
-              <a:ext cx="190367" cy="307280"/>
-            </a:xfrm>
-            <a:prstGeom prst="line">
-              <a:avLst/>
-            </a:prstGeom>
-          </p:spPr>
-          <p:style>
-            <a:lnRef idx="1">
-              <a:schemeClr val="accent1"/>
-            </a:lnRef>
-            <a:fillRef idx="0">
-              <a:schemeClr val="accent1"/>
-            </a:fillRef>
-            <a:effectRef idx="0">
-              <a:schemeClr val="accent1"/>
-            </a:effectRef>
-            <a:fontRef idx="minor">
-              <a:schemeClr val="tx1"/>
-            </a:fontRef>
-          </p:style>
-        </p:cxnSp>
-        <p:cxnSp>
-          <p:nvCxnSpPr>
-            <p:cNvPr id="155" name="Straight Connector 154">
-              <a:extLst>
-                <a:ext uri="{FF2B5EF4-FFF2-40B4-BE49-F238E27FC236}">
-                  <a16:creationId xmlns:a16="http://schemas.microsoft.com/office/drawing/2014/main" id="{7AB470B6-A9DC-E1C1-1433-9E0E1BE73EAC}"/>
-                </a:ext>
-              </a:extLst>
-            </p:cNvPr>
-            <p:cNvCxnSpPr>
-              <a:cxnSpLocks/>
-            </p:cNvCxnSpPr>
-            <p:nvPr/>
-          </p:nvCxnSpPr>
-          <p:spPr>
-            <a:xfrm flipH="1">
-              <a:off x="9269999" y="3032191"/>
-              <a:ext cx="110807" cy="256241"/>
-            </a:xfrm>
-            <a:prstGeom prst="line">
-              <a:avLst/>
-            </a:prstGeom>
-          </p:spPr>
-          <p:style>
-            <a:lnRef idx="1">
-              <a:schemeClr val="accent1"/>
-            </a:lnRef>
-            <a:fillRef idx="0">
-              <a:schemeClr val="accent1"/>
-            </a:fillRef>
-            <a:effectRef idx="0">
-              <a:schemeClr val="accent1"/>
-            </a:effectRef>
-            <a:fontRef idx="minor">
-              <a:schemeClr val="tx1"/>
-            </a:fontRef>
-          </p:style>
-        </p:cxnSp>
-        <p:sp>
-          <p:nvSpPr>
-            <p:cNvPr id="156" name="Oval 155">
-              <a:extLst>
-                <a:ext uri="{FF2B5EF4-FFF2-40B4-BE49-F238E27FC236}">
-                  <a16:creationId xmlns:a16="http://schemas.microsoft.com/office/drawing/2014/main" id="{DBF81A65-BEE8-0891-3534-E8000B420677}"/>
-                </a:ext>
-              </a:extLst>
-            </p:cNvPr>
-            <p:cNvSpPr/>
-            <p:nvPr/>
-          </p:nvSpPr>
-          <p:spPr>
-            <a:xfrm>
-              <a:off x="8026914" y="3284151"/>
-              <a:ext cx="527539" cy="527539"/>
-            </a:xfrm>
-            <a:prstGeom prst="ellipse">
-              <a:avLst/>
-            </a:prstGeom>
-            <a:solidFill>
-              <a:schemeClr val="tx1"/>
-            </a:solidFill>
-          </p:spPr>
-          <p:style>
-            <a:lnRef idx="2">
-              <a:schemeClr val="accent1">
-                <a:shade val="15000"/>
-              </a:schemeClr>
-            </a:lnRef>
-            <a:fillRef idx="1">
-              <a:schemeClr val="accent1"/>
-            </a:fillRef>
-            <a:effectRef idx="0">
-              <a:schemeClr val="accent1"/>
-            </a:effectRef>
-            <a:fontRef idx="minor">
-              <a:schemeClr val="lt1"/>
-            </a:fontRef>
-          </p:style>
-          <p:txBody>
-            <a:bodyPr rtlCol="0" anchor="ctr"/>
-            <a:lstStyle/>
-            <a:p>
-              <a:pPr algn="ctr"/>
-              <a:r>
-                <a:rPr lang="en-US" sz="1080" dirty="0"/>
-                <a:t>C2</a:t>
-              </a:r>
-            </a:p>
-          </p:txBody>
-        </p:sp>
-        <p:cxnSp>
-          <p:nvCxnSpPr>
-            <p:cNvPr id="157" name="Straight Connector 156">
-              <a:extLst>
-                <a:ext uri="{FF2B5EF4-FFF2-40B4-BE49-F238E27FC236}">
-                  <a16:creationId xmlns:a16="http://schemas.microsoft.com/office/drawing/2014/main" id="{18108CBB-FA30-E944-E3BD-A53465B5E4D7}"/>
-                </a:ext>
-              </a:extLst>
-            </p:cNvPr>
-            <p:cNvCxnSpPr>
-              <a:cxnSpLocks/>
-            </p:cNvCxnSpPr>
-            <p:nvPr/>
-          </p:nvCxnSpPr>
-          <p:spPr>
-            <a:xfrm flipH="1">
-              <a:off x="8047672" y="3777878"/>
-              <a:ext cx="82076" cy="240263"/>
-            </a:xfrm>
-            <a:prstGeom prst="line">
-              <a:avLst/>
-            </a:prstGeom>
-          </p:spPr>
-          <p:style>
-            <a:lnRef idx="1">
-              <a:schemeClr val="accent1"/>
-            </a:lnRef>
-            <a:fillRef idx="0">
-              <a:schemeClr val="accent1"/>
-            </a:fillRef>
-            <a:effectRef idx="0">
-              <a:schemeClr val="accent1"/>
-            </a:effectRef>
-            <a:fontRef idx="minor">
-              <a:schemeClr val="tx1"/>
-            </a:fontRef>
-          </p:style>
-        </p:cxnSp>
-        <p:cxnSp>
-          <p:nvCxnSpPr>
-            <p:cNvPr id="158" name="Straight Connector 157">
-              <a:extLst>
-                <a:ext uri="{FF2B5EF4-FFF2-40B4-BE49-F238E27FC236}">
-                  <a16:creationId xmlns:a16="http://schemas.microsoft.com/office/drawing/2014/main" id="{EAFA0253-235C-FD86-2C8C-DF4CDCC04570}"/>
-                </a:ext>
-              </a:extLst>
-            </p:cNvPr>
-            <p:cNvCxnSpPr>
-              <a:cxnSpLocks/>
-            </p:cNvCxnSpPr>
-            <p:nvPr/>
-          </p:nvCxnSpPr>
-          <p:spPr>
-            <a:xfrm>
-              <a:off x="8492282" y="3755588"/>
-              <a:ext cx="149354" cy="262555"/>
-            </a:xfrm>
-            <a:prstGeom prst="line">
-              <a:avLst/>
-            </a:prstGeom>
-          </p:spPr>
-          <p:style>
-            <a:lnRef idx="1">
-              <a:schemeClr val="accent1"/>
-            </a:lnRef>
-            <a:fillRef idx="0">
-              <a:schemeClr val="accent1"/>
-            </a:fillRef>
-            <a:effectRef idx="0">
-              <a:schemeClr val="accent1"/>
-            </a:effectRef>
-            <a:fontRef idx="minor">
-              <a:schemeClr val="tx1"/>
-            </a:fontRef>
-          </p:style>
-        </p:cxnSp>
-        <p:sp>
-          <p:nvSpPr>
-            <p:cNvPr id="159" name="Oval 158">
-              <a:extLst>
-                <a:ext uri="{FF2B5EF4-FFF2-40B4-BE49-F238E27FC236}">
-                  <a16:creationId xmlns:a16="http://schemas.microsoft.com/office/drawing/2014/main" id="{0462DD6E-D850-EB72-CBD3-A6D1EFB8D833}"/>
-                </a:ext>
-              </a:extLst>
-            </p:cNvPr>
-            <p:cNvSpPr/>
-            <p:nvPr/>
-          </p:nvSpPr>
-          <p:spPr>
-            <a:xfrm>
-              <a:off x="8914680" y="3288287"/>
-              <a:ext cx="527539" cy="527539"/>
-            </a:xfrm>
-            <a:prstGeom prst="ellipse">
-              <a:avLst/>
-            </a:prstGeom>
-            <a:solidFill>
-              <a:schemeClr val="tx1"/>
-            </a:solidFill>
-          </p:spPr>
-          <p:style>
-            <a:lnRef idx="2">
-              <a:schemeClr val="accent1">
-                <a:shade val="15000"/>
-              </a:schemeClr>
-            </a:lnRef>
-            <a:fillRef idx="1">
-              <a:schemeClr val="accent1"/>
-            </a:fillRef>
-            <a:effectRef idx="0">
-              <a:schemeClr val="accent1"/>
-            </a:effectRef>
-            <a:fontRef idx="minor">
-              <a:schemeClr val="lt1"/>
-            </a:fontRef>
-          </p:style>
-          <p:txBody>
-            <a:bodyPr rtlCol="0" anchor="ctr"/>
-            <a:lstStyle/>
-            <a:p>
-              <a:pPr algn="ctr"/>
-              <a:r>
-                <a:rPr lang="en-US" sz="1080" dirty="0"/>
-                <a:t>S</a:t>
-              </a:r>
-            </a:p>
-          </p:txBody>
-        </p:sp>
-        <p:cxnSp>
-          <p:nvCxnSpPr>
-            <p:cNvPr id="160" name="Straight Connector 159">
-              <a:extLst>
-                <a:ext uri="{FF2B5EF4-FFF2-40B4-BE49-F238E27FC236}">
-                  <a16:creationId xmlns:a16="http://schemas.microsoft.com/office/drawing/2014/main" id="{954773B7-40AC-CEAC-15B7-30A0620A1341}"/>
-                </a:ext>
-              </a:extLst>
-            </p:cNvPr>
-            <p:cNvCxnSpPr>
-              <a:cxnSpLocks/>
-            </p:cNvCxnSpPr>
-            <p:nvPr/>
-          </p:nvCxnSpPr>
-          <p:spPr>
-            <a:xfrm flipH="1">
-              <a:off x="8937745" y="3775196"/>
-              <a:ext cx="82076" cy="240263"/>
-            </a:xfrm>
-            <a:prstGeom prst="line">
-              <a:avLst/>
-            </a:prstGeom>
-          </p:spPr>
-          <p:style>
-            <a:lnRef idx="1">
-              <a:schemeClr val="accent1"/>
-            </a:lnRef>
-            <a:fillRef idx="0">
-              <a:schemeClr val="accent1"/>
-            </a:fillRef>
-            <a:effectRef idx="0">
-              <a:schemeClr val="accent1"/>
-            </a:effectRef>
-            <a:fontRef idx="minor">
-              <a:schemeClr val="tx1"/>
-            </a:fontRef>
-          </p:style>
-        </p:cxnSp>
-        <p:cxnSp>
-          <p:nvCxnSpPr>
-            <p:cNvPr id="161" name="Straight Connector 160">
-              <a:extLst>
-                <a:ext uri="{FF2B5EF4-FFF2-40B4-BE49-F238E27FC236}">
-                  <a16:creationId xmlns:a16="http://schemas.microsoft.com/office/drawing/2014/main" id="{3ABCD099-9797-03E6-3120-3A0D2AEC8896}"/>
-                </a:ext>
-              </a:extLst>
-            </p:cNvPr>
-            <p:cNvCxnSpPr>
-              <a:cxnSpLocks/>
-            </p:cNvCxnSpPr>
-            <p:nvPr/>
-          </p:nvCxnSpPr>
-          <p:spPr>
-            <a:xfrm>
-              <a:off x="9343392" y="3752906"/>
-              <a:ext cx="149354" cy="262555"/>
-            </a:xfrm>
-            <a:prstGeom prst="line">
-              <a:avLst/>
-            </a:prstGeom>
-          </p:spPr>
-          <p:style>
-            <a:lnRef idx="1">
-              <a:schemeClr val="accent1"/>
-            </a:lnRef>
-            <a:fillRef idx="0">
-              <a:schemeClr val="accent1"/>
-            </a:fillRef>
-            <a:effectRef idx="0">
-              <a:schemeClr val="accent1"/>
-            </a:effectRef>
-            <a:fontRef idx="minor">
-              <a:schemeClr val="tx1"/>
-            </a:fontRef>
-          </p:style>
-        </p:cxnSp>
-        <p:sp>
-          <p:nvSpPr>
-            <p:cNvPr id="164" name="Arrow: Up 163">
-              <a:extLst>
-                <a:ext uri="{FF2B5EF4-FFF2-40B4-BE49-F238E27FC236}">
-                  <a16:creationId xmlns:a16="http://schemas.microsoft.com/office/drawing/2014/main" id="{010780ED-6012-092C-24E5-4A02AB14FB49}"/>
-                </a:ext>
-              </a:extLst>
-            </p:cNvPr>
-            <p:cNvSpPr/>
-            <p:nvPr/>
-          </p:nvSpPr>
-          <p:spPr>
-            <a:xfrm rot="16200000">
-              <a:off x="5239094" y="1848511"/>
-              <a:ext cx="118938" cy="381104"/>
-            </a:xfrm>
-            <a:prstGeom prst="upArrow">
-              <a:avLst/>
-            </a:prstGeom>
-          </p:spPr>
-          <p:style>
-            <a:lnRef idx="2">
-              <a:schemeClr val="accent1">
-                <a:shade val="15000"/>
-              </a:schemeClr>
-            </a:lnRef>
-            <a:fillRef idx="1">
-              <a:schemeClr val="accent1"/>
-            </a:fillRef>
-            <a:effectRef idx="0">
-              <a:schemeClr val="accent1"/>
-            </a:effectRef>
-            <a:fontRef idx="minor">
-              <a:schemeClr val="lt1"/>
-            </a:fontRef>
-          </p:style>
-          <p:txBody>
-            <a:bodyPr rtlCol="0" anchor="ctr"/>
-            <a:lstStyle/>
-            <a:p>
-              <a:pPr algn="ctr"/>
-              <a:endParaRPr lang="en-US" sz="1080"/>
-            </a:p>
-          </p:txBody>
-        </p:sp>
-        <p:sp>
-          <p:nvSpPr>
-            <p:cNvPr id="165" name="Arrow: Up 164">
-              <a:extLst>
-                <a:ext uri="{FF2B5EF4-FFF2-40B4-BE49-F238E27FC236}">
-                  <a16:creationId xmlns:a16="http://schemas.microsoft.com/office/drawing/2014/main" id="{94CAD78C-3429-D8B4-F506-58DF4E92CD51}"/>
-                </a:ext>
-              </a:extLst>
-            </p:cNvPr>
-            <p:cNvSpPr/>
-            <p:nvPr/>
-          </p:nvSpPr>
-          <p:spPr>
-            <a:xfrm rot="10800000">
-              <a:off x="5628816" y="2206252"/>
-              <a:ext cx="118938" cy="381104"/>
-            </a:xfrm>
-            <a:prstGeom prst="upArrow">
-              <a:avLst/>
-            </a:prstGeom>
-          </p:spPr>
-          <p:style>
-            <a:lnRef idx="2">
-              <a:schemeClr val="accent1">
-                <a:shade val="15000"/>
-              </a:schemeClr>
-            </a:lnRef>
-            <a:fillRef idx="1">
-              <a:schemeClr val="accent1"/>
-            </a:fillRef>
-            <a:effectRef idx="0">
-              <a:schemeClr val="accent1"/>
-            </a:effectRef>
-            <a:fontRef idx="minor">
-              <a:schemeClr val="lt1"/>
-            </a:fontRef>
-          </p:style>
-          <p:txBody>
-            <a:bodyPr rtlCol="0" anchor="ctr"/>
-            <a:lstStyle/>
-            <a:p>
-              <a:pPr algn="ctr"/>
-              <a:endParaRPr lang="en-US" sz="1080"/>
-            </a:p>
-          </p:txBody>
-        </p:sp>
-        <p:sp>
-          <p:nvSpPr>
-            <p:cNvPr id="166" name="TextBox 165">
-              <a:extLst>
-                <a:ext uri="{FF2B5EF4-FFF2-40B4-BE49-F238E27FC236}">
-                  <a16:creationId xmlns:a16="http://schemas.microsoft.com/office/drawing/2014/main" id="{D3AB9132-D406-6537-7708-488E46AFC4AF}"/>
-                </a:ext>
-              </a:extLst>
-            </p:cNvPr>
-            <p:cNvSpPr txBox="1"/>
-            <p:nvPr/>
-          </p:nvSpPr>
-          <p:spPr>
-            <a:xfrm>
-              <a:off x="5495009" y="1974037"/>
-              <a:ext cx="769007" cy="258532"/>
-            </a:xfrm>
-            <a:prstGeom prst="rect">
-              <a:avLst/>
-            </a:prstGeom>
-            <a:noFill/>
-          </p:spPr>
-          <p:txBody>
-            <a:bodyPr wrap="square" rtlCol="0">
-              <a:spAutoFit/>
-            </a:bodyPr>
-            <a:lstStyle/>
-            <a:p>
-              <a:r>
-                <a:rPr lang="en-US" sz="1080" dirty="0"/>
-                <a:t>Recolor</a:t>
-              </a:r>
-            </a:p>
-          </p:txBody>
-        </p:sp>
-        <p:sp>
-          <p:nvSpPr>
-            <p:cNvPr id="167" name="TextBox 166">
-              <a:extLst>
-                <a:ext uri="{FF2B5EF4-FFF2-40B4-BE49-F238E27FC236}">
-                  <a16:creationId xmlns:a16="http://schemas.microsoft.com/office/drawing/2014/main" id="{E1C85E2E-66C1-C5CF-E90A-A9EFB0E5261A}"/>
-                </a:ext>
-              </a:extLst>
-            </p:cNvPr>
-            <p:cNvSpPr txBox="1"/>
-            <p:nvPr/>
-          </p:nvSpPr>
-          <p:spPr>
-            <a:xfrm>
-              <a:off x="3814316" y="4577166"/>
-              <a:ext cx="2449700" cy="258532"/>
-            </a:xfrm>
-            <a:prstGeom prst="rect">
-              <a:avLst/>
-            </a:prstGeom>
-            <a:noFill/>
-          </p:spPr>
-          <p:txBody>
-            <a:bodyPr wrap="square" rtlCol="0">
-              <a:spAutoFit/>
-            </a:bodyPr>
-            <a:lstStyle/>
-            <a:p>
-              <a:r>
-                <a:rPr lang="en-US" sz="1080" dirty="0"/>
-                <a:t>rotation doesn’t change Black height</a:t>
-              </a:r>
-            </a:p>
-          </p:txBody>
-        </p:sp>
-        <p:sp>
-          <p:nvSpPr>
-            <p:cNvPr id="169" name="TextBox 168">
-              <a:extLst>
-                <a:ext uri="{FF2B5EF4-FFF2-40B4-BE49-F238E27FC236}">
-                  <a16:creationId xmlns:a16="http://schemas.microsoft.com/office/drawing/2014/main" id="{37447588-5852-1D8F-C352-2DCDF5B7CD7C}"/>
-                </a:ext>
-              </a:extLst>
-            </p:cNvPr>
-            <p:cNvSpPr txBox="1"/>
-            <p:nvPr/>
-          </p:nvSpPr>
-          <p:spPr>
-            <a:xfrm>
-              <a:off x="7470038" y="4573603"/>
-              <a:ext cx="3066442" cy="258532"/>
-            </a:xfrm>
-            <a:prstGeom prst="rect">
-              <a:avLst/>
-            </a:prstGeom>
-            <a:noFill/>
-          </p:spPr>
-          <p:txBody>
-            <a:bodyPr wrap="square" rtlCol="0">
-              <a:spAutoFit/>
-            </a:bodyPr>
-            <a:lstStyle/>
-            <a:p>
-              <a:r>
-                <a:rPr lang="en-US" sz="1080" dirty="0"/>
-                <a:t>Now we push the extra red into sibling tree</a:t>
-              </a:r>
-            </a:p>
-          </p:txBody>
-        </p:sp>
       </p:grpSp>
+      <p:cxnSp>
+        <p:nvCxnSpPr>
+          <p:cNvPr id="153" name="Straight Connector 152">
+            <a:extLst>
+              <a:ext uri="{FF2B5EF4-FFF2-40B4-BE49-F238E27FC236}">
+                <a16:creationId xmlns:a16="http://schemas.microsoft.com/office/drawing/2014/main" id="{42124AF9-13FC-A3E9-8ED3-65296B2F02EF}"/>
+              </a:ext>
+            </a:extLst>
+          </p:cNvPr>
+          <p:cNvCxnSpPr>
+            <a:cxnSpLocks/>
+            <a:stCxn id="143" idx="3"/>
+          </p:cNvCxnSpPr>
+          <p:nvPr/>
+        </p:nvCxnSpPr>
+        <p:spPr>
+          <a:xfrm flipH="1">
+            <a:off x="12794634" y="4249494"/>
+            <a:ext cx="102020" cy="471048"/>
+          </a:xfrm>
+          <a:prstGeom prst="line">
+            <a:avLst/>
+          </a:prstGeom>
+        </p:spPr>
+        <p:style>
+          <a:lnRef idx="1">
+            <a:schemeClr val="accent1"/>
+          </a:lnRef>
+          <a:fillRef idx="0">
+            <a:schemeClr val="accent1"/>
+          </a:fillRef>
+          <a:effectRef idx="0">
+            <a:schemeClr val="accent1"/>
+          </a:effectRef>
+          <a:fontRef idx="minor">
+            <a:schemeClr val="tx1"/>
+          </a:fontRef>
+        </p:style>
+      </p:cxnSp>
+      <p:cxnSp>
+        <p:nvCxnSpPr>
+          <p:cNvPr id="154" name="Straight Connector 153">
+            <a:extLst>
+              <a:ext uri="{FF2B5EF4-FFF2-40B4-BE49-F238E27FC236}">
+                <a16:creationId xmlns:a16="http://schemas.microsoft.com/office/drawing/2014/main" id="{D2DBA4E2-BC70-55A3-D8D3-E66348FC4DD3}"/>
+              </a:ext>
+            </a:extLst>
+          </p:cNvPr>
+          <p:cNvCxnSpPr>
+            <a:cxnSpLocks/>
+          </p:cNvCxnSpPr>
+          <p:nvPr/>
+        </p:nvCxnSpPr>
+        <p:spPr>
+          <a:xfrm>
+            <a:off x="13315322" y="4294366"/>
+            <a:ext cx="251387" cy="405776"/>
+          </a:xfrm>
+          <a:prstGeom prst="line">
+            <a:avLst/>
+          </a:prstGeom>
+        </p:spPr>
+        <p:style>
+          <a:lnRef idx="1">
+            <a:schemeClr val="accent1"/>
+          </a:lnRef>
+          <a:fillRef idx="0">
+            <a:schemeClr val="accent1"/>
+          </a:fillRef>
+          <a:effectRef idx="0">
+            <a:schemeClr val="accent1"/>
+          </a:effectRef>
+          <a:fontRef idx="minor">
+            <a:schemeClr val="tx1"/>
+          </a:fontRef>
+        </p:style>
+      </p:cxnSp>
+      <p:cxnSp>
+        <p:nvCxnSpPr>
+          <p:cNvPr id="155" name="Straight Connector 154">
+            <a:extLst>
+              <a:ext uri="{FF2B5EF4-FFF2-40B4-BE49-F238E27FC236}">
+                <a16:creationId xmlns:a16="http://schemas.microsoft.com/office/drawing/2014/main" id="{7AB470B6-A9DC-E1C1-1433-9E0E1BE73EAC}"/>
+              </a:ext>
+            </a:extLst>
+          </p:cNvPr>
+          <p:cNvCxnSpPr>
+            <a:cxnSpLocks/>
+          </p:cNvCxnSpPr>
+          <p:nvPr/>
+        </p:nvCxnSpPr>
+        <p:spPr>
+          <a:xfrm flipH="1">
+            <a:off x="12181622" y="3394355"/>
+            <a:ext cx="146325" cy="338377"/>
+          </a:xfrm>
+          <a:prstGeom prst="line">
+            <a:avLst/>
+          </a:prstGeom>
+        </p:spPr>
+        <p:style>
+          <a:lnRef idx="1">
+            <a:schemeClr val="accent1"/>
+          </a:lnRef>
+          <a:fillRef idx="0">
+            <a:schemeClr val="accent1"/>
+          </a:fillRef>
+          <a:effectRef idx="0">
+            <a:schemeClr val="accent1"/>
+          </a:effectRef>
+          <a:fontRef idx="minor">
+            <a:schemeClr val="tx1"/>
+          </a:fontRef>
+        </p:style>
+      </p:cxnSp>
+      <p:sp>
+        <p:nvSpPr>
+          <p:cNvPr id="156" name="Oval 155">
+            <a:extLst>
+              <a:ext uri="{FF2B5EF4-FFF2-40B4-BE49-F238E27FC236}">
+                <a16:creationId xmlns:a16="http://schemas.microsoft.com/office/drawing/2014/main" id="{DBF81A65-BEE8-0891-3534-E8000B420677}"/>
+              </a:ext>
+            </a:extLst>
+          </p:cNvPr>
+          <p:cNvSpPr/>
+          <p:nvPr/>
+        </p:nvSpPr>
+        <p:spPr>
+          <a:xfrm>
+            <a:off x="10540077" y="3727079"/>
+            <a:ext cx="696637" cy="696637"/>
+          </a:xfrm>
+          <a:prstGeom prst="ellipse">
+            <a:avLst/>
+          </a:prstGeom>
+          <a:solidFill>
+            <a:schemeClr val="tx1"/>
+          </a:solidFill>
+        </p:spPr>
+        <p:style>
+          <a:lnRef idx="2">
+            <a:schemeClr val="accent1">
+              <a:shade val="15000"/>
+            </a:schemeClr>
+          </a:lnRef>
+          <a:fillRef idx="1">
+            <a:schemeClr val="accent1"/>
+          </a:fillRef>
+          <a:effectRef idx="0">
+            <a:schemeClr val="accent1"/>
+          </a:effectRef>
+          <a:fontRef idx="minor">
+            <a:schemeClr val="lt1"/>
+          </a:fontRef>
+        </p:style>
+        <p:txBody>
+          <a:bodyPr rtlCol="0" anchor="ctr"/>
+          <a:lstStyle/>
+          <a:p>
+            <a:pPr algn="ctr"/>
+            <a:r>
+              <a:rPr lang="en-US" sz="2000" dirty="0"/>
+              <a:t>C2</a:t>
+            </a:r>
+          </a:p>
+        </p:txBody>
+      </p:sp>
+      <p:cxnSp>
+        <p:nvCxnSpPr>
+          <p:cNvPr id="157" name="Straight Connector 156">
+            <a:extLst>
+              <a:ext uri="{FF2B5EF4-FFF2-40B4-BE49-F238E27FC236}">
+                <a16:creationId xmlns:a16="http://schemas.microsoft.com/office/drawing/2014/main" id="{18108CBB-FA30-E944-E3BD-A53465B5E4D7}"/>
+              </a:ext>
+            </a:extLst>
+          </p:cNvPr>
+          <p:cNvCxnSpPr>
+            <a:cxnSpLocks/>
+          </p:cNvCxnSpPr>
+          <p:nvPr/>
+        </p:nvCxnSpPr>
+        <p:spPr>
+          <a:xfrm flipH="1">
+            <a:off x="10567489" y="4379066"/>
+            <a:ext cx="108385" cy="317277"/>
+          </a:xfrm>
+          <a:prstGeom prst="line">
+            <a:avLst/>
+          </a:prstGeom>
+        </p:spPr>
+        <p:style>
+          <a:lnRef idx="1">
+            <a:schemeClr val="accent1"/>
+          </a:lnRef>
+          <a:fillRef idx="0">
+            <a:schemeClr val="accent1"/>
+          </a:fillRef>
+          <a:effectRef idx="0">
+            <a:schemeClr val="accent1"/>
+          </a:effectRef>
+          <a:fontRef idx="minor">
+            <a:schemeClr val="tx1"/>
+          </a:fontRef>
+        </p:style>
+      </p:cxnSp>
+      <p:cxnSp>
+        <p:nvCxnSpPr>
+          <p:cNvPr id="158" name="Straight Connector 157">
+            <a:extLst>
+              <a:ext uri="{FF2B5EF4-FFF2-40B4-BE49-F238E27FC236}">
+                <a16:creationId xmlns:a16="http://schemas.microsoft.com/office/drawing/2014/main" id="{EAFA0253-235C-FD86-2C8C-DF4CDCC04570}"/>
+              </a:ext>
+            </a:extLst>
+          </p:cNvPr>
+          <p:cNvCxnSpPr>
+            <a:cxnSpLocks/>
+          </p:cNvCxnSpPr>
+          <p:nvPr/>
+        </p:nvCxnSpPr>
+        <p:spPr>
+          <a:xfrm>
+            <a:off x="11154614" y="4349631"/>
+            <a:ext cx="197228" cy="346715"/>
+          </a:xfrm>
+          <a:prstGeom prst="line">
+            <a:avLst/>
+          </a:prstGeom>
+        </p:spPr>
+        <p:style>
+          <a:lnRef idx="1">
+            <a:schemeClr val="accent1"/>
+          </a:lnRef>
+          <a:fillRef idx="0">
+            <a:schemeClr val="accent1"/>
+          </a:fillRef>
+          <a:effectRef idx="0">
+            <a:schemeClr val="accent1"/>
+          </a:effectRef>
+          <a:fontRef idx="minor">
+            <a:schemeClr val="tx1"/>
+          </a:fontRef>
+        </p:style>
+      </p:cxnSp>
+      <p:sp>
+        <p:nvSpPr>
+          <p:cNvPr id="159" name="Oval 158">
+            <a:extLst>
+              <a:ext uri="{FF2B5EF4-FFF2-40B4-BE49-F238E27FC236}">
+                <a16:creationId xmlns:a16="http://schemas.microsoft.com/office/drawing/2014/main" id="{0462DD6E-D850-EB72-CBD3-A6D1EFB8D833}"/>
+              </a:ext>
+            </a:extLst>
+          </p:cNvPr>
+          <p:cNvSpPr/>
+          <p:nvPr/>
+        </p:nvSpPr>
+        <p:spPr>
+          <a:xfrm>
+            <a:off x="11712408" y="3732541"/>
+            <a:ext cx="696637" cy="696637"/>
+          </a:xfrm>
+          <a:prstGeom prst="ellipse">
+            <a:avLst/>
+          </a:prstGeom>
+          <a:solidFill>
+            <a:schemeClr val="tx1"/>
+          </a:solidFill>
+        </p:spPr>
+        <p:style>
+          <a:lnRef idx="2">
+            <a:schemeClr val="accent1">
+              <a:shade val="15000"/>
+            </a:schemeClr>
+          </a:lnRef>
+          <a:fillRef idx="1">
+            <a:schemeClr val="accent1"/>
+          </a:fillRef>
+          <a:effectRef idx="0">
+            <a:schemeClr val="accent1"/>
+          </a:effectRef>
+          <a:fontRef idx="minor">
+            <a:schemeClr val="lt1"/>
+          </a:fontRef>
+        </p:style>
+        <p:txBody>
+          <a:bodyPr rtlCol="0" anchor="ctr"/>
+          <a:lstStyle/>
+          <a:p>
+            <a:pPr algn="ctr"/>
+            <a:r>
+              <a:rPr lang="en-US" sz="4800" dirty="0"/>
+              <a:t>S</a:t>
+            </a:r>
+          </a:p>
+        </p:txBody>
+      </p:sp>
+      <p:cxnSp>
+        <p:nvCxnSpPr>
+          <p:cNvPr id="160" name="Straight Connector 159">
+            <a:extLst>
+              <a:ext uri="{FF2B5EF4-FFF2-40B4-BE49-F238E27FC236}">
+                <a16:creationId xmlns:a16="http://schemas.microsoft.com/office/drawing/2014/main" id="{954773B7-40AC-CEAC-15B7-30A0620A1341}"/>
+              </a:ext>
+            </a:extLst>
+          </p:cNvPr>
+          <p:cNvCxnSpPr>
+            <a:cxnSpLocks/>
+          </p:cNvCxnSpPr>
+          <p:nvPr/>
+        </p:nvCxnSpPr>
+        <p:spPr>
+          <a:xfrm flipH="1">
+            <a:off x="11742867" y="4375524"/>
+            <a:ext cx="108385" cy="317277"/>
+          </a:xfrm>
+          <a:prstGeom prst="line">
+            <a:avLst/>
+          </a:prstGeom>
+        </p:spPr>
+        <p:style>
+          <a:lnRef idx="1">
+            <a:schemeClr val="accent1"/>
+          </a:lnRef>
+          <a:fillRef idx="0">
+            <a:schemeClr val="accent1"/>
+          </a:fillRef>
+          <a:effectRef idx="0">
+            <a:schemeClr val="accent1"/>
+          </a:effectRef>
+          <a:fontRef idx="minor">
+            <a:schemeClr val="tx1"/>
+          </a:fontRef>
+        </p:style>
+      </p:cxnSp>
+      <p:cxnSp>
+        <p:nvCxnSpPr>
+          <p:cNvPr id="161" name="Straight Connector 160">
+            <a:extLst>
+              <a:ext uri="{FF2B5EF4-FFF2-40B4-BE49-F238E27FC236}">
+                <a16:creationId xmlns:a16="http://schemas.microsoft.com/office/drawing/2014/main" id="{3ABCD099-9797-03E6-3120-3A0D2AEC8896}"/>
+              </a:ext>
+            </a:extLst>
+          </p:cNvPr>
+          <p:cNvCxnSpPr>
+            <a:cxnSpLocks/>
+          </p:cNvCxnSpPr>
+          <p:nvPr/>
+        </p:nvCxnSpPr>
+        <p:spPr>
+          <a:xfrm>
+            <a:off x="12278540" y="4346089"/>
+            <a:ext cx="197228" cy="346715"/>
+          </a:xfrm>
+          <a:prstGeom prst="line">
+            <a:avLst/>
+          </a:prstGeom>
+        </p:spPr>
+        <p:style>
+          <a:lnRef idx="1">
+            <a:schemeClr val="accent1"/>
+          </a:lnRef>
+          <a:fillRef idx="0">
+            <a:schemeClr val="accent1"/>
+          </a:fillRef>
+          <a:effectRef idx="0">
+            <a:schemeClr val="accent1"/>
+          </a:effectRef>
+          <a:fontRef idx="minor">
+            <a:schemeClr val="tx1"/>
+          </a:fontRef>
+        </p:style>
+      </p:cxnSp>
+      <p:sp>
+        <p:nvSpPr>
+          <p:cNvPr id="164" name="Arrow: Up 163">
+            <a:extLst>
+              <a:ext uri="{FF2B5EF4-FFF2-40B4-BE49-F238E27FC236}">
+                <a16:creationId xmlns:a16="http://schemas.microsoft.com/office/drawing/2014/main" id="{010780ED-6012-092C-24E5-4A02AB14FB49}"/>
+              </a:ext>
+            </a:extLst>
+          </p:cNvPr>
+          <p:cNvSpPr/>
+          <p:nvPr/>
+        </p:nvSpPr>
+        <p:spPr>
+          <a:xfrm rot="16200000">
+            <a:off x="6858646" y="1831257"/>
+            <a:ext cx="157063" cy="503264"/>
+          </a:xfrm>
+          <a:prstGeom prst="upArrow">
+            <a:avLst/>
+          </a:prstGeom>
+        </p:spPr>
+        <p:style>
+          <a:lnRef idx="2">
+            <a:schemeClr val="accent1">
+              <a:shade val="15000"/>
+            </a:schemeClr>
+          </a:lnRef>
+          <a:fillRef idx="1">
+            <a:schemeClr val="accent1"/>
+          </a:fillRef>
+          <a:effectRef idx="0">
+            <a:schemeClr val="accent1"/>
+          </a:effectRef>
+          <a:fontRef idx="minor">
+            <a:schemeClr val="lt1"/>
+          </a:fontRef>
+        </p:style>
+        <p:txBody>
+          <a:bodyPr rtlCol="0" anchor="ctr"/>
+          <a:lstStyle/>
+          <a:p>
+            <a:pPr algn="ctr"/>
+            <a:endParaRPr lang="en-US" sz="4800"/>
+          </a:p>
+        </p:txBody>
+      </p:sp>
+      <p:sp>
+        <p:nvSpPr>
+          <p:cNvPr id="165" name="Arrow: Up 164">
+            <a:extLst>
+              <a:ext uri="{FF2B5EF4-FFF2-40B4-BE49-F238E27FC236}">
+                <a16:creationId xmlns:a16="http://schemas.microsoft.com/office/drawing/2014/main" id="{94CAD78C-3429-D8B4-F506-58DF4E92CD51}"/>
+              </a:ext>
+            </a:extLst>
+          </p:cNvPr>
+          <p:cNvSpPr/>
+          <p:nvPr/>
+        </p:nvSpPr>
+        <p:spPr>
+          <a:xfrm rot="10800000">
+            <a:off x="7373290" y="2303669"/>
+            <a:ext cx="157063" cy="503264"/>
+          </a:xfrm>
+          <a:prstGeom prst="upArrow">
+            <a:avLst/>
+          </a:prstGeom>
+        </p:spPr>
+        <p:style>
+          <a:lnRef idx="2">
+            <a:schemeClr val="accent1">
+              <a:shade val="15000"/>
+            </a:schemeClr>
+          </a:lnRef>
+          <a:fillRef idx="1">
+            <a:schemeClr val="accent1"/>
+          </a:fillRef>
+          <a:effectRef idx="0">
+            <a:schemeClr val="accent1"/>
+          </a:effectRef>
+          <a:fontRef idx="minor">
+            <a:schemeClr val="lt1"/>
+          </a:fontRef>
+        </p:style>
+        <p:txBody>
+          <a:bodyPr rtlCol="0" anchor="ctr"/>
+          <a:lstStyle/>
+          <a:p>
+            <a:pPr algn="ctr"/>
+            <a:endParaRPr lang="en-US" sz="4800"/>
+          </a:p>
+        </p:txBody>
+      </p:sp>
+      <p:sp>
+        <p:nvSpPr>
+          <p:cNvPr id="166" name="TextBox 165">
+            <a:extLst>
+              <a:ext uri="{FF2B5EF4-FFF2-40B4-BE49-F238E27FC236}">
+                <a16:creationId xmlns:a16="http://schemas.microsoft.com/office/drawing/2014/main" id="{D3AB9132-D406-6537-7708-488E46AFC4AF}"/>
+              </a:ext>
+            </a:extLst>
+          </p:cNvPr>
+          <p:cNvSpPr txBox="1"/>
+          <p:nvPr/>
+        </p:nvSpPr>
+        <p:spPr>
+          <a:xfrm>
+            <a:off x="7256410" y="1586281"/>
+            <a:ext cx="3168522" cy="830997"/>
+          </a:xfrm>
+          <a:prstGeom prst="rect">
+            <a:avLst/>
+          </a:prstGeom>
+          <a:noFill/>
+        </p:spPr>
+        <p:txBody>
+          <a:bodyPr wrap="square" rtlCol="0">
+            <a:spAutoFit/>
+          </a:bodyPr>
+          <a:lstStyle/>
+          <a:p>
+            <a:r>
+              <a:rPr lang="en-US" sz="4800" dirty="0"/>
+              <a:t>Recolor</a:t>
+            </a:r>
+          </a:p>
+        </p:txBody>
+      </p:sp>
+      <p:sp>
+        <p:nvSpPr>
+          <p:cNvPr id="167" name="TextBox 166">
+            <a:extLst>
+              <a:ext uri="{FF2B5EF4-FFF2-40B4-BE49-F238E27FC236}">
+                <a16:creationId xmlns:a16="http://schemas.microsoft.com/office/drawing/2014/main" id="{E1C85E2E-66C1-C5CF-E90A-A9EFB0E5261A}"/>
+              </a:ext>
+            </a:extLst>
+          </p:cNvPr>
+          <p:cNvSpPr txBox="1"/>
+          <p:nvPr/>
+        </p:nvSpPr>
+        <p:spPr>
+          <a:xfrm>
+            <a:off x="2773075" y="4975813"/>
+            <a:ext cx="5495175" cy="1569660"/>
+          </a:xfrm>
+          <a:prstGeom prst="rect">
+            <a:avLst/>
+          </a:prstGeom>
+          <a:noFill/>
+        </p:spPr>
+        <p:txBody>
+          <a:bodyPr wrap="square" rtlCol="0">
+            <a:spAutoFit/>
+          </a:bodyPr>
+          <a:lstStyle/>
+          <a:p>
+            <a:r>
+              <a:rPr lang="en-US" sz="4800" dirty="0"/>
+              <a:t>This rotation doesn’t change Black height</a:t>
+            </a:r>
+          </a:p>
+        </p:txBody>
+      </p:sp>
+      <p:sp>
+        <p:nvSpPr>
+          <p:cNvPr id="169" name="TextBox 168">
+            <a:extLst>
+              <a:ext uri="{FF2B5EF4-FFF2-40B4-BE49-F238E27FC236}">
+                <a16:creationId xmlns:a16="http://schemas.microsoft.com/office/drawing/2014/main" id="{37447588-5852-1D8F-C352-2DCDF5B7CD7C}"/>
+              </a:ext>
+            </a:extLst>
+          </p:cNvPr>
+          <p:cNvSpPr txBox="1"/>
+          <p:nvPr/>
+        </p:nvSpPr>
+        <p:spPr>
+          <a:xfrm>
+            <a:off x="8734426" y="5003502"/>
+            <a:ext cx="6010274" cy="1569660"/>
+          </a:xfrm>
+          <a:prstGeom prst="rect">
+            <a:avLst/>
+          </a:prstGeom>
+          <a:noFill/>
+        </p:spPr>
+        <p:txBody>
+          <a:bodyPr wrap="square" rtlCol="0">
+            <a:spAutoFit/>
+          </a:bodyPr>
+          <a:lstStyle/>
+          <a:p>
+            <a:r>
+              <a:rPr lang="en-US" sz="4800" dirty="0"/>
+              <a:t>Now extra red in sibling tree</a:t>
+            </a:r>
+          </a:p>
+        </p:txBody>
+      </p:sp>
     </p:spTree>
     <p:extLst>
       <p:ext uri="{BB962C8B-B14F-4D97-AF65-F5344CB8AC3E}">
